--- a/assets/结构图/多角色泳道流程-001/example.pptx
+++ b/assets/结构图/多角色泳道流程-001/example.pptx
@@ -2,13 +2,13 @@
 <file path=ppt/presentation.xml><?xml version="1.0" encoding="utf-8"?>
 <p:presentation xmlns:p="http://schemas.openxmlformats.org/presentationml/2006/main">
   <p:sldMasterIdLst>
-    <p:sldMasterId xmlns:r="http://schemas.openxmlformats.org/officeDocument/2006/relationships" id="2147483648" r:id="Re2aaeb04148a4fee"/>
+    <p:sldMasterId xmlns:r="http://schemas.openxmlformats.org/officeDocument/2006/relationships" id="2147483648" r:id="Rf0c5633ba8d04cde"/>
   </p:sldMasterIdLst>
   <p:notesMasterIdLst>
-    <p:notesMasterId xmlns:r="http://schemas.openxmlformats.org/officeDocument/2006/relationships" r:id="R98df66e9f7dc4939"/>
+    <p:notesMasterId xmlns:r="http://schemas.openxmlformats.org/officeDocument/2006/relationships" r:id="R4890ea7f66df45f8"/>
   </p:notesMasterIdLst>
   <p:sldIdLst>
-    <p:sldId xmlns:r="http://schemas.openxmlformats.org/officeDocument/2006/relationships" id="256" r:id="R6ad3f6fa1e29464c"/>
+    <p:sldId xmlns:r="http://schemas.openxmlformats.org/officeDocument/2006/relationships" id="256" r:id="R69bff1a69bff405f"/>
   </p:sldIdLst>
   <p:sldSz cx="12192000" cy="6858000"/>
   <p:notesSz cx="6858000" cy="9144000"/>
@@ -506,7 +506,7 @@
   </p:cSld>
   <p:clrMap bg1="lt1" tx1="dk1" bg2="lt2" tx2="dk2" accent1="accent1" accent2="accent2" accent3="accent3" accent4="accent4" accent5="accent5" accent6="accent6" hlink="hlink" folHlink="folHlink"/>
   <p:sldLayoutIdLst>
-    <p:sldLayoutId xmlns:r="http://schemas.openxmlformats.org/officeDocument/2006/relationships" id="2147483649" r:id="R893252ac6f124565"/>
+    <p:sldLayoutId xmlns:r="http://schemas.openxmlformats.org/officeDocument/2006/relationships" id="2147483649" r:id="R2931924aeb034f06"/>
   </p:sldLayoutIdLst>
   <p:txStyles>
     <p:titleStyle>
@@ -1057,7 +1057,7 @@
           <p:cNvPr id="18" name="">
             <a:extLst xmlns:a="http://schemas.openxmlformats.org/drawingml/2006/main">
               <a:ext uri="{FF2B5EF4-FFF2-40B4-BE49-F238E27FC236}">
-                <a16:creationId xmlns:a16="http://schemas.microsoft.com/office/drawing/2014/main" id="{914B70FB-A82D-4C0E-BBB5-B37907B0A1BB}"/>
+                <a16:creationId xmlns:a16="http://schemas.microsoft.com/office/drawing/2014/main" id="{A03A4E4F-733F-4D26-8871-21E9367BAF3D}"/>
               </a:ext>
             </a:extLst>
           </p:cNvPr>
@@ -1115,7 +1115,7 @@
           <p:cNvPr id="2" name="">
             <a:extLst xmlns:a="http://schemas.openxmlformats.org/drawingml/2006/main">
               <a:ext uri="{FF2B5EF4-FFF2-40B4-BE49-F238E27FC236}">
-                <a16:creationId xmlns:a16="http://schemas.microsoft.com/office/drawing/2014/main" id="{6F8D859A-B376-4D82-B779-42E44E0385BB}"/>
+                <a16:creationId xmlns:a16="http://schemas.microsoft.com/office/drawing/2014/main" id="{4420415C-DA63-45D7-9D8A-619B5510103F}"/>
               </a:ext>
             </a:extLst>
           </p:cNvPr>
@@ -1173,7 +1173,7 @@
           <p:cNvPr id="3" name="">
             <a:extLst xmlns:a="http://schemas.openxmlformats.org/drawingml/2006/main">
               <a:ext uri="{FF2B5EF4-FFF2-40B4-BE49-F238E27FC236}">
-                <a16:creationId xmlns:a16="http://schemas.microsoft.com/office/drawing/2014/main" id="{0848A208-48A1-417B-B3AD-B8BCA6A3F698}"/>
+                <a16:creationId xmlns:a16="http://schemas.microsoft.com/office/drawing/2014/main" id="{007756B2-5531-4A7C-8860-0C301AE1F042}"/>
               </a:ext>
             </a:extLst>
           </p:cNvPr>
@@ -1184,8 +1184,8 @@
         </p:nvSpPr>
         <p:spPr>
           <a:xfrm xmlns:a="http://schemas.openxmlformats.org/drawingml/2006/main">
-            <a:off x="1143000" y="1143000"/>
-            <a:ext cx="3302000" cy="285750"/>
+            <a:off x="1381125" y="1152525"/>
+            <a:ext cx="3222625" cy="285750"/>
           </a:xfrm>
           <a:prstGeom xmlns:a="http://schemas.openxmlformats.org/drawingml/2006/main" prst="rect">
             <a:avLst/>
@@ -1231,7 +1231,7 @@
           <p:cNvPr id="4" name="">
             <a:extLst xmlns:a="http://schemas.openxmlformats.org/drawingml/2006/main">
               <a:ext uri="{FF2B5EF4-FFF2-40B4-BE49-F238E27FC236}">
-                <a16:creationId xmlns:a16="http://schemas.microsoft.com/office/drawing/2014/main" id="{21B3D327-BEDD-48D7-A461-D2457A620CEB}"/>
+                <a16:creationId xmlns:a16="http://schemas.microsoft.com/office/drawing/2014/main" id="{AE0FDA6A-DBEF-4662-ADC8-4F162F6832E8}"/>
               </a:ext>
             </a:extLst>
           </p:cNvPr>
@@ -1242,8 +1242,8 @@
         </p:nvSpPr>
         <p:spPr>
           <a:xfrm xmlns:a="http://schemas.openxmlformats.org/drawingml/2006/main">
-            <a:off x="4445000" y="1143000"/>
-            <a:ext cx="3302000" cy="285750"/>
+            <a:off x="4603750" y="1152525"/>
+            <a:ext cx="3222625" cy="285750"/>
           </a:xfrm>
           <a:prstGeom xmlns:a="http://schemas.openxmlformats.org/drawingml/2006/main" prst="rect">
             <a:avLst/>
@@ -1289,7 +1289,7 @@
           <p:cNvPr id="5" name="">
             <a:extLst xmlns:a="http://schemas.openxmlformats.org/drawingml/2006/main">
               <a:ext uri="{FF2B5EF4-FFF2-40B4-BE49-F238E27FC236}">
-                <a16:creationId xmlns:a16="http://schemas.microsoft.com/office/drawing/2014/main" id="{2E80DC07-981C-4479-8651-84936ECBB210}"/>
+                <a16:creationId xmlns:a16="http://schemas.microsoft.com/office/drawing/2014/main" id="{194A89B6-66CD-4D63-9645-D85B23FAA407}"/>
               </a:ext>
             </a:extLst>
           </p:cNvPr>
@@ -1300,8 +1300,8 @@
         </p:nvSpPr>
         <p:spPr>
           <a:xfrm xmlns:a="http://schemas.openxmlformats.org/drawingml/2006/main">
-            <a:off x="7747000" y="1143000"/>
-            <a:ext cx="3302000" cy="285750"/>
+            <a:off x="7826375" y="1152525"/>
+            <a:ext cx="3222625" cy="285750"/>
           </a:xfrm>
           <a:prstGeom xmlns:a="http://schemas.openxmlformats.org/drawingml/2006/main" prst="rect">
             <a:avLst/>
@@ -1344,10 +1344,10 @@
       </p:sp>
       <p:sp>
         <p:nvSpPr>
-          <p:cNvPr id="6" name="">
+          <p:cNvPr id="6" name="PPAGENT_QA|parent=swimlane-label-0|domains=swimlane-frame,swimlane-content">
             <a:extLst xmlns:a="http://schemas.openxmlformats.org/drawingml/2006/main">
               <a:ext uri="{FF2B5EF4-FFF2-40B4-BE49-F238E27FC236}">
-                <a16:creationId xmlns:a16="http://schemas.microsoft.com/office/drawing/2014/main" id="{EDCB4A98-F590-42EB-BE57-06061EEB675F}"/>
+                <a16:creationId xmlns:a16="http://schemas.microsoft.com/office/drawing/2014/main" id="{6348989C-69F6-43B4-9FD2-B5174BCB0B89}"/>
               </a:ext>
             </a:extLst>
           </p:cNvPr>
@@ -1358,12 +1358,12 @@
         </p:nvSpPr>
         <p:spPr>
           <a:xfrm xmlns:a="http://schemas.openxmlformats.org/drawingml/2006/main">
-            <a:off x="342900" y="1428750"/>
-            <a:ext cx="666750" cy="1047750"/>
+            <a:off x="419100" y="1476375"/>
+            <a:ext cx="781050" cy="971550"/>
           </a:xfrm>
           <a:prstGeom xmlns:a="http://schemas.openxmlformats.org/drawingml/2006/main" prst="roundRect">
             <a:avLst>
-              <a:gd name="adj" fmla="val 17143"/>
+              <a:gd name="adj" fmla="val 14634"/>
             </a:avLst>
           </a:prstGeom>
           <a:solidFill xmlns:a="http://schemas.openxmlformats.org/drawingml/2006/main">
@@ -1406,10 +1406,10 @@
       </p:sp>
       <p:sp>
         <p:nvSpPr>
-          <p:cNvPr id="7" name="">
+          <p:cNvPr id="7" name="PPAGENT_QA|parent=swimlane-background-0|domains=swimlane-frame">
             <a:extLst xmlns:a="http://schemas.openxmlformats.org/drawingml/2006/main">
               <a:ext uri="{FF2B5EF4-FFF2-40B4-BE49-F238E27FC236}">
-                <a16:creationId xmlns:a16="http://schemas.microsoft.com/office/drawing/2014/main" id="{A7D91D43-1782-4237-8592-34AF5BB50811}"/>
+                <a16:creationId xmlns:a16="http://schemas.microsoft.com/office/drawing/2014/main" id="{BB9A405C-26E5-45A3-8B8F-82C679DCEEC0}"/>
               </a:ext>
             </a:extLst>
           </p:cNvPr>
@@ -1420,29 +1420,29 @@
         </p:nvSpPr>
         <p:spPr>
           <a:xfrm xmlns:a="http://schemas.openxmlformats.org/drawingml/2006/main">
-            <a:off x="1143000" y="1428750"/>
-            <a:ext cx="9906000" cy="1047750"/>
+            <a:off x="1381125" y="1476375"/>
+            <a:ext cx="9667875" cy="971550"/>
           </a:xfrm>
           <a:prstGeom xmlns:a="http://schemas.openxmlformats.org/drawingml/2006/main" prst="rect">
             <a:avLst/>
           </a:prstGeom>
           <a:solidFill xmlns:a="http://schemas.openxmlformats.org/drawingml/2006/main">
-            <a:srgbClr val="FFFFFF"/>
+            <a:srgbClr val="F8FBFF"/>
           </a:solidFill>
           <a:ln xmlns:a="http://schemas.openxmlformats.org/drawingml/2006/main" w="9525">
             <a:solidFill>
               <a:srgbClr val="C9D5E3"/>
             </a:solidFill>
-            <a:prstDash val="dash"/>
+            <a:prstDash val="solid"/>
           </a:ln>
         </p:spPr>
       </p:sp>
       <p:sp>
         <p:nvSpPr>
-          <p:cNvPr id="8" name="">
+          <p:cNvPr id="8" name="PPAGENT_QA|parent=swimlane-label-1|domains=swimlane-frame,swimlane-content">
             <a:extLst xmlns:a="http://schemas.openxmlformats.org/drawingml/2006/main">
               <a:ext uri="{FF2B5EF4-FFF2-40B4-BE49-F238E27FC236}">
-                <a16:creationId xmlns:a16="http://schemas.microsoft.com/office/drawing/2014/main" id="{1A1D441C-CE42-4DF1-9093-989876642DBF}"/>
+                <a16:creationId xmlns:a16="http://schemas.microsoft.com/office/drawing/2014/main" id="{E7C5DBBB-834B-439A-ABB4-2042154CC23A}"/>
               </a:ext>
             </a:extLst>
           </p:cNvPr>
@@ -1453,12 +1453,12 @@
         </p:nvSpPr>
         <p:spPr>
           <a:xfrm xmlns:a="http://schemas.openxmlformats.org/drawingml/2006/main">
-            <a:off x="342900" y="2552700"/>
-            <a:ext cx="666750" cy="1047750"/>
+            <a:off x="419100" y="2543175"/>
+            <a:ext cx="781050" cy="971550"/>
           </a:xfrm>
           <a:prstGeom xmlns:a="http://schemas.openxmlformats.org/drawingml/2006/main" prst="roundRect">
             <a:avLst>
-              <a:gd name="adj" fmla="val 17143"/>
+              <a:gd name="adj" fmla="val 14634"/>
             </a:avLst>
           </a:prstGeom>
           <a:solidFill xmlns:a="http://schemas.openxmlformats.org/drawingml/2006/main">
@@ -1501,10 +1501,10 @@
       </p:sp>
       <p:sp>
         <p:nvSpPr>
-          <p:cNvPr id="9" name="">
+          <p:cNvPr id="9" name="PPAGENT_QA|parent=swimlane-background-1|domains=swimlane-frame">
             <a:extLst xmlns:a="http://schemas.openxmlformats.org/drawingml/2006/main">
               <a:ext uri="{FF2B5EF4-FFF2-40B4-BE49-F238E27FC236}">
-                <a16:creationId xmlns:a16="http://schemas.microsoft.com/office/drawing/2014/main" id="{8BA0F11A-4E11-48A6-9CD2-59878DDA9FE0}"/>
+                <a16:creationId xmlns:a16="http://schemas.microsoft.com/office/drawing/2014/main" id="{30A79CA8-6E75-4113-9F2D-F0D8A286BBCD}"/>
               </a:ext>
             </a:extLst>
           </p:cNvPr>
@@ -1515,29 +1515,29 @@
         </p:nvSpPr>
         <p:spPr>
           <a:xfrm xmlns:a="http://schemas.openxmlformats.org/drawingml/2006/main">
-            <a:off x="1143000" y="2552700"/>
-            <a:ext cx="9906000" cy="1047750"/>
+            <a:off x="1381125" y="2543175"/>
+            <a:ext cx="9667875" cy="971550"/>
           </a:xfrm>
           <a:prstGeom xmlns:a="http://schemas.openxmlformats.org/drawingml/2006/main" prst="rect">
             <a:avLst/>
           </a:prstGeom>
           <a:solidFill xmlns:a="http://schemas.openxmlformats.org/drawingml/2006/main">
-            <a:srgbClr val="F1F7FB"/>
+            <a:srgbClr val="EEF4FC"/>
           </a:solidFill>
           <a:ln xmlns:a="http://schemas.openxmlformats.org/drawingml/2006/main" w="9525">
             <a:solidFill>
               <a:srgbClr val="C9D5E3"/>
             </a:solidFill>
-            <a:prstDash val="dash"/>
+            <a:prstDash val="solid"/>
           </a:ln>
         </p:spPr>
       </p:sp>
       <p:sp>
         <p:nvSpPr>
-          <p:cNvPr id="10" name="">
+          <p:cNvPr id="10" name="PPAGENT_QA|parent=swimlane-label-2|domains=swimlane-frame,swimlane-content">
             <a:extLst xmlns:a="http://schemas.openxmlformats.org/drawingml/2006/main">
               <a:ext uri="{FF2B5EF4-FFF2-40B4-BE49-F238E27FC236}">
-                <a16:creationId xmlns:a16="http://schemas.microsoft.com/office/drawing/2014/main" id="{3B6FD630-CE31-4016-B979-2D92B1EA2D14}"/>
+                <a16:creationId xmlns:a16="http://schemas.microsoft.com/office/drawing/2014/main" id="{AEA6B689-9D76-4A8E-9B59-73EEADF83DD3}"/>
               </a:ext>
             </a:extLst>
           </p:cNvPr>
@@ -1548,12 +1548,12 @@
         </p:nvSpPr>
         <p:spPr>
           <a:xfrm xmlns:a="http://schemas.openxmlformats.org/drawingml/2006/main">
-            <a:off x="342900" y="3676650"/>
-            <a:ext cx="666750" cy="1047750"/>
+            <a:off x="419100" y="3609975"/>
+            <a:ext cx="781050" cy="971550"/>
           </a:xfrm>
           <a:prstGeom xmlns:a="http://schemas.openxmlformats.org/drawingml/2006/main" prst="roundRect">
             <a:avLst>
-              <a:gd name="adj" fmla="val 17143"/>
+              <a:gd name="adj" fmla="val 14634"/>
             </a:avLst>
           </a:prstGeom>
           <a:solidFill xmlns:a="http://schemas.openxmlformats.org/drawingml/2006/main">
@@ -1596,10 +1596,10 @@
       </p:sp>
       <p:sp>
         <p:nvSpPr>
-          <p:cNvPr id="11" name="">
+          <p:cNvPr id="11" name="PPAGENT_QA|parent=swimlane-background-2|domains=swimlane-frame">
             <a:extLst xmlns:a="http://schemas.openxmlformats.org/drawingml/2006/main">
               <a:ext uri="{FF2B5EF4-FFF2-40B4-BE49-F238E27FC236}">
-                <a16:creationId xmlns:a16="http://schemas.microsoft.com/office/drawing/2014/main" id="{D7DBD93B-111C-4D02-985C-0507E103C186}"/>
+                <a16:creationId xmlns:a16="http://schemas.microsoft.com/office/drawing/2014/main" id="{B3B48B86-D3B3-4C8A-8779-0479C3AB454D}"/>
               </a:ext>
             </a:extLst>
           </p:cNvPr>
@@ -1610,20 +1610,20 @@
         </p:nvSpPr>
         <p:spPr>
           <a:xfrm xmlns:a="http://schemas.openxmlformats.org/drawingml/2006/main">
-            <a:off x="1143000" y="3676650"/>
-            <a:ext cx="9906000" cy="1047750"/>
+            <a:off x="1381125" y="3609975"/>
+            <a:ext cx="9667875" cy="971550"/>
           </a:xfrm>
           <a:prstGeom xmlns:a="http://schemas.openxmlformats.org/drawingml/2006/main" prst="rect">
             <a:avLst/>
           </a:prstGeom>
           <a:solidFill xmlns:a="http://schemas.openxmlformats.org/drawingml/2006/main">
-            <a:srgbClr val="FFFFFF"/>
+            <a:srgbClr val="F8FBFF"/>
           </a:solidFill>
           <a:ln xmlns:a="http://schemas.openxmlformats.org/drawingml/2006/main" w="9525">
             <a:solidFill>
               <a:srgbClr val="C9D5E3"/>
             </a:solidFill>
-            <a:prstDash val="dash"/>
+            <a:prstDash val="solid"/>
           </a:ln>
         </p:spPr>
       </p:sp>
@@ -1632,7 +1632,7 @@
           <p:cNvPr id="12" name="">
             <a:extLst xmlns:a="http://schemas.openxmlformats.org/drawingml/2006/main">
               <a:ext uri="{FF2B5EF4-FFF2-40B4-BE49-F238E27FC236}">
-                <a16:creationId xmlns:a16="http://schemas.microsoft.com/office/drawing/2014/main" id="{98CFFDCD-A1E5-4B07-8790-43DD68A1EF50}"/>
+                <a16:creationId xmlns:a16="http://schemas.microsoft.com/office/drawing/2014/main" id="{A1248116-5060-43D8-9EC2-205040467DE8}"/>
               </a:ext>
             </a:extLst>
           </p:cNvPr>
@@ -1642,13 +1642,75 @@
           <p:nvPr/>
         </p:nvSpPr>
         <p:spPr>
+          <a:xfrm xmlns:a="http://schemas.openxmlformats.org/drawingml/2006/main" flipV="0">
+            <a:off x="4192587" y="2009775"/>
+            <a:ext cx="822325" cy="1066800"/>
+          </a:xfrm>
+          <a:prstGeom xmlns:a="http://schemas.openxmlformats.org/drawingml/2006/main" prst="line">
+            <a:avLst/>
+          </a:prstGeom>
+          <a:noFill xmlns:a="http://schemas.openxmlformats.org/drawingml/2006/main"/>
+          <a:ln xmlns:a="http://schemas.openxmlformats.org/drawingml/2006/main" w="23813">
+            <a:solidFill>
+              <a:srgbClr val="7C8A9A"/>
+            </a:solidFill>
+            <a:prstDash val="solid"/>
+          </a:ln>
+        </p:spPr>
+      </p:sp>
+      <p:sp>
+        <p:nvSpPr>
+          <p:cNvPr id="13" name="">
+            <a:extLst xmlns:a="http://schemas.openxmlformats.org/drawingml/2006/main">
+              <a:ext uri="{FF2B5EF4-FFF2-40B4-BE49-F238E27FC236}">
+                <a16:creationId xmlns:a16="http://schemas.microsoft.com/office/drawing/2014/main" id="{5347B518-D4AE-42A5-99C2-AA4B28164176}"/>
+              </a:ext>
+            </a:extLst>
+          </p:cNvPr>
+          <p:cNvSpPr>
+            <a:spLocks xmlns:a="http://schemas.openxmlformats.org/drawingml/2006/main" noGrp="1"/>
+          </p:cNvSpPr>
+          <p:nvPr/>
+        </p:nvSpPr>
+        <p:spPr>
+          <a:xfrm xmlns:a="http://schemas.openxmlformats.org/drawingml/2006/main" flipV="0">
+            <a:off x="7415213" y="3076575"/>
+            <a:ext cx="822325" cy="1066800"/>
+          </a:xfrm>
+          <a:prstGeom xmlns:a="http://schemas.openxmlformats.org/drawingml/2006/main" prst="line">
+            <a:avLst/>
+          </a:prstGeom>
+          <a:noFill xmlns:a="http://schemas.openxmlformats.org/drawingml/2006/main"/>
+          <a:ln xmlns:a="http://schemas.openxmlformats.org/drawingml/2006/main" w="23813">
+            <a:solidFill>
+              <a:srgbClr val="7C8A9A"/>
+            </a:solidFill>
+            <a:prstDash val="solid"/>
+          </a:ln>
+        </p:spPr>
+      </p:sp>
+      <p:sp>
+        <p:nvSpPr>
+          <p:cNvPr id="14" name="PPAGENT_QA|parent=swimlane-task-0|domains=swimlane-content">
+            <a:extLst xmlns:a="http://schemas.openxmlformats.org/drawingml/2006/main">
+              <a:ext uri="{FF2B5EF4-FFF2-40B4-BE49-F238E27FC236}">
+                <a16:creationId xmlns:a16="http://schemas.microsoft.com/office/drawing/2014/main" id="{F2104921-824E-43FA-AC9E-17F3042E2096}"/>
+              </a:ext>
+            </a:extLst>
+          </p:cNvPr>
+          <p:cNvSpPr>
+            <a:spLocks xmlns:a="http://schemas.openxmlformats.org/drawingml/2006/main" noGrp="1"/>
+          </p:cNvSpPr>
+          <p:nvPr/>
+        </p:nvSpPr>
+        <p:spPr>
           <a:xfrm xmlns:a="http://schemas.openxmlformats.org/drawingml/2006/main">
-            <a:off x="1746250" y="1581150"/>
-            <a:ext cx="2095500" cy="819150"/>
+            <a:off x="1792288" y="1619250"/>
+            <a:ext cx="2400300" cy="781050"/>
           </a:xfrm>
           <a:prstGeom xmlns:a="http://schemas.openxmlformats.org/drawingml/2006/main" prst="roundRect">
             <a:avLst>
-              <a:gd name="adj" fmla="val 13953"/>
+              <a:gd name="adj" fmla="val 14634"/>
             </a:avLst>
           </a:prstGeom>
           <a:solidFill xmlns:a="http://schemas.openxmlformats.org/drawingml/2006/main">
@@ -1672,7 +1734,7 @@
           <a:lstStyle xmlns:a="http://schemas.openxmlformats.org/drawingml/2006/main"/>
           <a:p xmlns:a="http://schemas.openxmlformats.org/drawingml/2006/main">
             <a:pPr algn="ctr">
-              <a:defRPr sz="1200" b="1">
+              <a:defRPr sz="1350" b="1">
                 <a:solidFill>
                   <a:srgbClr val="FFFFFF"/>
                 </a:solidFill>
@@ -1682,7 +1744,7 @@
               </a:defRPr>
             </a:pPr>
             <a:r>
-              <a:rPr sz="1200" b="1">
+              <a:rPr sz="1350" b="1">
                 <a:solidFill>
                   <a:srgbClr val="FFFFFF"/>
                 </a:solidFill>
@@ -1697,10 +1759,10 @@
       </p:sp>
       <p:sp>
         <p:nvSpPr>
-          <p:cNvPr id="13" name="">
+          <p:cNvPr id="15" name="PPAGENT_QA|parent=swimlane-task-1|domains=swimlane-content">
             <a:extLst xmlns:a="http://schemas.openxmlformats.org/drawingml/2006/main">
               <a:ext uri="{FF2B5EF4-FFF2-40B4-BE49-F238E27FC236}">
-                <a16:creationId xmlns:a16="http://schemas.microsoft.com/office/drawing/2014/main" id="{D8E0B4C7-ACBA-42DA-8168-1B88FF29735F}"/>
+                <a16:creationId xmlns:a16="http://schemas.microsoft.com/office/drawing/2014/main" id="{C2787419-D9AC-4D44-AD4A-01EA0351ECBF}"/>
               </a:ext>
             </a:extLst>
           </p:cNvPr>
@@ -1711,12 +1773,12 @@
         </p:nvSpPr>
         <p:spPr>
           <a:xfrm xmlns:a="http://schemas.openxmlformats.org/drawingml/2006/main">
-            <a:off x="5048250" y="2705100"/>
-            <a:ext cx="2095500" cy="819150"/>
+            <a:off x="5014913" y="2686050"/>
+            <a:ext cx="2400300" cy="781050"/>
           </a:xfrm>
           <a:prstGeom xmlns:a="http://schemas.openxmlformats.org/drawingml/2006/main" prst="roundRect">
             <a:avLst>
-              <a:gd name="adj" fmla="val 13953"/>
+              <a:gd name="adj" fmla="val 14634"/>
             </a:avLst>
           </a:prstGeom>
           <a:solidFill xmlns:a="http://schemas.openxmlformats.org/drawingml/2006/main">
@@ -1740,7 +1802,7 @@
           <a:lstStyle xmlns:a="http://schemas.openxmlformats.org/drawingml/2006/main"/>
           <a:p xmlns:a="http://schemas.openxmlformats.org/drawingml/2006/main">
             <a:pPr algn="ctr">
-              <a:defRPr sz="1200" b="1">
+              <a:defRPr sz="1350" b="1">
                 <a:solidFill>
                   <a:srgbClr val="FFFFFF"/>
                 </a:solidFill>
@@ -1750,7 +1812,7 @@
               </a:defRPr>
             </a:pPr>
             <a:r>
-              <a:rPr sz="1200" b="1">
+              <a:rPr sz="1350" b="1">
                 <a:solidFill>
                   <a:srgbClr val="FFFFFF"/>
                 </a:solidFill>
@@ -1765,10 +1827,10 @@
       </p:sp>
       <p:sp>
         <p:nvSpPr>
-          <p:cNvPr id="14" name="">
+          <p:cNvPr id="16" name="PPAGENT_QA|parent=swimlane-task-2|domains=swimlane-content">
             <a:extLst xmlns:a="http://schemas.openxmlformats.org/drawingml/2006/main">
               <a:ext uri="{FF2B5EF4-FFF2-40B4-BE49-F238E27FC236}">
-                <a16:creationId xmlns:a16="http://schemas.microsoft.com/office/drawing/2014/main" id="{FF60B1C7-CDDD-471C-BA39-BB746AA8755F}"/>
+                <a16:creationId xmlns:a16="http://schemas.microsoft.com/office/drawing/2014/main" id="{78322E9E-5D83-4491-AAEE-B0D64EF7C1D5}"/>
               </a:ext>
             </a:extLst>
           </p:cNvPr>
@@ -1779,12 +1841,12 @@
         </p:nvSpPr>
         <p:spPr>
           <a:xfrm xmlns:a="http://schemas.openxmlformats.org/drawingml/2006/main">
-            <a:off x="8350250" y="3829050"/>
-            <a:ext cx="2095500" cy="819150"/>
+            <a:off x="8237537" y="3752850"/>
+            <a:ext cx="2400300" cy="781050"/>
           </a:xfrm>
           <a:prstGeom xmlns:a="http://schemas.openxmlformats.org/drawingml/2006/main" prst="roundRect">
             <a:avLst>
-              <a:gd name="adj" fmla="val 13953"/>
+              <a:gd name="adj" fmla="val 14634"/>
             </a:avLst>
           </a:prstGeom>
           <a:solidFill xmlns:a="http://schemas.openxmlformats.org/drawingml/2006/main">
@@ -1808,7 +1870,7 @@
           <a:lstStyle xmlns:a="http://schemas.openxmlformats.org/drawingml/2006/main"/>
           <a:p xmlns:a="http://schemas.openxmlformats.org/drawingml/2006/main">
             <a:pPr algn="ctr">
-              <a:defRPr sz="1200" b="1">
+              <a:defRPr sz="1350" b="1">
                 <a:solidFill>
                   <a:srgbClr val="FFFFFF"/>
                 </a:solidFill>
@@ -1818,7 +1880,7 @@
               </a:defRPr>
             </a:pPr>
             <a:r>
-              <a:rPr sz="1200" b="1">
+              <a:rPr sz="1350" b="1">
                 <a:solidFill>
                   <a:srgbClr val="FFFFFF"/>
                 </a:solidFill>
@@ -1831,68 +1893,12 @@
           </a:p>
         </p:txBody>
       </p:sp>
-      <p:cxnSp>
-        <p:nvCxnSpPr>
-          <p:cNvPr id="32" name=""/>
-          <p:cNvCxnSpPr>
-            <a:stCxn xmlns:a="http://schemas.openxmlformats.org/drawingml/2006/main" id="12" idx="3"/>
-            <a:endCxn xmlns:a="http://schemas.openxmlformats.org/drawingml/2006/main" id="13" idx="1"/>
-          </p:cNvCxnSpPr>
-          <p:nvPr/>
-        </p:nvCxnSpPr>
-        <p:spPr>
-          <a:xfrm xmlns:a="http://schemas.openxmlformats.org/drawingml/2006/main">
-            <a:off x="3841750" y="1990725"/>
-            <a:ext cx="1206500" cy="1123950"/>
-          </a:xfrm>
-          <a:prstGeom xmlns:a="http://schemas.openxmlformats.org/drawingml/2006/main" prst="bentConnector3">
-            <a:avLst>
-              <a:gd name="adj1" fmla="val 50000"/>
-            </a:avLst>
-          </a:prstGeom>
-          <a:ln xmlns:a="http://schemas.openxmlformats.org/drawingml/2006/main" w="14288">
-            <a:solidFill>
-              <a:srgbClr val="7C8A9A"/>
-            </a:solidFill>
-            <a:prstDash val="dash"/>
-            <a:tailEnd type="triangle" w="sm" len="sm"/>
-          </a:ln>
-        </p:spPr>
-      </p:cxnSp>
-      <p:cxnSp>
-        <p:nvCxnSpPr>
-          <p:cNvPr id="33" name=""/>
-          <p:cNvCxnSpPr>
-            <a:stCxn xmlns:a="http://schemas.openxmlformats.org/drawingml/2006/main" id="13" idx="3"/>
-            <a:endCxn xmlns:a="http://schemas.openxmlformats.org/drawingml/2006/main" id="14" idx="1"/>
-          </p:cNvCxnSpPr>
-          <p:nvPr/>
-        </p:nvCxnSpPr>
-        <p:spPr>
-          <a:xfrm xmlns:a="http://schemas.openxmlformats.org/drawingml/2006/main">
-            <a:off x="7143750" y="3114675"/>
-            <a:ext cx="1206500" cy="1123950"/>
-          </a:xfrm>
-          <a:prstGeom xmlns:a="http://schemas.openxmlformats.org/drawingml/2006/main" prst="bentConnector3">
-            <a:avLst>
-              <a:gd name="adj1" fmla="val 50000"/>
-            </a:avLst>
-          </a:prstGeom>
-          <a:ln xmlns:a="http://schemas.openxmlformats.org/drawingml/2006/main" w="14288">
-            <a:solidFill>
-              <a:srgbClr val="7C8A9A"/>
-            </a:solidFill>
-            <a:prstDash val="dash"/>
-            <a:tailEnd type="triangle" w="sm" len="sm"/>
-          </a:ln>
-        </p:spPr>
-      </p:cxnSp>
-      <p:sp>
-        <p:nvSpPr>
-          <p:cNvPr id="17" name="">
+      <p:sp>
+        <p:nvSpPr>
+          <p:cNvPr id="17" name="PPAGENT_QA|parent=swimlane-conclusion|domains=swimlane-content">
             <a:extLst xmlns:a="http://schemas.openxmlformats.org/drawingml/2006/main">
               <a:ext uri="{FF2B5EF4-FFF2-40B4-BE49-F238E27FC236}">
-                <a16:creationId xmlns:a16="http://schemas.microsoft.com/office/drawing/2014/main" id="{496C64DF-0883-49D0-BAD1-65B6CC97C869}"/>
+                <a16:creationId xmlns:a16="http://schemas.microsoft.com/office/drawing/2014/main" id="{CCC60267-EC0A-4B64-9B1C-7D3B80EBEEAE}"/>
               </a:ext>
             </a:extLst>
           </p:cNvPr>
@@ -1903,12 +1909,12 @@
         </p:nvSpPr>
         <p:spPr>
           <a:xfrm xmlns:a="http://schemas.openxmlformats.org/drawingml/2006/main">
-            <a:off x="1143000" y="5067300"/>
-            <a:ext cx="9906000" cy="914400"/>
+            <a:off x="1381125" y="4953000"/>
+            <a:ext cx="9667875" cy="1028700"/>
           </a:xfrm>
           <a:prstGeom xmlns:a="http://schemas.openxmlformats.org/drawingml/2006/main" prst="roundRect">
             <a:avLst>
-              <a:gd name="adj" fmla="val 12500"/>
+              <a:gd name="adj" fmla="val 11111"/>
             </a:avLst>
           </a:prstGeom>
           <a:solidFill xmlns:a="http://schemas.openxmlformats.org/drawingml/2006/main">
@@ -1928,7 +1934,7 @@
           <a:lstStyle xmlns:a="http://schemas.openxmlformats.org/drawingml/2006/main"/>
           <a:p xmlns:a="http://schemas.openxmlformats.org/drawingml/2006/main">
             <a:pPr algn="ctr">
-              <a:defRPr sz="1275" b="1">
+              <a:defRPr sz="1350" b="1">
                 <a:solidFill>
                   <a:srgbClr val="1677C8"/>
                 </a:solidFill>
@@ -1938,7 +1944,7 @@
               </a:defRPr>
             </a:pPr>
             <a:r>
-              <a:rPr sz="1275" b="1">
+              <a:rPr sz="1350" b="1">
                 <a:solidFill>
                   <a:srgbClr val="1677C8"/>
                 </a:solidFill>
@@ -1951,7 +1957,7 @@
           </a:p>
           <a:p xmlns:a="http://schemas.openxmlformats.org/drawingml/2006/main">
             <a:pPr algn="ctr">
-              <a:defRPr sz="1275" b="1">
+              <a:defRPr sz="1350" b="1">
                 <a:solidFill>
                   <a:srgbClr val="1677C8"/>
                 </a:solidFill>
@@ -1961,7 +1967,7 @@
               </a:defRPr>
             </a:pPr>
             <a:r>
-              <a:rPr sz="1275" b="1">
+              <a:rPr sz="1350" b="1">
                 <a:solidFill>
                   <a:srgbClr val="1677C8"/>
                 </a:solidFill>
@@ -1977,7 +1983,7 @@
     </p:spTree>
     <p:extLst>
       <p:ext uri="{BB962C8B-B14F-4D97-AF65-F5344CB8AC3E}">
-        <p14:creationId xmlns:p14="http://schemas.microsoft.com/office/powerpoint/2010/main" val="577980458"/>
+        <p14:creationId xmlns:p14="http://schemas.microsoft.com/office/powerpoint/2010/main" val="646505674"/>
       </p:ext>
     </p:extLst>
   </p:cSld>

--- a/assets/结构图/多角色泳道流程-001/example.pptx
+++ b/assets/结构图/多角色泳道流程-001/example.pptx
@@ -2,13 +2,16 @@
 <file path=ppt/presentation.xml><?xml version="1.0" encoding="utf-8"?>
 <p:presentation xmlns:p="http://schemas.openxmlformats.org/presentationml/2006/main">
   <p:sldMasterIdLst>
-    <p:sldMasterId xmlns:r="http://schemas.openxmlformats.org/officeDocument/2006/relationships" id="2147483648" r:id="Rf0c5633ba8d04cde"/>
+    <p:sldMasterId xmlns:r="http://schemas.openxmlformats.org/officeDocument/2006/relationships" id="2147483648" r:id="Rf80e3417d261450f"/>
   </p:sldMasterIdLst>
   <p:notesMasterIdLst>
-    <p:notesMasterId xmlns:r="http://schemas.openxmlformats.org/officeDocument/2006/relationships" r:id="R4890ea7f66df45f8"/>
+    <p:notesMasterId xmlns:r="http://schemas.openxmlformats.org/officeDocument/2006/relationships" r:id="R4014cadb4bc44057"/>
   </p:notesMasterIdLst>
   <p:sldIdLst>
-    <p:sldId xmlns:r="http://schemas.openxmlformats.org/officeDocument/2006/relationships" id="256" r:id="R69bff1a69bff405f"/>
+    <p:sldId xmlns:r="http://schemas.openxmlformats.org/officeDocument/2006/relationships" id="256" r:id="Rb144e6cf21db49d6"/>
+    <p:sldId xmlns:r="http://schemas.openxmlformats.org/officeDocument/2006/relationships" id="257" r:id="R9ea40bff3f2e441c"/>
+    <p:sldId xmlns:r="http://schemas.openxmlformats.org/officeDocument/2006/relationships" id="258" r:id="R3743bc72df2d4244"/>
+    <p:sldId xmlns:r="http://schemas.openxmlformats.org/officeDocument/2006/relationships" id="259" r:id="Rcd66061386394860"/>
   </p:sldIdLst>
   <p:sldSz cx="12192000" cy="6858000"/>
   <p:notesSz cx="6858000" cy="9144000"/>
@@ -468,6 +471,204 @@
 </p:notes>
 </file>
 
+<file path=ppt/notesSlides/notesSlide2.xml><?xml version="1.0" encoding="utf-8"?>
+<p:notes xmlns:p="http://schemas.openxmlformats.org/presentationml/2006/main">
+  <p:cSld>
+    <p:spTree>
+      <p:nvGrpSpPr>
+        <p:cNvPr id="1" name=""/>
+        <p:cNvGrpSpPr/>
+        <p:nvPr/>
+      </p:nvGrpSpPr>
+      <p:grpSpPr>
+        <a:xfrm xmlns:a="http://schemas.openxmlformats.org/drawingml/2006/main"/>
+      </p:grpSpPr>
+      <p:sp>
+        <p:nvSpPr>
+          <p:cNvPr id="2" name="Slide Image Placeholder 1"/>
+          <p:cNvSpPr>
+            <a:spLocks xmlns:a="http://schemas.openxmlformats.org/drawingml/2006/main" noGrp="1"/>
+          </p:cNvSpPr>
+          <p:nvPr>
+            <p:ph type="sldImg" idx="0"/>
+          </p:nvPr>
+        </p:nvSpPr>
+        <p:spPr/>
+      </p:sp>
+      <p:sp>
+        <p:nvSpPr>
+          <p:cNvPr id="3" name="Notes Placeholder 2"/>
+          <p:cNvSpPr>
+            <a:spLocks xmlns:a="http://schemas.openxmlformats.org/drawingml/2006/main" noGrp="1"/>
+          </p:cNvSpPr>
+          <p:nvPr>
+            <p:ph type="body" idx="1"/>
+          </p:nvPr>
+        </p:nvSpPr>
+        <p:spPr/>
+        <p:txBody>
+          <a:bodyPr xmlns:a="http://schemas.openxmlformats.org/drawingml/2006/main"/>
+          <a:lstStyle xmlns:a="http://schemas.openxmlformats.org/drawingml/2006/main"/>
+          <a:p xmlns:a="http://schemas.openxmlformats.org/drawingml/2006/main"/>
+        </p:txBody>
+      </p:sp>
+      <p:sp>
+        <p:nvSpPr>
+          <p:cNvPr id="4" name="Slide Number Placeholder 3"/>
+          <p:cNvSpPr>
+            <a:spLocks xmlns:a="http://schemas.openxmlformats.org/drawingml/2006/main" noGrp="1"/>
+          </p:cNvSpPr>
+          <p:nvPr>
+            <p:ph type="sldNum" idx="5"/>
+          </p:nvPr>
+        </p:nvSpPr>
+        <p:spPr/>
+        <p:txBody>
+          <a:bodyPr xmlns:a="http://schemas.openxmlformats.org/drawingml/2006/main"/>
+          <a:lstStyle xmlns:a="http://schemas.openxmlformats.org/drawingml/2006/main"/>
+          <a:p xmlns:a="http://schemas.openxmlformats.org/drawingml/2006/main"/>
+        </p:txBody>
+      </p:sp>
+    </p:spTree>
+  </p:cSld>
+  <p:clrMapOvr>
+    <a:masterClrMapping xmlns:a="http://schemas.openxmlformats.org/drawingml/2006/main"/>
+  </p:clrMapOvr>
+</p:notes>
+</file>
+
+<file path=ppt/notesSlides/notesSlide3.xml><?xml version="1.0" encoding="utf-8"?>
+<p:notes xmlns:p="http://schemas.openxmlformats.org/presentationml/2006/main">
+  <p:cSld>
+    <p:spTree>
+      <p:nvGrpSpPr>
+        <p:cNvPr id="1" name=""/>
+        <p:cNvGrpSpPr/>
+        <p:nvPr/>
+      </p:nvGrpSpPr>
+      <p:grpSpPr>
+        <a:xfrm xmlns:a="http://schemas.openxmlformats.org/drawingml/2006/main"/>
+      </p:grpSpPr>
+      <p:sp>
+        <p:nvSpPr>
+          <p:cNvPr id="2" name="Slide Image Placeholder 1"/>
+          <p:cNvSpPr>
+            <a:spLocks xmlns:a="http://schemas.openxmlformats.org/drawingml/2006/main" noGrp="1"/>
+          </p:cNvSpPr>
+          <p:nvPr>
+            <p:ph type="sldImg" idx="0"/>
+          </p:nvPr>
+        </p:nvSpPr>
+        <p:spPr/>
+      </p:sp>
+      <p:sp>
+        <p:nvSpPr>
+          <p:cNvPr id="3" name="Notes Placeholder 2"/>
+          <p:cNvSpPr>
+            <a:spLocks xmlns:a="http://schemas.openxmlformats.org/drawingml/2006/main" noGrp="1"/>
+          </p:cNvSpPr>
+          <p:nvPr>
+            <p:ph type="body" idx="1"/>
+          </p:nvPr>
+        </p:nvSpPr>
+        <p:spPr/>
+        <p:txBody>
+          <a:bodyPr xmlns:a="http://schemas.openxmlformats.org/drawingml/2006/main"/>
+          <a:lstStyle xmlns:a="http://schemas.openxmlformats.org/drawingml/2006/main"/>
+          <a:p xmlns:a="http://schemas.openxmlformats.org/drawingml/2006/main"/>
+        </p:txBody>
+      </p:sp>
+      <p:sp>
+        <p:nvSpPr>
+          <p:cNvPr id="4" name="Slide Number Placeholder 3"/>
+          <p:cNvSpPr>
+            <a:spLocks xmlns:a="http://schemas.openxmlformats.org/drawingml/2006/main" noGrp="1"/>
+          </p:cNvSpPr>
+          <p:nvPr>
+            <p:ph type="sldNum" idx="5"/>
+          </p:nvPr>
+        </p:nvSpPr>
+        <p:spPr/>
+        <p:txBody>
+          <a:bodyPr xmlns:a="http://schemas.openxmlformats.org/drawingml/2006/main"/>
+          <a:lstStyle xmlns:a="http://schemas.openxmlformats.org/drawingml/2006/main"/>
+          <a:p xmlns:a="http://schemas.openxmlformats.org/drawingml/2006/main"/>
+        </p:txBody>
+      </p:sp>
+    </p:spTree>
+  </p:cSld>
+  <p:clrMapOvr>
+    <a:masterClrMapping xmlns:a="http://schemas.openxmlformats.org/drawingml/2006/main"/>
+  </p:clrMapOvr>
+</p:notes>
+</file>
+
+<file path=ppt/notesSlides/notesSlide4.xml><?xml version="1.0" encoding="utf-8"?>
+<p:notes xmlns:p="http://schemas.openxmlformats.org/presentationml/2006/main">
+  <p:cSld>
+    <p:spTree>
+      <p:nvGrpSpPr>
+        <p:cNvPr id="1" name=""/>
+        <p:cNvGrpSpPr/>
+        <p:nvPr/>
+      </p:nvGrpSpPr>
+      <p:grpSpPr>
+        <a:xfrm xmlns:a="http://schemas.openxmlformats.org/drawingml/2006/main"/>
+      </p:grpSpPr>
+      <p:sp>
+        <p:nvSpPr>
+          <p:cNvPr id="2" name="Slide Image Placeholder 1"/>
+          <p:cNvSpPr>
+            <a:spLocks xmlns:a="http://schemas.openxmlformats.org/drawingml/2006/main" noGrp="1"/>
+          </p:cNvSpPr>
+          <p:nvPr>
+            <p:ph type="sldImg" idx="0"/>
+          </p:nvPr>
+        </p:nvSpPr>
+        <p:spPr/>
+      </p:sp>
+      <p:sp>
+        <p:nvSpPr>
+          <p:cNvPr id="3" name="Notes Placeholder 2"/>
+          <p:cNvSpPr>
+            <a:spLocks xmlns:a="http://schemas.openxmlformats.org/drawingml/2006/main" noGrp="1"/>
+          </p:cNvSpPr>
+          <p:nvPr>
+            <p:ph type="body" idx="1"/>
+          </p:nvPr>
+        </p:nvSpPr>
+        <p:spPr/>
+        <p:txBody>
+          <a:bodyPr xmlns:a="http://schemas.openxmlformats.org/drawingml/2006/main"/>
+          <a:lstStyle xmlns:a="http://schemas.openxmlformats.org/drawingml/2006/main"/>
+          <a:p xmlns:a="http://schemas.openxmlformats.org/drawingml/2006/main"/>
+        </p:txBody>
+      </p:sp>
+      <p:sp>
+        <p:nvSpPr>
+          <p:cNvPr id="4" name="Slide Number Placeholder 3"/>
+          <p:cNvSpPr>
+            <a:spLocks xmlns:a="http://schemas.openxmlformats.org/drawingml/2006/main" noGrp="1"/>
+          </p:cNvSpPr>
+          <p:nvPr>
+            <p:ph type="sldNum" idx="5"/>
+          </p:nvPr>
+        </p:nvSpPr>
+        <p:spPr/>
+        <p:txBody>
+          <a:bodyPr xmlns:a="http://schemas.openxmlformats.org/drawingml/2006/main"/>
+          <a:lstStyle xmlns:a="http://schemas.openxmlformats.org/drawingml/2006/main"/>
+          <a:p xmlns:a="http://schemas.openxmlformats.org/drawingml/2006/main"/>
+        </p:txBody>
+      </p:sp>
+    </p:spTree>
+  </p:cSld>
+  <p:clrMapOvr>
+    <a:masterClrMapping xmlns:a="http://schemas.openxmlformats.org/drawingml/2006/main"/>
+  </p:clrMapOvr>
+</p:notes>
+</file>
+
 <file path=ppt/slideLayouts/slideLayout1.xml><?xml version="1.0" encoding="utf-8"?>
 <p:sldLayout xmlns:p="http://schemas.openxmlformats.org/presentationml/2006/main" type="title">
   <p:cSld name="Title Slide">
@@ -506,7 +707,7 @@
   </p:cSld>
   <p:clrMap bg1="lt1" tx1="dk1" bg2="lt2" tx2="dk2" accent1="accent1" accent2="accent2" accent3="accent3" accent4="accent4" accent5="accent5" accent6="accent6" hlink="hlink" folHlink="folHlink"/>
   <p:sldLayoutIdLst>
-    <p:sldLayoutId xmlns:r="http://schemas.openxmlformats.org/officeDocument/2006/relationships" id="2147483649" r:id="R2931924aeb034f06"/>
+    <p:sldLayoutId xmlns:r="http://schemas.openxmlformats.org/officeDocument/2006/relationships" id="2147483649" r:id="R2ab93944a77749ba"/>
   </p:sldLayoutIdLst>
   <p:txStyles>
     <p:titleStyle>
@@ -1054,10 +1255,10 @@
       </p:grpSpPr>
       <p:sp>
         <p:nvSpPr>
-          <p:cNvPr id="18" name="">
-            <a:extLst xmlns:a="http://schemas.openxmlformats.org/drawingml/2006/main">
-              <a:ext uri="{FF2B5EF4-FFF2-40B4-BE49-F238E27FC236}">
-                <a16:creationId xmlns:a16="http://schemas.microsoft.com/office/drawing/2014/main" id="{A03A4E4F-733F-4D26-8871-21E9367BAF3D}"/>
+          <p:cNvPr id="17" name="">
+            <a:extLst xmlns:a="http://schemas.openxmlformats.org/drawingml/2006/main">
+              <a:ext uri="{FF2B5EF4-FFF2-40B4-BE49-F238E27FC236}">
+                <a16:creationId xmlns:a16="http://schemas.microsoft.com/office/drawing/2014/main" id="{3BEE3ADB-D4CB-4359-A48A-E654863EE243}"/>
               </a:ext>
             </a:extLst>
           </p:cNvPr>
@@ -1105,7 +1306,7 @@
                 <a:ea typeface="Microsoft YaHei"/>
                 <a:cs typeface="Microsoft YaHei"/>
               </a:rPr>
-              <a:t>AI、规则与代码如何协同</a:t>
+              <a:t>跨角色协同流程</a:t>
             </a:r>
           </a:p>
         </p:txBody>
@@ -1115,7 +1316,7 @@
           <p:cNvPr id="2" name="">
             <a:extLst xmlns:a="http://schemas.openxmlformats.org/drawingml/2006/main">
               <a:ext uri="{FF2B5EF4-FFF2-40B4-BE49-F238E27FC236}">
-                <a16:creationId xmlns:a16="http://schemas.microsoft.com/office/drawing/2014/main" id="{4420415C-DA63-45D7-9D8A-619B5510103F}"/>
+                <a16:creationId xmlns:a16="http://schemas.microsoft.com/office/drawing/2014/main" id="{81CE00D9-926D-4738-9D0D-20706F6A1C95}"/>
               </a:ext>
             </a:extLst>
           </p:cNvPr>
@@ -1173,7 +1374,7 @@
           <p:cNvPr id="3" name="">
             <a:extLst xmlns:a="http://schemas.openxmlformats.org/drawingml/2006/main">
               <a:ext uri="{FF2B5EF4-FFF2-40B4-BE49-F238E27FC236}">
-                <a16:creationId xmlns:a16="http://schemas.microsoft.com/office/drawing/2014/main" id="{007756B2-5531-4A7C-8860-0C301AE1F042}"/>
+                <a16:creationId xmlns:a16="http://schemas.microsoft.com/office/drawing/2014/main" id="{69F57E79-38FF-4DD0-8C0E-322AB1CC2957}"/>
               </a:ext>
             </a:extLst>
           </p:cNvPr>
@@ -1185,7 +1386,7 @@
         <p:spPr>
           <a:xfrm xmlns:a="http://schemas.openxmlformats.org/drawingml/2006/main">
             <a:off x="1381125" y="1152525"/>
-            <a:ext cx="3222625" cy="285750"/>
+            <a:ext cx="4833938" cy="285750"/>
           </a:xfrm>
           <a:prstGeom xmlns:a="http://schemas.openxmlformats.org/drawingml/2006/main" prst="rect">
             <a:avLst/>
@@ -1231,19 +1432,19 @@
           <p:cNvPr id="4" name="">
             <a:extLst xmlns:a="http://schemas.openxmlformats.org/drawingml/2006/main">
               <a:ext uri="{FF2B5EF4-FFF2-40B4-BE49-F238E27FC236}">
-                <a16:creationId xmlns:a16="http://schemas.microsoft.com/office/drawing/2014/main" id="{AE0FDA6A-DBEF-4662-ADC8-4F162F6832E8}"/>
-              </a:ext>
-            </a:extLst>
-          </p:cNvPr>
-          <p:cNvSpPr>
-            <a:spLocks xmlns:a="http://schemas.openxmlformats.org/drawingml/2006/main" noGrp="1"/>
-          </p:cNvSpPr>
-          <p:nvPr/>
-        </p:nvSpPr>
-        <p:spPr>
-          <a:xfrm xmlns:a="http://schemas.openxmlformats.org/drawingml/2006/main">
-            <a:off x="4603750" y="1152525"/>
-            <a:ext cx="3222625" cy="285750"/>
+                <a16:creationId xmlns:a16="http://schemas.microsoft.com/office/drawing/2014/main" id="{4FA86875-598B-4F79-924E-C1E02CFC36B7}"/>
+              </a:ext>
+            </a:extLst>
+          </p:cNvPr>
+          <p:cNvSpPr>
+            <a:spLocks xmlns:a="http://schemas.openxmlformats.org/drawingml/2006/main" noGrp="1"/>
+          </p:cNvSpPr>
+          <p:nvPr/>
+        </p:nvSpPr>
+        <p:spPr>
+          <a:xfrm xmlns:a="http://schemas.openxmlformats.org/drawingml/2006/main">
+            <a:off x="6215063" y="1152525"/>
+            <a:ext cx="4833938" cy="285750"/>
           </a:xfrm>
           <a:prstGeom xmlns:a="http://schemas.openxmlformats.org/drawingml/2006/main" prst="rect">
             <a:avLst/>
@@ -1279,41 +1480,45 @@
                 <a:ea typeface="Microsoft YaHei"/>
                 <a:cs typeface="Microsoft YaHei"/>
               </a:rPr>
-              <a:t>决定</a:t>
+              <a:t>设计</a:t>
             </a:r>
           </a:p>
         </p:txBody>
       </p:sp>
       <p:sp>
         <p:nvSpPr>
-          <p:cNvPr id="5" name="">
-            <a:extLst xmlns:a="http://schemas.openxmlformats.org/drawingml/2006/main">
-              <a:ext uri="{FF2B5EF4-FFF2-40B4-BE49-F238E27FC236}">
-                <a16:creationId xmlns:a16="http://schemas.microsoft.com/office/drawing/2014/main" id="{194A89B6-66CD-4D63-9645-D85B23FAA407}"/>
-              </a:ext>
-            </a:extLst>
-          </p:cNvPr>
-          <p:cNvSpPr>
-            <a:spLocks xmlns:a="http://schemas.openxmlformats.org/drawingml/2006/main" noGrp="1"/>
-          </p:cNvSpPr>
-          <p:nvPr/>
-        </p:nvSpPr>
-        <p:spPr>
-          <a:xfrm xmlns:a="http://schemas.openxmlformats.org/drawingml/2006/main">
-            <a:off x="7826375" y="1152525"/>
-            <a:ext cx="3222625" cy="285750"/>
-          </a:xfrm>
-          <a:prstGeom xmlns:a="http://schemas.openxmlformats.org/drawingml/2006/main" prst="rect">
-            <a:avLst/>
-          </a:prstGeom>
-          <a:noFill xmlns:a="http://schemas.openxmlformats.org/drawingml/2006/main"/>
+          <p:cNvPr id="5" name="PPAGENT_QA|parent=swimlane-label-0|domains=swimlane-frame,swimlane-content">
+            <a:extLst xmlns:a="http://schemas.openxmlformats.org/drawingml/2006/main">
+              <a:ext uri="{FF2B5EF4-FFF2-40B4-BE49-F238E27FC236}">
+                <a16:creationId xmlns:a16="http://schemas.microsoft.com/office/drawing/2014/main" id="{EB1A92BD-EBD5-4E80-8D3B-D2C3703C5BB1}"/>
+              </a:ext>
+            </a:extLst>
+          </p:cNvPr>
+          <p:cNvSpPr>
+            <a:spLocks xmlns:a="http://schemas.openxmlformats.org/drawingml/2006/main" noGrp="1"/>
+          </p:cNvSpPr>
+          <p:nvPr/>
+        </p:nvSpPr>
+        <p:spPr>
+          <a:xfrm xmlns:a="http://schemas.openxmlformats.org/drawingml/2006/main">
+            <a:off x="419100" y="1476375"/>
+            <a:ext cx="781050" cy="971550"/>
+          </a:xfrm>
+          <a:prstGeom xmlns:a="http://schemas.openxmlformats.org/drawingml/2006/main" prst="roundRect">
+            <a:avLst>
+              <a:gd name="adj" fmla="val 14634"/>
+            </a:avLst>
+          </a:prstGeom>
+          <a:solidFill xmlns:a="http://schemas.openxmlformats.org/drawingml/2006/main">
+            <a:srgbClr val="1677C8"/>
+          </a:solidFill>
           <a:ln xmlns:a="http://schemas.openxmlformats.org/drawingml/2006/main" w="0">
             <a:noFill/>
             <a:prstDash val="solid"/>
           </a:ln>
         </p:spPr>
         <p:txBody>
-          <a:bodyPr xmlns:a="http://schemas.openxmlformats.org/drawingml/2006/main" lIns="0" tIns="0" rIns="0" bIns="0" anchor="ctr">
+          <a:bodyPr xmlns:a="http://schemas.openxmlformats.org/drawingml/2006/main" lIns="114300" tIns="76200" rIns="114300" bIns="76200" anchor="ctr">
             <a:normAutofit fontScale="100000"/>
           </a:bodyPr>
           <a:lstStyle xmlns:a="http://schemas.openxmlformats.org/drawingml/2006/main"/>
@@ -1321,7 +1526,7 @@
             <a:pPr algn="ctr">
               <a:defRPr sz="1350" b="1">
                 <a:solidFill>
-                  <a:srgbClr val="475569"/>
+                  <a:srgbClr val="FFFFFF"/>
                 </a:solidFill>
                 <a:latin typeface="Microsoft YaHei"/>
                 <a:ea typeface="Microsoft YaHei"/>
@@ -1331,34 +1536,67 @@
             <a:r>
               <a:rPr sz="1350" b="1">
                 <a:solidFill>
-                  <a:srgbClr val="475569"/>
+                  <a:srgbClr val="FFFFFF"/>
                 </a:solidFill>
                 <a:latin typeface="Microsoft YaHei"/>
                 <a:ea typeface="Microsoft YaHei"/>
                 <a:cs typeface="Microsoft YaHei"/>
               </a:rPr>
-              <a:t>执行</a:t>
+              <a:t>内容团队</a:t>
             </a:r>
           </a:p>
         </p:txBody>
       </p:sp>
       <p:sp>
         <p:nvSpPr>
-          <p:cNvPr id="6" name="PPAGENT_QA|parent=swimlane-label-0|domains=swimlane-frame,swimlane-content">
-            <a:extLst xmlns:a="http://schemas.openxmlformats.org/drawingml/2006/main">
-              <a:ext uri="{FF2B5EF4-FFF2-40B4-BE49-F238E27FC236}">
-                <a16:creationId xmlns:a16="http://schemas.microsoft.com/office/drawing/2014/main" id="{6348989C-69F6-43B4-9FD2-B5174BCB0B89}"/>
-              </a:ext>
-            </a:extLst>
-          </p:cNvPr>
-          <p:cNvSpPr>
-            <a:spLocks xmlns:a="http://schemas.openxmlformats.org/drawingml/2006/main" noGrp="1"/>
-          </p:cNvSpPr>
-          <p:nvPr/>
-        </p:nvSpPr>
-        <p:spPr>
-          <a:xfrm xmlns:a="http://schemas.openxmlformats.org/drawingml/2006/main">
-            <a:off x="419100" y="1476375"/>
+          <p:cNvPr id="6" name="PPAGENT_QA|parent=swimlane-background-0|domains=swimlane-frame">
+            <a:extLst xmlns:a="http://schemas.openxmlformats.org/drawingml/2006/main">
+              <a:ext uri="{FF2B5EF4-FFF2-40B4-BE49-F238E27FC236}">
+                <a16:creationId xmlns:a16="http://schemas.microsoft.com/office/drawing/2014/main" id="{665A4716-C266-477D-85CB-D9F4A2DED236}"/>
+              </a:ext>
+            </a:extLst>
+          </p:cNvPr>
+          <p:cNvSpPr>
+            <a:spLocks xmlns:a="http://schemas.openxmlformats.org/drawingml/2006/main" noGrp="1"/>
+          </p:cNvSpPr>
+          <p:nvPr/>
+        </p:nvSpPr>
+        <p:spPr>
+          <a:xfrm xmlns:a="http://schemas.openxmlformats.org/drawingml/2006/main">
+            <a:off x="1381125" y="1476375"/>
+            <a:ext cx="9667875" cy="971550"/>
+          </a:xfrm>
+          <a:prstGeom xmlns:a="http://schemas.openxmlformats.org/drawingml/2006/main" prst="rect">
+            <a:avLst/>
+          </a:prstGeom>
+          <a:solidFill xmlns:a="http://schemas.openxmlformats.org/drawingml/2006/main">
+            <a:srgbClr val="F8FBFF"/>
+          </a:solidFill>
+          <a:ln xmlns:a="http://schemas.openxmlformats.org/drawingml/2006/main" w="9525">
+            <a:solidFill>
+              <a:srgbClr val="C9D5E3"/>
+            </a:solidFill>
+            <a:prstDash val="solid"/>
+          </a:ln>
+        </p:spPr>
+      </p:sp>
+      <p:sp>
+        <p:nvSpPr>
+          <p:cNvPr id="7" name="PPAGENT_QA|parent=swimlane-label-1|domains=swimlane-frame,swimlane-content">
+            <a:extLst xmlns:a="http://schemas.openxmlformats.org/drawingml/2006/main">
+              <a:ext uri="{FF2B5EF4-FFF2-40B4-BE49-F238E27FC236}">
+                <a16:creationId xmlns:a16="http://schemas.microsoft.com/office/drawing/2014/main" id="{2ED1E8A4-1F5F-4309-A37E-7114A5EC9732}"/>
+              </a:ext>
+            </a:extLst>
+          </p:cNvPr>
+          <p:cNvSpPr>
+            <a:spLocks xmlns:a="http://schemas.openxmlformats.org/drawingml/2006/main" noGrp="1"/>
+          </p:cNvSpPr>
+          <p:nvPr/>
+        </p:nvSpPr>
+        <p:spPr>
+          <a:xfrm xmlns:a="http://schemas.openxmlformats.org/drawingml/2006/main">
+            <a:off x="419100" y="2543175"/>
             <a:ext cx="781050" cy="971550"/>
           </a:xfrm>
           <a:prstGeom xmlns:a="http://schemas.openxmlformats.org/drawingml/2006/main" prst="roundRect">
@@ -1367,7 +1605,7 @@
             </a:avLst>
           </a:prstGeom>
           <a:solidFill xmlns:a="http://schemas.openxmlformats.org/drawingml/2006/main">
-            <a:srgbClr val="1677C8"/>
+            <a:srgbClr val="00A8D8"/>
           </a:solidFill>
           <a:ln xmlns:a="http://schemas.openxmlformats.org/drawingml/2006/main" w="0">
             <a:noFill/>
@@ -1399,35 +1637,35 @@
                 <a:ea typeface="Microsoft YaHei"/>
                 <a:cs typeface="Microsoft YaHei"/>
               </a:rPr>
-              <a:t>AI</a:t>
+              <a:t>视觉团队</a:t>
             </a:r>
           </a:p>
         </p:txBody>
       </p:sp>
       <p:sp>
         <p:nvSpPr>
-          <p:cNvPr id="7" name="PPAGENT_QA|parent=swimlane-background-0|domains=swimlane-frame">
-            <a:extLst xmlns:a="http://schemas.openxmlformats.org/drawingml/2006/main">
-              <a:ext uri="{FF2B5EF4-FFF2-40B4-BE49-F238E27FC236}">
-                <a16:creationId xmlns:a16="http://schemas.microsoft.com/office/drawing/2014/main" id="{BB9A405C-26E5-45A3-8B8F-82C679DCEEC0}"/>
-              </a:ext>
-            </a:extLst>
-          </p:cNvPr>
-          <p:cNvSpPr>
-            <a:spLocks xmlns:a="http://schemas.openxmlformats.org/drawingml/2006/main" noGrp="1"/>
-          </p:cNvSpPr>
-          <p:nvPr/>
-        </p:nvSpPr>
-        <p:spPr>
-          <a:xfrm xmlns:a="http://schemas.openxmlformats.org/drawingml/2006/main">
-            <a:off x="1381125" y="1476375"/>
+          <p:cNvPr id="8" name="PPAGENT_QA|parent=swimlane-background-1|domains=swimlane-frame">
+            <a:extLst xmlns:a="http://schemas.openxmlformats.org/drawingml/2006/main">
+              <a:ext uri="{FF2B5EF4-FFF2-40B4-BE49-F238E27FC236}">
+                <a16:creationId xmlns:a16="http://schemas.microsoft.com/office/drawing/2014/main" id="{704DF207-B6FE-4D89-BC8D-8E7A7FF0F262}"/>
+              </a:ext>
+            </a:extLst>
+          </p:cNvPr>
+          <p:cNvSpPr>
+            <a:spLocks xmlns:a="http://schemas.openxmlformats.org/drawingml/2006/main" noGrp="1"/>
+          </p:cNvSpPr>
+          <p:nvPr/>
+        </p:nvSpPr>
+        <p:spPr>
+          <a:xfrm xmlns:a="http://schemas.openxmlformats.org/drawingml/2006/main">
+            <a:off x="1381125" y="2543175"/>
             <a:ext cx="9667875" cy="971550"/>
           </a:xfrm>
           <a:prstGeom xmlns:a="http://schemas.openxmlformats.org/drawingml/2006/main" prst="rect">
             <a:avLst/>
           </a:prstGeom>
           <a:solidFill xmlns:a="http://schemas.openxmlformats.org/drawingml/2006/main">
-            <a:srgbClr val="F8FBFF"/>
+            <a:srgbClr val="EEF4FC"/>
           </a:solidFill>
           <a:ln xmlns:a="http://schemas.openxmlformats.org/drawingml/2006/main" w="9525">
             <a:solidFill>
@@ -1439,212 +1677,22 @@
       </p:sp>
       <p:sp>
         <p:nvSpPr>
-          <p:cNvPr id="8" name="PPAGENT_QA|parent=swimlane-label-1|domains=swimlane-frame,swimlane-content">
-            <a:extLst xmlns:a="http://schemas.openxmlformats.org/drawingml/2006/main">
-              <a:ext uri="{FF2B5EF4-FFF2-40B4-BE49-F238E27FC236}">
-                <a16:creationId xmlns:a16="http://schemas.microsoft.com/office/drawing/2014/main" id="{E7C5DBBB-834B-439A-ABB4-2042154CC23A}"/>
-              </a:ext>
-            </a:extLst>
-          </p:cNvPr>
-          <p:cNvSpPr>
-            <a:spLocks xmlns:a="http://schemas.openxmlformats.org/drawingml/2006/main" noGrp="1"/>
-          </p:cNvSpPr>
-          <p:nvPr/>
-        </p:nvSpPr>
-        <p:spPr>
-          <a:xfrm xmlns:a="http://schemas.openxmlformats.org/drawingml/2006/main">
-            <a:off x="419100" y="2543175"/>
-            <a:ext cx="781050" cy="971550"/>
-          </a:xfrm>
-          <a:prstGeom xmlns:a="http://schemas.openxmlformats.org/drawingml/2006/main" prst="roundRect">
-            <a:avLst>
-              <a:gd name="adj" fmla="val 14634"/>
-            </a:avLst>
-          </a:prstGeom>
-          <a:solidFill xmlns:a="http://schemas.openxmlformats.org/drawingml/2006/main">
-            <a:srgbClr val="00A8D8"/>
-          </a:solidFill>
-          <a:ln xmlns:a="http://schemas.openxmlformats.org/drawingml/2006/main" w="0">
-            <a:noFill/>
-            <a:prstDash val="solid"/>
-          </a:ln>
-        </p:spPr>
-        <p:txBody>
-          <a:bodyPr xmlns:a="http://schemas.openxmlformats.org/drawingml/2006/main" lIns="114300" tIns="76200" rIns="114300" bIns="76200" anchor="ctr">
-            <a:normAutofit fontScale="100000"/>
-          </a:bodyPr>
-          <a:lstStyle xmlns:a="http://schemas.openxmlformats.org/drawingml/2006/main"/>
-          <a:p xmlns:a="http://schemas.openxmlformats.org/drawingml/2006/main">
-            <a:pPr algn="ctr">
-              <a:defRPr sz="1350" b="1">
-                <a:solidFill>
-                  <a:srgbClr val="FFFFFF"/>
-                </a:solidFill>
-                <a:latin typeface="Microsoft YaHei"/>
-                <a:ea typeface="Microsoft YaHei"/>
-                <a:cs typeface="Microsoft YaHei"/>
-              </a:defRPr>
-            </a:pPr>
-            <a:r>
-              <a:rPr sz="1350" b="1">
-                <a:solidFill>
-                  <a:srgbClr val="FFFFFF"/>
-                </a:solidFill>
-                <a:latin typeface="Microsoft YaHei"/>
-                <a:ea typeface="Microsoft YaHei"/>
-                <a:cs typeface="Microsoft YaHei"/>
-              </a:rPr>
-              <a:t>规则</a:t>
-            </a:r>
-          </a:p>
-        </p:txBody>
-      </p:sp>
-      <p:sp>
-        <p:nvSpPr>
-          <p:cNvPr id="9" name="PPAGENT_QA|parent=swimlane-background-1|domains=swimlane-frame">
-            <a:extLst xmlns:a="http://schemas.openxmlformats.org/drawingml/2006/main">
-              <a:ext uri="{FF2B5EF4-FFF2-40B4-BE49-F238E27FC236}">
-                <a16:creationId xmlns:a16="http://schemas.microsoft.com/office/drawing/2014/main" id="{30A79CA8-6E75-4113-9F2D-F0D8A286BBCD}"/>
-              </a:ext>
-            </a:extLst>
-          </p:cNvPr>
-          <p:cNvSpPr>
-            <a:spLocks xmlns:a="http://schemas.openxmlformats.org/drawingml/2006/main" noGrp="1"/>
-          </p:cNvSpPr>
-          <p:nvPr/>
-        </p:nvSpPr>
-        <p:spPr>
-          <a:xfrm xmlns:a="http://schemas.openxmlformats.org/drawingml/2006/main">
-            <a:off x="1381125" y="2543175"/>
-            <a:ext cx="9667875" cy="971550"/>
-          </a:xfrm>
-          <a:prstGeom xmlns:a="http://schemas.openxmlformats.org/drawingml/2006/main" prst="rect">
-            <a:avLst/>
-          </a:prstGeom>
-          <a:solidFill xmlns:a="http://schemas.openxmlformats.org/drawingml/2006/main">
-            <a:srgbClr val="EEF4FC"/>
-          </a:solidFill>
-          <a:ln xmlns:a="http://schemas.openxmlformats.org/drawingml/2006/main" w="9525">
-            <a:solidFill>
-              <a:srgbClr val="C9D5E3"/>
-            </a:solidFill>
-            <a:prstDash val="solid"/>
-          </a:ln>
-        </p:spPr>
-      </p:sp>
-      <p:sp>
-        <p:nvSpPr>
-          <p:cNvPr id="10" name="PPAGENT_QA|parent=swimlane-label-2|domains=swimlane-frame,swimlane-content">
-            <a:extLst xmlns:a="http://schemas.openxmlformats.org/drawingml/2006/main">
-              <a:ext uri="{FF2B5EF4-FFF2-40B4-BE49-F238E27FC236}">
-                <a16:creationId xmlns:a16="http://schemas.microsoft.com/office/drawing/2014/main" id="{AEA6B689-9D76-4A8E-9B59-73EEADF83DD3}"/>
-              </a:ext>
-            </a:extLst>
-          </p:cNvPr>
-          <p:cNvSpPr>
-            <a:spLocks xmlns:a="http://schemas.openxmlformats.org/drawingml/2006/main" noGrp="1"/>
-          </p:cNvSpPr>
-          <p:nvPr/>
-        </p:nvSpPr>
-        <p:spPr>
-          <a:xfrm xmlns:a="http://schemas.openxmlformats.org/drawingml/2006/main">
-            <a:off x="419100" y="3609975"/>
-            <a:ext cx="781050" cy="971550"/>
-          </a:xfrm>
-          <a:prstGeom xmlns:a="http://schemas.openxmlformats.org/drawingml/2006/main" prst="roundRect">
-            <a:avLst>
-              <a:gd name="adj" fmla="val 14634"/>
-            </a:avLst>
-          </a:prstGeom>
-          <a:solidFill xmlns:a="http://schemas.openxmlformats.org/drawingml/2006/main">
-            <a:srgbClr val="14CBD1"/>
-          </a:solidFill>
-          <a:ln xmlns:a="http://schemas.openxmlformats.org/drawingml/2006/main" w="0">
-            <a:noFill/>
-            <a:prstDash val="solid"/>
-          </a:ln>
-        </p:spPr>
-        <p:txBody>
-          <a:bodyPr xmlns:a="http://schemas.openxmlformats.org/drawingml/2006/main" lIns="114300" tIns="76200" rIns="114300" bIns="76200" anchor="ctr">
-            <a:normAutofit fontScale="100000"/>
-          </a:bodyPr>
-          <a:lstStyle xmlns:a="http://schemas.openxmlformats.org/drawingml/2006/main"/>
-          <a:p xmlns:a="http://schemas.openxmlformats.org/drawingml/2006/main">
-            <a:pPr algn="ctr">
-              <a:defRPr sz="1350" b="1">
-                <a:solidFill>
-                  <a:srgbClr val="FFFFFF"/>
-                </a:solidFill>
-                <a:latin typeface="Microsoft YaHei"/>
-                <a:ea typeface="Microsoft YaHei"/>
-                <a:cs typeface="Microsoft YaHei"/>
-              </a:defRPr>
-            </a:pPr>
-            <a:r>
-              <a:rPr sz="1350" b="1">
-                <a:solidFill>
-                  <a:srgbClr val="FFFFFF"/>
-                </a:solidFill>
-                <a:latin typeface="Microsoft YaHei"/>
-                <a:ea typeface="Microsoft YaHei"/>
-                <a:cs typeface="Microsoft YaHei"/>
-              </a:rPr>
-              <a:t>代码</a:t>
-            </a:r>
-          </a:p>
-        </p:txBody>
-      </p:sp>
-      <p:sp>
-        <p:nvSpPr>
-          <p:cNvPr id="11" name="PPAGENT_QA|parent=swimlane-background-2|domains=swimlane-frame">
-            <a:extLst xmlns:a="http://schemas.openxmlformats.org/drawingml/2006/main">
-              <a:ext uri="{FF2B5EF4-FFF2-40B4-BE49-F238E27FC236}">
-                <a16:creationId xmlns:a16="http://schemas.microsoft.com/office/drawing/2014/main" id="{B3B48B86-D3B3-4C8A-8779-0479C3AB454D}"/>
-              </a:ext>
-            </a:extLst>
-          </p:cNvPr>
-          <p:cNvSpPr>
-            <a:spLocks xmlns:a="http://schemas.openxmlformats.org/drawingml/2006/main" noGrp="1"/>
-          </p:cNvSpPr>
-          <p:nvPr/>
-        </p:nvSpPr>
-        <p:spPr>
-          <a:xfrm xmlns:a="http://schemas.openxmlformats.org/drawingml/2006/main">
-            <a:off x="1381125" y="3609975"/>
-            <a:ext cx="9667875" cy="971550"/>
-          </a:xfrm>
-          <a:prstGeom xmlns:a="http://schemas.openxmlformats.org/drawingml/2006/main" prst="rect">
-            <a:avLst/>
-          </a:prstGeom>
-          <a:solidFill xmlns:a="http://schemas.openxmlformats.org/drawingml/2006/main">
-            <a:srgbClr val="F8FBFF"/>
-          </a:solidFill>
-          <a:ln xmlns:a="http://schemas.openxmlformats.org/drawingml/2006/main" w="9525">
-            <a:solidFill>
-              <a:srgbClr val="C9D5E3"/>
-            </a:solidFill>
-            <a:prstDash val="solid"/>
-          </a:ln>
-        </p:spPr>
-      </p:sp>
-      <p:sp>
-        <p:nvSpPr>
-          <p:cNvPr id="12" name="">
-            <a:extLst xmlns:a="http://schemas.openxmlformats.org/drawingml/2006/main">
-              <a:ext uri="{FF2B5EF4-FFF2-40B4-BE49-F238E27FC236}">
-                <a16:creationId xmlns:a16="http://schemas.microsoft.com/office/drawing/2014/main" id="{A1248116-5060-43D8-9EC2-205040467DE8}"/>
-              </a:ext>
-            </a:extLst>
-          </p:cNvPr>
-          <p:cNvSpPr>
-            <a:spLocks xmlns:a="http://schemas.openxmlformats.org/drawingml/2006/main" noGrp="1"/>
-          </p:cNvSpPr>
-          <p:nvPr/>
-        </p:nvSpPr>
-        <p:spPr>
-          <a:xfrm xmlns:a="http://schemas.openxmlformats.org/drawingml/2006/main" flipV="0">
-            <a:off x="4192587" y="2009775"/>
-            <a:ext cx="822325" cy="1066800"/>
+          <p:cNvPr id="9" name="">
+            <a:extLst xmlns:a="http://schemas.openxmlformats.org/drawingml/2006/main">
+              <a:ext uri="{FF2B5EF4-FFF2-40B4-BE49-F238E27FC236}">
+                <a16:creationId xmlns:a16="http://schemas.microsoft.com/office/drawing/2014/main" id="{241CEEE9-EEFA-43F2-AB7E-C11F9887D365}"/>
+              </a:ext>
+            </a:extLst>
+          </p:cNvPr>
+          <p:cNvSpPr>
+            <a:spLocks xmlns:a="http://schemas.openxmlformats.org/drawingml/2006/main" noGrp="1"/>
+          </p:cNvSpPr>
+          <p:nvPr/>
+        </p:nvSpPr>
+        <p:spPr>
+          <a:xfrm xmlns:a="http://schemas.openxmlformats.org/drawingml/2006/main" flipH="0" flipV="0">
+            <a:off x="4998244" y="2009775"/>
+            <a:ext cx="2433638" cy="0"/>
           </a:xfrm>
           <a:prstGeom xmlns:a="http://schemas.openxmlformats.org/drawingml/2006/main" prst="line">
             <a:avLst/>
@@ -1660,22 +1708,22 @@
       </p:sp>
       <p:sp>
         <p:nvSpPr>
-          <p:cNvPr id="13" name="">
-            <a:extLst xmlns:a="http://schemas.openxmlformats.org/drawingml/2006/main">
-              <a:ext uri="{FF2B5EF4-FFF2-40B4-BE49-F238E27FC236}">
-                <a16:creationId xmlns:a16="http://schemas.microsoft.com/office/drawing/2014/main" id="{5347B518-D4AE-42A5-99C2-AA4B28164176}"/>
-              </a:ext>
-            </a:extLst>
-          </p:cNvPr>
-          <p:cNvSpPr>
-            <a:spLocks xmlns:a="http://schemas.openxmlformats.org/drawingml/2006/main" noGrp="1"/>
-          </p:cNvSpPr>
-          <p:nvPr/>
-        </p:nvSpPr>
-        <p:spPr>
-          <a:xfrm xmlns:a="http://schemas.openxmlformats.org/drawingml/2006/main" flipV="0">
-            <a:off x="7415213" y="3076575"/>
-            <a:ext cx="822325" cy="1066800"/>
+          <p:cNvPr id="10" name="">
+            <a:extLst xmlns:a="http://schemas.openxmlformats.org/drawingml/2006/main">
+              <a:ext uri="{FF2B5EF4-FFF2-40B4-BE49-F238E27FC236}">
+                <a16:creationId xmlns:a16="http://schemas.microsoft.com/office/drawing/2014/main" id="{35DFF853-3DBD-45F8-B9B1-613E3380F990}"/>
+              </a:ext>
+            </a:extLst>
+          </p:cNvPr>
+          <p:cNvSpPr>
+            <a:spLocks xmlns:a="http://schemas.openxmlformats.org/drawingml/2006/main" noGrp="1"/>
+          </p:cNvSpPr>
+          <p:nvPr/>
+        </p:nvSpPr>
+        <p:spPr>
+          <a:xfrm xmlns:a="http://schemas.openxmlformats.org/drawingml/2006/main" flipH="1" flipV="0">
+            <a:off x="2597944" y="2009775"/>
+            <a:ext cx="7234238" cy="1066800"/>
           </a:xfrm>
           <a:prstGeom xmlns:a="http://schemas.openxmlformats.org/drawingml/2006/main" prst="line">
             <a:avLst/>
@@ -1691,21 +1739,52 @@
       </p:sp>
       <p:sp>
         <p:nvSpPr>
-          <p:cNvPr id="14" name="PPAGENT_QA|parent=swimlane-task-0|domains=swimlane-content">
-            <a:extLst xmlns:a="http://schemas.openxmlformats.org/drawingml/2006/main">
-              <a:ext uri="{FF2B5EF4-FFF2-40B4-BE49-F238E27FC236}">
-                <a16:creationId xmlns:a16="http://schemas.microsoft.com/office/drawing/2014/main" id="{F2104921-824E-43FA-AC9E-17F3042E2096}"/>
-              </a:ext>
-            </a:extLst>
-          </p:cNvPr>
-          <p:cNvSpPr>
-            <a:spLocks xmlns:a="http://schemas.openxmlformats.org/drawingml/2006/main" noGrp="1"/>
-          </p:cNvSpPr>
-          <p:nvPr/>
-        </p:nvSpPr>
-        <p:spPr>
-          <a:xfrm xmlns:a="http://schemas.openxmlformats.org/drawingml/2006/main">
-            <a:off x="1792288" y="1619250"/>
+          <p:cNvPr id="11" name="">
+            <a:extLst xmlns:a="http://schemas.openxmlformats.org/drawingml/2006/main">
+              <a:ext uri="{FF2B5EF4-FFF2-40B4-BE49-F238E27FC236}">
+                <a16:creationId xmlns:a16="http://schemas.microsoft.com/office/drawing/2014/main" id="{09FB8BDF-558E-4745-A78B-D0DD6B9619F3}"/>
+              </a:ext>
+            </a:extLst>
+          </p:cNvPr>
+          <p:cNvSpPr>
+            <a:spLocks xmlns:a="http://schemas.openxmlformats.org/drawingml/2006/main" noGrp="1"/>
+          </p:cNvSpPr>
+          <p:nvPr/>
+        </p:nvSpPr>
+        <p:spPr>
+          <a:xfrm xmlns:a="http://schemas.openxmlformats.org/drawingml/2006/main" flipH="0" flipV="0">
+            <a:off x="4998244" y="3076575"/>
+            <a:ext cx="2433638" cy="0"/>
+          </a:xfrm>
+          <a:prstGeom xmlns:a="http://schemas.openxmlformats.org/drawingml/2006/main" prst="line">
+            <a:avLst/>
+          </a:prstGeom>
+          <a:noFill xmlns:a="http://schemas.openxmlformats.org/drawingml/2006/main"/>
+          <a:ln xmlns:a="http://schemas.openxmlformats.org/drawingml/2006/main" w="23813">
+            <a:solidFill>
+              <a:srgbClr val="7C8A9A"/>
+            </a:solidFill>
+            <a:prstDash val="solid"/>
+          </a:ln>
+        </p:spPr>
+      </p:sp>
+      <p:sp>
+        <p:nvSpPr>
+          <p:cNvPr id="12" name="PPAGENT_QA|parent=swimlane-task-0|domains=swimlane-content">
+            <a:extLst xmlns:a="http://schemas.openxmlformats.org/drawingml/2006/main">
+              <a:ext uri="{FF2B5EF4-FFF2-40B4-BE49-F238E27FC236}">
+                <a16:creationId xmlns:a16="http://schemas.microsoft.com/office/drawing/2014/main" id="{1BE2F6BF-A937-4F79-B2F7-D60098B0BC0B}"/>
+              </a:ext>
+            </a:extLst>
+          </p:cNvPr>
+          <p:cNvSpPr>
+            <a:spLocks xmlns:a="http://schemas.openxmlformats.org/drawingml/2006/main" noGrp="1"/>
+          </p:cNvSpPr>
+          <p:nvPr/>
+        </p:nvSpPr>
+        <p:spPr>
+          <a:xfrm xmlns:a="http://schemas.openxmlformats.org/drawingml/2006/main">
+            <a:off x="2597944" y="1619250"/>
             <a:ext cx="2400300" cy="781050"/>
           </a:xfrm>
           <a:prstGeom xmlns:a="http://schemas.openxmlformats.org/drawingml/2006/main" prst="roundRect">
@@ -1752,28 +1831,28 @@
                 <a:ea typeface="Microsoft YaHei"/>
                 <a:cs typeface="Microsoft YaHei"/>
               </a:rPr>
-              <a:t>读取稿件并判断重点与关系</a:t>
+              <a:t>拆解稿件</a:t>
             </a:r>
           </a:p>
         </p:txBody>
       </p:sp>
       <p:sp>
         <p:nvSpPr>
-          <p:cNvPr id="15" name="PPAGENT_QA|parent=swimlane-task-1|domains=swimlane-content">
-            <a:extLst xmlns:a="http://schemas.openxmlformats.org/drawingml/2006/main">
-              <a:ext uri="{FF2B5EF4-FFF2-40B4-BE49-F238E27FC236}">
-                <a16:creationId xmlns:a16="http://schemas.microsoft.com/office/drawing/2014/main" id="{C2787419-D9AC-4D44-AD4A-01EA0351ECBF}"/>
-              </a:ext>
-            </a:extLst>
-          </p:cNvPr>
-          <p:cNvSpPr>
-            <a:spLocks xmlns:a="http://schemas.openxmlformats.org/drawingml/2006/main" noGrp="1"/>
-          </p:cNvSpPr>
-          <p:nvPr/>
-        </p:nvSpPr>
-        <p:spPr>
-          <a:xfrm xmlns:a="http://schemas.openxmlformats.org/drawingml/2006/main">
-            <a:off x="5014913" y="2686050"/>
+          <p:cNvPr id="13" name="PPAGENT_QA|parent=swimlane-task-1|domains=swimlane-content">
+            <a:extLst xmlns:a="http://schemas.openxmlformats.org/drawingml/2006/main">
+              <a:ext uri="{FF2B5EF4-FFF2-40B4-BE49-F238E27FC236}">
+                <a16:creationId xmlns:a16="http://schemas.microsoft.com/office/drawing/2014/main" id="{C8A1FEB1-6738-49D3-9F68-F6E152A9BFDC}"/>
+              </a:ext>
+            </a:extLst>
+          </p:cNvPr>
+          <p:cNvSpPr>
+            <a:spLocks xmlns:a="http://schemas.openxmlformats.org/drawingml/2006/main" noGrp="1"/>
+          </p:cNvSpPr>
+          <p:nvPr/>
+        </p:nvSpPr>
+        <p:spPr>
+          <a:xfrm xmlns:a="http://schemas.openxmlformats.org/drawingml/2006/main">
+            <a:off x="7431881" y="1619250"/>
             <a:ext cx="2400300" cy="781050"/>
           </a:xfrm>
           <a:prstGeom xmlns:a="http://schemas.openxmlformats.org/drawingml/2006/main" prst="roundRect">
@@ -1782,7 +1861,7 @@
             </a:avLst>
           </a:prstGeom>
           <a:solidFill xmlns:a="http://schemas.openxmlformats.org/drawingml/2006/main">
-            <a:srgbClr val="00A8D8"/>
+            <a:srgbClr val="1677C8"/>
           </a:solidFill>
           <a:ln xmlns:a="http://schemas.openxmlformats.org/drawingml/2006/main" w="0">
             <a:noFill/>
@@ -1820,28 +1899,28 @@
                 <a:ea typeface="Microsoft YaHei"/>
                 <a:cs typeface="Microsoft YaHei"/>
               </a:rPr>
-              <a:t>判断版式、容量与拆页边界</a:t>
+              <a:t>确认页面内容</a:t>
             </a:r>
           </a:p>
         </p:txBody>
       </p:sp>
       <p:sp>
         <p:nvSpPr>
-          <p:cNvPr id="16" name="PPAGENT_QA|parent=swimlane-task-2|domains=swimlane-content">
-            <a:extLst xmlns:a="http://schemas.openxmlformats.org/drawingml/2006/main">
-              <a:ext uri="{FF2B5EF4-FFF2-40B4-BE49-F238E27FC236}">
-                <a16:creationId xmlns:a16="http://schemas.microsoft.com/office/drawing/2014/main" id="{78322E9E-5D83-4491-AAEE-B0D64EF7C1D5}"/>
-              </a:ext>
-            </a:extLst>
-          </p:cNvPr>
-          <p:cNvSpPr>
-            <a:spLocks xmlns:a="http://schemas.openxmlformats.org/drawingml/2006/main" noGrp="1"/>
-          </p:cNvSpPr>
-          <p:nvPr/>
-        </p:nvSpPr>
-        <p:spPr>
-          <a:xfrm xmlns:a="http://schemas.openxmlformats.org/drawingml/2006/main">
-            <a:off x="8237537" y="3752850"/>
+          <p:cNvPr id="14" name="PPAGENT_QA|parent=swimlane-task-2|domains=swimlane-content">
+            <a:extLst xmlns:a="http://schemas.openxmlformats.org/drawingml/2006/main">
+              <a:ext uri="{FF2B5EF4-FFF2-40B4-BE49-F238E27FC236}">
+                <a16:creationId xmlns:a16="http://schemas.microsoft.com/office/drawing/2014/main" id="{27F7C3F0-C279-4EA6-B39A-8929AF3A3399}"/>
+              </a:ext>
+            </a:extLst>
+          </p:cNvPr>
+          <p:cNvSpPr>
+            <a:spLocks xmlns:a="http://schemas.openxmlformats.org/drawingml/2006/main" noGrp="1"/>
+          </p:cNvSpPr>
+          <p:nvPr/>
+        </p:nvSpPr>
+        <p:spPr>
+          <a:xfrm xmlns:a="http://schemas.openxmlformats.org/drawingml/2006/main">
+            <a:off x="2597944" y="2686050"/>
             <a:ext cx="2400300" cy="781050"/>
           </a:xfrm>
           <a:prstGeom xmlns:a="http://schemas.openxmlformats.org/drawingml/2006/main" prst="roundRect">
@@ -1850,7 +1929,7 @@
             </a:avLst>
           </a:prstGeom>
           <a:solidFill xmlns:a="http://schemas.openxmlformats.org/drawingml/2006/main">
-            <a:srgbClr val="1677C8"/>
+            <a:srgbClr val="00A8D8"/>
           </a:solidFill>
           <a:ln xmlns:a="http://schemas.openxmlformats.org/drawingml/2006/main" w="0">
             <a:noFill/>
@@ -1888,17 +1967,85 @@
                 <a:ea typeface="Microsoft YaHei"/>
                 <a:cs typeface="Microsoft YaHei"/>
               </a:rPr>
-              <a:t>稳定生成原生可编辑文件</a:t>
+              <a:t>判断视觉关系</a:t>
             </a:r>
           </a:p>
         </p:txBody>
       </p:sp>
       <p:sp>
         <p:nvSpPr>
-          <p:cNvPr id="17" name="PPAGENT_QA|parent=swimlane-conclusion|domains=swimlane-content">
-            <a:extLst xmlns:a="http://schemas.openxmlformats.org/drawingml/2006/main">
-              <a:ext uri="{FF2B5EF4-FFF2-40B4-BE49-F238E27FC236}">
-                <a16:creationId xmlns:a16="http://schemas.microsoft.com/office/drawing/2014/main" id="{CCC60267-EC0A-4B64-9B1C-7D3B80EBEEAE}"/>
+          <p:cNvPr id="15" name="PPAGENT_QA|parent=swimlane-task-3|domains=swimlane-content">
+            <a:extLst xmlns:a="http://schemas.openxmlformats.org/drawingml/2006/main">
+              <a:ext uri="{FF2B5EF4-FFF2-40B4-BE49-F238E27FC236}">
+                <a16:creationId xmlns:a16="http://schemas.microsoft.com/office/drawing/2014/main" id="{DA8E29C1-56F6-45F7-9F5C-00653DB4AB4C}"/>
+              </a:ext>
+            </a:extLst>
+          </p:cNvPr>
+          <p:cNvSpPr>
+            <a:spLocks xmlns:a="http://schemas.openxmlformats.org/drawingml/2006/main" noGrp="1"/>
+          </p:cNvSpPr>
+          <p:nvPr/>
+        </p:nvSpPr>
+        <p:spPr>
+          <a:xfrm xmlns:a="http://schemas.openxmlformats.org/drawingml/2006/main">
+            <a:off x="7431881" y="2686050"/>
+            <a:ext cx="2400300" cy="781050"/>
+          </a:xfrm>
+          <a:prstGeom xmlns:a="http://schemas.openxmlformats.org/drawingml/2006/main" prst="roundRect">
+            <a:avLst>
+              <a:gd name="adj" fmla="val 14634"/>
+            </a:avLst>
+          </a:prstGeom>
+          <a:solidFill xmlns:a="http://schemas.openxmlformats.org/drawingml/2006/main">
+            <a:srgbClr val="00A8D8"/>
+          </a:solidFill>
+          <a:ln xmlns:a="http://schemas.openxmlformats.org/drawingml/2006/main" w="0">
+            <a:noFill/>
+            <a:prstDash val="solid"/>
+          </a:ln>
+        </p:spPr>
+        <p:style>
+          <a:lnRef xmlns:a="http://schemas.openxmlformats.org/drawingml/2006/main" idx="0"/>
+          <a:fillRef xmlns:a="http://schemas.openxmlformats.org/drawingml/2006/main" idx="0"/>
+          <a:effectRef xmlns:a="http://schemas.openxmlformats.org/drawingml/2006/main" idx="4"/>
+          <a:fontRef xmlns:a="http://schemas.openxmlformats.org/drawingml/2006/main" idx="major"/>
+        </p:style>
+        <p:txBody>
+          <a:bodyPr xmlns:a="http://schemas.openxmlformats.org/drawingml/2006/main" lIns="114300" tIns="76200" rIns="114300" bIns="76200" anchor="ctr">
+            <a:normAutofit fontScale="100000"/>
+          </a:bodyPr>
+          <a:lstStyle xmlns:a="http://schemas.openxmlformats.org/drawingml/2006/main"/>
+          <a:p xmlns:a="http://schemas.openxmlformats.org/drawingml/2006/main">
+            <a:pPr algn="ctr">
+              <a:defRPr sz="1350" b="1">
+                <a:solidFill>
+                  <a:srgbClr val="FFFFFF"/>
+                </a:solidFill>
+                <a:latin typeface="Microsoft YaHei"/>
+                <a:ea typeface="Microsoft YaHei"/>
+                <a:cs typeface="Microsoft YaHei"/>
+              </a:defRPr>
+            </a:pPr>
+            <a:r>
+              <a:rPr sz="1350" b="1">
+                <a:solidFill>
+                  <a:srgbClr val="FFFFFF"/>
+                </a:solidFill>
+                <a:latin typeface="Microsoft YaHei"/>
+                <a:ea typeface="Microsoft YaHei"/>
+                <a:cs typeface="Microsoft YaHei"/>
+              </a:rPr>
+              <a:t>选择 Style Group</a:t>
+            </a:r>
+          </a:p>
+        </p:txBody>
+      </p:sp>
+      <p:sp>
+        <p:nvSpPr>
+          <p:cNvPr id="16" name="PPAGENT_QA|parent=swimlane-conclusion|domains=swimlane-content">
+            <a:extLst xmlns:a="http://schemas.openxmlformats.org/drawingml/2006/main">
+              <a:ext uri="{FF2B5EF4-FFF2-40B4-BE49-F238E27FC236}">
+                <a16:creationId xmlns:a16="http://schemas.microsoft.com/office/drawing/2014/main" id="{52651257-3760-4CD0-A2FA-1B3B10599E9B}"/>
               </a:ext>
             </a:extLst>
           </p:cNvPr>
@@ -1975,7 +2122,7 @@
                 <a:ea typeface="Microsoft YaHei"/>
                 <a:cs typeface="Microsoft YaHei"/>
               </a:rPr>
-              <a:t>AI 读懂稿子，然后调用人已经提前做好的好东西。</a:t>
+              <a:t>角色边界清楚，信息能够回流</a:t>
             </a:r>
           </a:p>
         </p:txBody>
@@ -1983,7 +2130,3913 @@
     </p:spTree>
     <p:extLst>
       <p:ext uri="{BB962C8B-B14F-4D97-AF65-F5344CB8AC3E}">
-        <p14:creationId xmlns:p14="http://schemas.microsoft.com/office/powerpoint/2010/main" val="646505674"/>
+        <p14:creationId xmlns:p14="http://schemas.microsoft.com/office/powerpoint/2010/main" val="1048286436"/>
+      </p:ext>
+    </p:extLst>
+  </p:cSld>
+</p:sld>
+</file>
+
+<file path=ppt/slides/slide2.xml><?xml version="1.0" encoding="utf-8"?>
+<p:sld xmlns:p="http://schemas.openxmlformats.org/presentationml/2006/main">
+  <p:cSld>
+    <p:bg>
+      <p:bgPr>
+        <a:solidFill xmlns:a="http://schemas.openxmlformats.org/drawingml/2006/main">
+          <a:srgbClr val="F7FAFC"/>
+        </a:solidFill>
+      </p:bgPr>
+    </p:bg>
+    <p:spTree>
+      <p:nvGrpSpPr>
+        <p:cNvPr id="1" name=""/>
+        <p:cNvGrpSpPr/>
+        <p:nvPr/>
+      </p:nvGrpSpPr>
+      <p:grpSpPr>
+        <a:xfrm xmlns:a="http://schemas.openxmlformats.org/drawingml/2006/main"/>
+      </p:grpSpPr>
+      <p:sp>
+        <p:nvSpPr>
+          <p:cNvPr id="22" name="">
+            <a:extLst xmlns:a="http://schemas.openxmlformats.org/drawingml/2006/main">
+              <a:ext uri="{FF2B5EF4-FFF2-40B4-BE49-F238E27FC236}">
+                <a16:creationId xmlns:a16="http://schemas.microsoft.com/office/drawing/2014/main" id="{4E6B8CD1-8D24-4F3E-93E9-AF684D192E0C}"/>
+              </a:ext>
+            </a:extLst>
+          </p:cNvPr>
+          <p:cNvSpPr>
+            <a:spLocks xmlns:a="http://schemas.openxmlformats.org/drawingml/2006/main" noGrp="1"/>
+          </p:cNvSpPr>
+          <p:nvPr/>
+        </p:nvSpPr>
+        <p:spPr>
+          <a:xfrm xmlns:a="http://schemas.openxmlformats.org/drawingml/2006/main">
+            <a:off x="685800" y="400050"/>
+            <a:ext cx="8382000" cy="457200"/>
+          </a:xfrm>
+          <a:prstGeom xmlns:a="http://schemas.openxmlformats.org/drawingml/2006/main" prst="rect">
+            <a:avLst/>
+          </a:prstGeom>
+          <a:noFill xmlns:a="http://schemas.openxmlformats.org/drawingml/2006/main"/>
+          <a:ln xmlns:a="http://schemas.openxmlformats.org/drawingml/2006/main" w="0">
+            <a:noFill/>
+            <a:prstDash val="solid"/>
+          </a:ln>
+        </p:spPr>
+        <p:txBody>
+          <a:bodyPr xmlns:a="http://schemas.openxmlformats.org/drawingml/2006/main" lIns="0" tIns="0" rIns="0" bIns="0" anchor="ctr">
+            <a:normAutofit fontScale="100000"/>
+          </a:bodyPr>
+          <a:lstStyle xmlns:a="http://schemas.openxmlformats.org/drawingml/2006/main"/>
+          <a:p xmlns:a="http://schemas.openxmlformats.org/drawingml/2006/main">
+            <a:pPr algn="l">
+              <a:defRPr sz="2700" b="1">
+                <a:solidFill>
+                  <a:srgbClr val="1677C8"/>
+                </a:solidFill>
+                <a:latin typeface="Microsoft YaHei"/>
+                <a:ea typeface="Microsoft YaHei"/>
+                <a:cs typeface="Microsoft YaHei"/>
+              </a:defRPr>
+            </a:pPr>
+            <a:r>
+              <a:rPr sz="2700" b="1">
+                <a:solidFill>
+                  <a:srgbClr val="1677C8"/>
+                </a:solidFill>
+                <a:latin typeface="Microsoft YaHei"/>
+                <a:ea typeface="Microsoft YaHei"/>
+                <a:cs typeface="Microsoft YaHei"/>
+              </a:rPr>
+              <a:t>跨角色协同流程</a:t>
+            </a:r>
+          </a:p>
+        </p:txBody>
+      </p:sp>
+      <p:sp>
+        <p:nvSpPr>
+          <p:cNvPr id="2" name="">
+            <a:extLst xmlns:a="http://schemas.openxmlformats.org/drawingml/2006/main">
+              <a:ext uri="{FF2B5EF4-FFF2-40B4-BE49-F238E27FC236}">
+                <a16:creationId xmlns:a16="http://schemas.microsoft.com/office/drawing/2014/main" id="{560E0773-45DA-4A03-8C74-16760D7EAE21}"/>
+              </a:ext>
+            </a:extLst>
+          </p:cNvPr>
+          <p:cNvSpPr>
+            <a:spLocks xmlns:a="http://schemas.openxmlformats.org/drawingml/2006/main" noGrp="1"/>
+          </p:cNvSpPr>
+          <p:nvPr/>
+        </p:nvSpPr>
+        <p:spPr>
+          <a:xfrm xmlns:a="http://schemas.openxmlformats.org/drawingml/2006/main">
+            <a:off x="704850" y="876300"/>
+            <a:ext cx="4953000" cy="247650"/>
+          </a:xfrm>
+          <a:prstGeom xmlns:a="http://schemas.openxmlformats.org/drawingml/2006/main" prst="rect">
+            <a:avLst/>
+          </a:prstGeom>
+          <a:noFill xmlns:a="http://schemas.openxmlformats.org/drawingml/2006/main"/>
+          <a:ln xmlns:a="http://schemas.openxmlformats.org/drawingml/2006/main" w="0">
+            <a:noFill/>
+            <a:prstDash val="solid"/>
+          </a:ln>
+        </p:spPr>
+        <p:txBody>
+          <a:bodyPr xmlns:a="http://schemas.openxmlformats.org/drawingml/2006/main" lIns="0" tIns="0" rIns="0" bIns="0" anchor="ctr">
+            <a:normAutofit fontScale="100000"/>
+          </a:bodyPr>
+          <a:lstStyle xmlns:a="http://schemas.openxmlformats.org/drawingml/2006/main"/>
+          <a:p xmlns:a="http://schemas.openxmlformats.org/drawingml/2006/main">
+            <a:pPr algn="l">
+              <a:defRPr sz="1200" b="0">
+                <a:solidFill>
+                  <a:srgbClr val="7C8A9A"/>
+                </a:solidFill>
+                <a:latin typeface="Microsoft YaHei"/>
+                <a:ea typeface="Microsoft YaHei"/>
+                <a:cs typeface="Microsoft YaHei"/>
+              </a:defRPr>
+            </a:pPr>
+            <a:r>
+              <a:rPr sz="1200" b="0">
+                <a:solidFill>
+                  <a:srgbClr val="7C8A9A"/>
+                </a:solidFill>
+                <a:latin typeface="Microsoft YaHei"/>
+                <a:ea typeface="Microsoft YaHei"/>
+                <a:cs typeface="Microsoft YaHei"/>
+              </a:rPr>
+              <a:t>多角色泳道流程</a:t>
+            </a:r>
+          </a:p>
+        </p:txBody>
+      </p:sp>
+      <p:sp>
+        <p:nvSpPr>
+          <p:cNvPr id="3" name="">
+            <a:extLst xmlns:a="http://schemas.openxmlformats.org/drawingml/2006/main">
+              <a:ext uri="{FF2B5EF4-FFF2-40B4-BE49-F238E27FC236}">
+                <a16:creationId xmlns:a16="http://schemas.microsoft.com/office/drawing/2014/main" id="{326FF4B0-9187-41ED-90F0-39A4E7E2B067}"/>
+              </a:ext>
+            </a:extLst>
+          </p:cNvPr>
+          <p:cNvSpPr>
+            <a:spLocks xmlns:a="http://schemas.openxmlformats.org/drawingml/2006/main" noGrp="1"/>
+          </p:cNvSpPr>
+          <p:nvPr/>
+        </p:nvSpPr>
+        <p:spPr>
+          <a:xfrm xmlns:a="http://schemas.openxmlformats.org/drawingml/2006/main">
+            <a:off x="1381125" y="1152525"/>
+            <a:ext cx="3222625" cy="285750"/>
+          </a:xfrm>
+          <a:prstGeom xmlns:a="http://schemas.openxmlformats.org/drawingml/2006/main" prst="rect">
+            <a:avLst/>
+          </a:prstGeom>
+          <a:noFill xmlns:a="http://schemas.openxmlformats.org/drawingml/2006/main"/>
+          <a:ln xmlns:a="http://schemas.openxmlformats.org/drawingml/2006/main" w="0">
+            <a:noFill/>
+            <a:prstDash val="solid"/>
+          </a:ln>
+        </p:spPr>
+        <p:txBody>
+          <a:bodyPr xmlns:a="http://schemas.openxmlformats.org/drawingml/2006/main" lIns="0" tIns="0" rIns="0" bIns="0" anchor="ctr">
+            <a:normAutofit fontScale="100000"/>
+          </a:bodyPr>
+          <a:lstStyle xmlns:a="http://schemas.openxmlformats.org/drawingml/2006/main"/>
+          <a:p xmlns:a="http://schemas.openxmlformats.org/drawingml/2006/main">
+            <a:pPr algn="ctr">
+              <a:defRPr sz="1350" b="1">
+                <a:solidFill>
+                  <a:srgbClr val="475569"/>
+                </a:solidFill>
+                <a:latin typeface="Microsoft YaHei"/>
+                <a:ea typeface="Microsoft YaHei"/>
+                <a:cs typeface="Microsoft YaHei"/>
+              </a:defRPr>
+            </a:pPr>
+            <a:r>
+              <a:rPr sz="1350" b="1">
+                <a:solidFill>
+                  <a:srgbClr val="475569"/>
+                </a:solidFill>
+                <a:latin typeface="Microsoft YaHei"/>
+                <a:ea typeface="Microsoft YaHei"/>
+                <a:cs typeface="Microsoft YaHei"/>
+              </a:rPr>
+              <a:t>理解</a:t>
+            </a:r>
+          </a:p>
+        </p:txBody>
+      </p:sp>
+      <p:sp>
+        <p:nvSpPr>
+          <p:cNvPr id="4" name="">
+            <a:extLst xmlns:a="http://schemas.openxmlformats.org/drawingml/2006/main">
+              <a:ext uri="{FF2B5EF4-FFF2-40B4-BE49-F238E27FC236}">
+                <a16:creationId xmlns:a16="http://schemas.microsoft.com/office/drawing/2014/main" id="{52C9187E-EA11-4274-9F93-85CDD2D32AC1}"/>
+              </a:ext>
+            </a:extLst>
+          </p:cNvPr>
+          <p:cNvSpPr>
+            <a:spLocks xmlns:a="http://schemas.openxmlformats.org/drawingml/2006/main" noGrp="1"/>
+          </p:cNvSpPr>
+          <p:nvPr/>
+        </p:nvSpPr>
+        <p:spPr>
+          <a:xfrm xmlns:a="http://schemas.openxmlformats.org/drawingml/2006/main">
+            <a:off x="4603750" y="1152525"/>
+            <a:ext cx="3222625" cy="285750"/>
+          </a:xfrm>
+          <a:prstGeom xmlns:a="http://schemas.openxmlformats.org/drawingml/2006/main" prst="rect">
+            <a:avLst/>
+          </a:prstGeom>
+          <a:noFill xmlns:a="http://schemas.openxmlformats.org/drawingml/2006/main"/>
+          <a:ln xmlns:a="http://schemas.openxmlformats.org/drawingml/2006/main" w="0">
+            <a:noFill/>
+            <a:prstDash val="solid"/>
+          </a:ln>
+        </p:spPr>
+        <p:txBody>
+          <a:bodyPr xmlns:a="http://schemas.openxmlformats.org/drawingml/2006/main" lIns="0" tIns="0" rIns="0" bIns="0" anchor="ctr">
+            <a:normAutofit fontScale="100000"/>
+          </a:bodyPr>
+          <a:lstStyle xmlns:a="http://schemas.openxmlformats.org/drawingml/2006/main"/>
+          <a:p xmlns:a="http://schemas.openxmlformats.org/drawingml/2006/main">
+            <a:pPr algn="ctr">
+              <a:defRPr sz="1350" b="1">
+                <a:solidFill>
+                  <a:srgbClr val="475569"/>
+                </a:solidFill>
+                <a:latin typeface="Microsoft YaHei"/>
+                <a:ea typeface="Microsoft YaHei"/>
+                <a:cs typeface="Microsoft YaHei"/>
+              </a:defRPr>
+            </a:pPr>
+            <a:r>
+              <a:rPr sz="1350" b="1">
+                <a:solidFill>
+                  <a:srgbClr val="475569"/>
+                </a:solidFill>
+                <a:latin typeface="Microsoft YaHei"/>
+                <a:ea typeface="Microsoft YaHei"/>
+                <a:cs typeface="Microsoft YaHei"/>
+              </a:rPr>
+              <a:t>设计</a:t>
+            </a:r>
+          </a:p>
+        </p:txBody>
+      </p:sp>
+      <p:sp>
+        <p:nvSpPr>
+          <p:cNvPr id="5" name="">
+            <a:extLst xmlns:a="http://schemas.openxmlformats.org/drawingml/2006/main">
+              <a:ext uri="{FF2B5EF4-FFF2-40B4-BE49-F238E27FC236}">
+                <a16:creationId xmlns:a16="http://schemas.microsoft.com/office/drawing/2014/main" id="{D6EBC23A-869C-4578-9D06-6A3884C4C428}"/>
+              </a:ext>
+            </a:extLst>
+          </p:cNvPr>
+          <p:cNvSpPr>
+            <a:spLocks xmlns:a="http://schemas.openxmlformats.org/drawingml/2006/main" noGrp="1"/>
+          </p:cNvSpPr>
+          <p:nvPr/>
+        </p:nvSpPr>
+        <p:spPr>
+          <a:xfrm xmlns:a="http://schemas.openxmlformats.org/drawingml/2006/main">
+            <a:off x="7826375" y="1152525"/>
+            <a:ext cx="3222625" cy="285750"/>
+          </a:xfrm>
+          <a:prstGeom xmlns:a="http://schemas.openxmlformats.org/drawingml/2006/main" prst="rect">
+            <a:avLst/>
+          </a:prstGeom>
+          <a:noFill xmlns:a="http://schemas.openxmlformats.org/drawingml/2006/main"/>
+          <a:ln xmlns:a="http://schemas.openxmlformats.org/drawingml/2006/main" w="0">
+            <a:noFill/>
+            <a:prstDash val="solid"/>
+          </a:ln>
+        </p:spPr>
+        <p:txBody>
+          <a:bodyPr xmlns:a="http://schemas.openxmlformats.org/drawingml/2006/main" lIns="0" tIns="0" rIns="0" bIns="0" anchor="ctr">
+            <a:normAutofit fontScale="100000"/>
+          </a:bodyPr>
+          <a:lstStyle xmlns:a="http://schemas.openxmlformats.org/drawingml/2006/main"/>
+          <a:p xmlns:a="http://schemas.openxmlformats.org/drawingml/2006/main">
+            <a:pPr algn="ctr">
+              <a:defRPr sz="1350" b="1">
+                <a:solidFill>
+                  <a:srgbClr val="475569"/>
+                </a:solidFill>
+                <a:latin typeface="Microsoft YaHei"/>
+                <a:ea typeface="Microsoft YaHei"/>
+                <a:cs typeface="Microsoft YaHei"/>
+              </a:defRPr>
+            </a:pPr>
+            <a:r>
+              <a:rPr sz="1350" b="1">
+                <a:solidFill>
+                  <a:srgbClr val="475569"/>
+                </a:solidFill>
+                <a:latin typeface="Microsoft YaHei"/>
+                <a:ea typeface="Microsoft YaHei"/>
+                <a:cs typeface="Microsoft YaHei"/>
+              </a:rPr>
+              <a:t>交付</a:t>
+            </a:r>
+          </a:p>
+        </p:txBody>
+      </p:sp>
+      <p:sp>
+        <p:nvSpPr>
+          <p:cNvPr id="6" name="PPAGENT_QA|parent=swimlane-label-0|domains=swimlane-frame,swimlane-content">
+            <a:extLst xmlns:a="http://schemas.openxmlformats.org/drawingml/2006/main">
+              <a:ext uri="{FF2B5EF4-FFF2-40B4-BE49-F238E27FC236}">
+                <a16:creationId xmlns:a16="http://schemas.microsoft.com/office/drawing/2014/main" id="{6AE244ED-A479-447D-9B1D-0EAB71EC14CC}"/>
+              </a:ext>
+            </a:extLst>
+          </p:cNvPr>
+          <p:cNvSpPr>
+            <a:spLocks xmlns:a="http://schemas.openxmlformats.org/drawingml/2006/main" noGrp="1"/>
+          </p:cNvSpPr>
+          <p:nvPr/>
+        </p:nvSpPr>
+        <p:spPr>
+          <a:xfrm xmlns:a="http://schemas.openxmlformats.org/drawingml/2006/main">
+            <a:off x="419100" y="1476375"/>
+            <a:ext cx="781050" cy="971550"/>
+          </a:xfrm>
+          <a:prstGeom xmlns:a="http://schemas.openxmlformats.org/drawingml/2006/main" prst="roundRect">
+            <a:avLst>
+              <a:gd name="adj" fmla="val 14634"/>
+            </a:avLst>
+          </a:prstGeom>
+          <a:solidFill xmlns:a="http://schemas.openxmlformats.org/drawingml/2006/main">
+            <a:srgbClr val="1677C8"/>
+          </a:solidFill>
+          <a:ln xmlns:a="http://schemas.openxmlformats.org/drawingml/2006/main" w="0">
+            <a:noFill/>
+            <a:prstDash val="solid"/>
+          </a:ln>
+        </p:spPr>
+        <p:txBody>
+          <a:bodyPr xmlns:a="http://schemas.openxmlformats.org/drawingml/2006/main" lIns="114300" tIns="76200" rIns="114300" bIns="76200" anchor="ctr">
+            <a:normAutofit fontScale="100000"/>
+          </a:bodyPr>
+          <a:lstStyle xmlns:a="http://schemas.openxmlformats.org/drawingml/2006/main"/>
+          <a:p xmlns:a="http://schemas.openxmlformats.org/drawingml/2006/main">
+            <a:pPr algn="ctr">
+              <a:defRPr sz="1350" b="1">
+                <a:solidFill>
+                  <a:srgbClr val="FFFFFF"/>
+                </a:solidFill>
+                <a:latin typeface="Microsoft YaHei"/>
+                <a:ea typeface="Microsoft YaHei"/>
+                <a:cs typeface="Microsoft YaHei"/>
+              </a:defRPr>
+            </a:pPr>
+            <a:r>
+              <a:rPr sz="1350" b="1">
+                <a:solidFill>
+                  <a:srgbClr val="FFFFFF"/>
+                </a:solidFill>
+                <a:latin typeface="Microsoft YaHei"/>
+                <a:ea typeface="Microsoft YaHei"/>
+                <a:cs typeface="Microsoft YaHei"/>
+              </a:rPr>
+              <a:t>内容团队</a:t>
+            </a:r>
+          </a:p>
+        </p:txBody>
+      </p:sp>
+      <p:sp>
+        <p:nvSpPr>
+          <p:cNvPr id="7" name="PPAGENT_QA|parent=swimlane-background-0|domains=swimlane-frame">
+            <a:extLst xmlns:a="http://schemas.openxmlformats.org/drawingml/2006/main">
+              <a:ext uri="{FF2B5EF4-FFF2-40B4-BE49-F238E27FC236}">
+                <a16:creationId xmlns:a16="http://schemas.microsoft.com/office/drawing/2014/main" id="{DE7248EF-BAE2-4FA3-81DF-470CFCC5E934}"/>
+              </a:ext>
+            </a:extLst>
+          </p:cNvPr>
+          <p:cNvSpPr>
+            <a:spLocks xmlns:a="http://schemas.openxmlformats.org/drawingml/2006/main" noGrp="1"/>
+          </p:cNvSpPr>
+          <p:nvPr/>
+        </p:nvSpPr>
+        <p:spPr>
+          <a:xfrm xmlns:a="http://schemas.openxmlformats.org/drawingml/2006/main">
+            <a:off x="1381125" y="1476375"/>
+            <a:ext cx="9667875" cy="971550"/>
+          </a:xfrm>
+          <a:prstGeom xmlns:a="http://schemas.openxmlformats.org/drawingml/2006/main" prst="rect">
+            <a:avLst/>
+          </a:prstGeom>
+          <a:solidFill xmlns:a="http://schemas.openxmlformats.org/drawingml/2006/main">
+            <a:srgbClr val="F8FBFF"/>
+          </a:solidFill>
+          <a:ln xmlns:a="http://schemas.openxmlformats.org/drawingml/2006/main" w="9525">
+            <a:solidFill>
+              <a:srgbClr val="C9D5E3"/>
+            </a:solidFill>
+            <a:prstDash val="solid"/>
+          </a:ln>
+        </p:spPr>
+      </p:sp>
+      <p:sp>
+        <p:nvSpPr>
+          <p:cNvPr id="8" name="PPAGENT_QA|parent=swimlane-label-1|domains=swimlane-frame,swimlane-content">
+            <a:extLst xmlns:a="http://schemas.openxmlformats.org/drawingml/2006/main">
+              <a:ext uri="{FF2B5EF4-FFF2-40B4-BE49-F238E27FC236}">
+                <a16:creationId xmlns:a16="http://schemas.microsoft.com/office/drawing/2014/main" id="{98F9EA82-9627-48CC-87D2-7FE9F7B91B2F}"/>
+              </a:ext>
+            </a:extLst>
+          </p:cNvPr>
+          <p:cNvSpPr>
+            <a:spLocks xmlns:a="http://schemas.openxmlformats.org/drawingml/2006/main" noGrp="1"/>
+          </p:cNvSpPr>
+          <p:nvPr/>
+        </p:nvSpPr>
+        <p:spPr>
+          <a:xfrm xmlns:a="http://schemas.openxmlformats.org/drawingml/2006/main">
+            <a:off x="419100" y="2543175"/>
+            <a:ext cx="781050" cy="971550"/>
+          </a:xfrm>
+          <a:prstGeom xmlns:a="http://schemas.openxmlformats.org/drawingml/2006/main" prst="roundRect">
+            <a:avLst>
+              <a:gd name="adj" fmla="val 14634"/>
+            </a:avLst>
+          </a:prstGeom>
+          <a:solidFill xmlns:a="http://schemas.openxmlformats.org/drawingml/2006/main">
+            <a:srgbClr val="00A8D8"/>
+          </a:solidFill>
+          <a:ln xmlns:a="http://schemas.openxmlformats.org/drawingml/2006/main" w="0">
+            <a:noFill/>
+            <a:prstDash val="solid"/>
+          </a:ln>
+        </p:spPr>
+        <p:txBody>
+          <a:bodyPr xmlns:a="http://schemas.openxmlformats.org/drawingml/2006/main" lIns="114300" tIns="76200" rIns="114300" bIns="76200" anchor="ctr">
+            <a:normAutofit fontScale="100000"/>
+          </a:bodyPr>
+          <a:lstStyle xmlns:a="http://schemas.openxmlformats.org/drawingml/2006/main"/>
+          <a:p xmlns:a="http://schemas.openxmlformats.org/drawingml/2006/main">
+            <a:pPr algn="ctr">
+              <a:defRPr sz="1350" b="1">
+                <a:solidFill>
+                  <a:srgbClr val="FFFFFF"/>
+                </a:solidFill>
+                <a:latin typeface="Microsoft YaHei"/>
+                <a:ea typeface="Microsoft YaHei"/>
+                <a:cs typeface="Microsoft YaHei"/>
+              </a:defRPr>
+            </a:pPr>
+            <a:r>
+              <a:rPr sz="1350" b="1">
+                <a:solidFill>
+                  <a:srgbClr val="FFFFFF"/>
+                </a:solidFill>
+                <a:latin typeface="Microsoft YaHei"/>
+                <a:ea typeface="Microsoft YaHei"/>
+                <a:cs typeface="Microsoft YaHei"/>
+              </a:rPr>
+              <a:t>视觉团队</a:t>
+            </a:r>
+          </a:p>
+        </p:txBody>
+      </p:sp>
+      <p:sp>
+        <p:nvSpPr>
+          <p:cNvPr id="9" name="PPAGENT_QA|parent=swimlane-background-1|domains=swimlane-frame">
+            <a:extLst xmlns:a="http://schemas.openxmlformats.org/drawingml/2006/main">
+              <a:ext uri="{FF2B5EF4-FFF2-40B4-BE49-F238E27FC236}">
+                <a16:creationId xmlns:a16="http://schemas.microsoft.com/office/drawing/2014/main" id="{B585990F-9382-4D2F-B0C0-6952A8771F4D}"/>
+              </a:ext>
+            </a:extLst>
+          </p:cNvPr>
+          <p:cNvSpPr>
+            <a:spLocks xmlns:a="http://schemas.openxmlformats.org/drawingml/2006/main" noGrp="1"/>
+          </p:cNvSpPr>
+          <p:nvPr/>
+        </p:nvSpPr>
+        <p:spPr>
+          <a:xfrm xmlns:a="http://schemas.openxmlformats.org/drawingml/2006/main">
+            <a:off x="1381125" y="2543175"/>
+            <a:ext cx="9667875" cy="971550"/>
+          </a:xfrm>
+          <a:prstGeom xmlns:a="http://schemas.openxmlformats.org/drawingml/2006/main" prst="rect">
+            <a:avLst/>
+          </a:prstGeom>
+          <a:solidFill xmlns:a="http://schemas.openxmlformats.org/drawingml/2006/main">
+            <a:srgbClr val="EEF4FC"/>
+          </a:solidFill>
+          <a:ln xmlns:a="http://schemas.openxmlformats.org/drawingml/2006/main" w="9525">
+            <a:solidFill>
+              <a:srgbClr val="C9D5E3"/>
+            </a:solidFill>
+            <a:prstDash val="solid"/>
+          </a:ln>
+        </p:spPr>
+      </p:sp>
+      <p:sp>
+        <p:nvSpPr>
+          <p:cNvPr id="10" name="">
+            <a:extLst xmlns:a="http://schemas.openxmlformats.org/drawingml/2006/main">
+              <a:ext uri="{FF2B5EF4-FFF2-40B4-BE49-F238E27FC236}">
+                <a16:creationId xmlns:a16="http://schemas.microsoft.com/office/drawing/2014/main" id="{80456EF6-A7C0-45A6-960B-247B4CBE0A82}"/>
+              </a:ext>
+            </a:extLst>
+          </p:cNvPr>
+          <p:cNvSpPr>
+            <a:spLocks xmlns:a="http://schemas.openxmlformats.org/drawingml/2006/main" noGrp="1"/>
+          </p:cNvSpPr>
+          <p:nvPr/>
+        </p:nvSpPr>
+        <p:spPr>
+          <a:xfrm xmlns:a="http://schemas.openxmlformats.org/drawingml/2006/main" flipH="0" flipV="0">
+            <a:off x="4192587" y="2009775"/>
+            <a:ext cx="822325" cy="0"/>
+          </a:xfrm>
+          <a:prstGeom xmlns:a="http://schemas.openxmlformats.org/drawingml/2006/main" prst="line">
+            <a:avLst/>
+          </a:prstGeom>
+          <a:noFill xmlns:a="http://schemas.openxmlformats.org/drawingml/2006/main"/>
+          <a:ln xmlns:a="http://schemas.openxmlformats.org/drawingml/2006/main" w="23813">
+            <a:solidFill>
+              <a:srgbClr val="7C8A9A"/>
+            </a:solidFill>
+            <a:prstDash val="solid"/>
+          </a:ln>
+        </p:spPr>
+      </p:sp>
+      <p:sp>
+        <p:nvSpPr>
+          <p:cNvPr id="11" name="">
+            <a:extLst xmlns:a="http://schemas.openxmlformats.org/drawingml/2006/main">
+              <a:ext uri="{FF2B5EF4-FFF2-40B4-BE49-F238E27FC236}">
+                <a16:creationId xmlns:a16="http://schemas.microsoft.com/office/drawing/2014/main" id="{C8D5915E-C902-47DD-8E0A-F03E8CAE2898}"/>
+              </a:ext>
+            </a:extLst>
+          </p:cNvPr>
+          <p:cNvSpPr>
+            <a:spLocks xmlns:a="http://schemas.openxmlformats.org/drawingml/2006/main" noGrp="1"/>
+          </p:cNvSpPr>
+          <p:nvPr/>
+        </p:nvSpPr>
+        <p:spPr>
+          <a:xfrm xmlns:a="http://schemas.openxmlformats.org/drawingml/2006/main" flipH="0" flipV="0">
+            <a:off x="7415213" y="2009775"/>
+            <a:ext cx="822325" cy="0"/>
+          </a:xfrm>
+          <a:prstGeom xmlns:a="http://schemas.openxmlformats.org/drawingml/2006/main" prst="line">
+            <a:avLst/>
+          </a:prstGeom>
+          <a:noFill xmlns:a="http://schemas.openxmlformats.org/drawingml/2006/main"/>
+          <a:ln xmlns:a="http://schemas.openxmlformats.org/drawingml/2006/main" w="23813">
+            <a:solidFill>
+              <a:srgbClr val="7C8A9A"/>
+            </a:solidFill>
+            <a:prstDash val="solid"/>
+          </a:ln>
+        </p:spPr>
+      </p:sp>
+      <p:sp>
+        <p:nvSpPr>
+          <p:cNvPr id="12" name="">
+            <a:extLst xmlns:a="http://schemas.openxmlformats.org/drawingml/2006/main">
+              <a:ext uri="{FF2B5EF4-FFF2-40B4-BE49-F238E27FC236}">
+                <a16:creationId xmlns:a16="http://schemas.microsoft.com/office/drawing/2014/main" id="{E0EB939F-8521-49BF-B700-CAB14EA52454}"/>
+              </a:ext>
+            </a:extLst>
+          </p:cNvPr>
+          <p:cNvSpPr>
+            <a:spLocks xmlns:a="http://schemas.openxmlformats.org/drawingml/2006/main" noGrp="1"/>
+          </p:cNvSpPr>
+          <p:nvPr/>
+        </p:nvSpPr>
+        <p:spPr>
+          <a:xfrm xmlns:a="http://schemas.openxmlformats.org/drawingml/2006/main" flipH="1" flipV="0">
+            <a:off x="1792288" y="2009775"/>
+            <a:ext cx="8845550" cy="1066800"/>
+          </a:xfrm>
+          <a:prstGeom xmlns:a="http://schemas.openxmlformats.org/drawingml/2006/main" prst="line">
+            <a:avLst/>
+          </a:prstGeom>
+          <a:noFill xmlns:a="http://schemas.openxmlformats.org/drawingml/2006/main"/>
+          <a:ln xmlns:a="http://schemas.openxmlformats.org/drawingml/2006/main" w="23813">
+            <a:solidFill>
+              <a:srgbClr val="7C8A9A"/>
+            </a:solidFill>
+            <a:prstDash val="solid"/>
+          </a:ln>
+        </p:spPr>
+      </p:sp>
+      <p:sp>
+        <p:nvSpPr>
+          <p:cNvPr id="13" name="">
+            <a:extLst xmlns:a="http://schemas.openxmlformats.org/drawingml/2006/main">
+              <a:ext uri="{FF2B5EF4-FFF2-40B4-BE49-F238E27FC236}">
+                <a16:creationId xmlns:a16="http://schemas.microsoft.com/office/drawing/2014/main" id="{B16D42F6-A08E-4D4D-83D7-9E69DC78FCF9}"/>
+              </a:ext>
+            </a:extLst>
+          </p:cNvPr>
+          <p:cNvSpPr>
+            <a:spLocks xmlns:a="http://schemas.openxmlformats.org/drawingml/2006/main" noGrp="1"/>
+          </p:cNvSpPr>
+          <p:nvPr/>
+        </p:nvSpPr>
+        <p:spPr>
+          <a:xfrm xmlns:a="http://schemas.openxmlformats.org/drawingml/2006/main" flipH="0" flipV="0">
+            <a:off x="4192587" y="3076575"/>
+            <a:ext cx="822325" cy="0"/>
+          </a:xfrm>
+          <a:prstGeom xmlns:a="http://schemas.openxmlformats.org/drawingml/2006/main" prst="line">
+            <a:avLst/>
+          </a:prstGeom>
+          <a:noFill xmlns:a="http://schemas.openxmlformats.org/drawingml/2006/main"/>
+          <a:ln xmlns:a="http://schemas.openxmlformats.org/drawingml/2006/main" w="23813">
+            <a:solidFill>
+              <a:srgbClr val="7C8A9A"/>
+            </a:solidFill>
+            <a:prstDash val="solid"/>
+          </a:ln>
+        </p:spPr>
+      </p:sp>
+      <p:sp>
+        <p:nvSpPr>
+          <p:cNvPr id="14" name="">
+            <a:extLst xmlns:a="http://schemas.openxmlformats.org/drawingml/2006/main">
+              <a:ext uri="{FF2B5EF4-FFF2-40B4-BE49-F238E27FC236}">
+                <a16:creationId xmlns:a16="http://schemas.microsoft.com/office/drawing/2014/main" id="{8469B8FE-7B5D-4193-9119-73A64FB22DBE}"/>
+              </a:ext>
+            </a:extLst>
+          </p:cNvPr>
+          <p:cNvSpPr>
+            <a:spLocks xmlns:a="http://schemas.openxmlformats.org/drawingml/2006/main" noGrp="1"/>
+          </p:cNvSpPr>
+          <p:nvPr/>
+        </p:nvSpPr>
+        <p:spPr>
+          <a:xfrm xmlns:a="http://schemas.openxmlformats.org/drawingml/2006/main" flipH="0" flipV="0">
+            <a:off x="7415213" y="3076575"/>
+            <a:ext cx="822325" cy="0"/>
+          </a:xfrm>
+          <a:prstGeom xmlns:a="http://schemas.openxmlformats.org/drawingml/2006/main" prst="line">
+            <a:avLst/>
+          </a:prstGeom>
+          <a:noFill xmlns:a="http://schemas.openxmlformats.org/drawingml/2006/main"/>
+          <a:ln xmlns:a="http://schemas.openxmlformats.org/drawingml/2006/main" w="23813">
+            <a:solidFill>
+              <a:srgbClr val="7C8A9A"/>
+            </a:solidFill>
+            <a:prstDash val="solid"/>
+          </a:ln>
+        </p:spPr>
+      </p:sp>
+      <p:sp>
+        <p:nvSpPr>
+          <p:cNvPr id="15" name="PPAGENT_QA|parent=swimlane-task-0|domains=swimlane-content">
+            <a:extLst xmlns:a="http://schemas.openxmlformats.org/drawingml/2006/main">
+              <a:ext uri="{FF2B5EF4-FFF2-40B4-BE49-F238E27FC236}">
+                <a16:creationId xmlns:a16="http://schemas.microsoft.com/office/drawing/2014/main" id="{24E89686-7250-47AD-B1BB-46F856B4E030}"/>
+              </a:ext>
+            </a:extLst>
+          </p:cNvPr>
+          <p:cNvSpPr>
+            <a:spLocks xmlns:a="http://schemas.openxmlformats.org/drawingml/2006/main" noGrp="1"/>
+          </p:cNvSpPr>
+          <p:nvPr/>
+        </p:nvSpPr>
+        <p:spPr>
+          <a:xfrm xmlns:a="http://schemas.openxmlformats.org/drawingml/2006/main">
+            <a:off x="1792288" y="1619250"/>
+            <a:ext cx="2400300" cy="781050"/>
+          </a:xfrm>
+          <a:prstGeom xmlns:a="http://schemas.openxmlformats.org/drawingml/2006/main" prst="roundRect">
+            <a:avLst>
+              <a:gd name="adj" fmla="val 14634"/>
+            </a:avLst>
+          </a:prstGeom>
+          <a:solidFill xmlns:a="http://schemas.openxmlformats.org/drawingml/2006/main">
+            <a:srgbClr val="1677C8"/>
+          </a:solidFill>
+          <a:ln xmlns:a="http://schemas.openxmlformats.org/drawingml/2006/main" w="0">
+            <a:noFill/>
+            <a:prstDash val="solid"/>
+          </a:ln>
+        </p:spPr>
+        <p:style>
+          <a:lnRef xmlns:a="http://schemas.openxmlformats.org/drawingml/2006/main" idx="0"/>
+          <a:fillRef xmlns:a="http://schemas.openxmlformats.org/drawingml/2006/main" idx="0"/>
+          <a:effectRef xmlns:a="http://schemas.openxmlformats.org/drawingml/2006/main" idx="4"/>
+          <a:fontRef xmlns:a="http://schemas.openxmlformats.org/drawingml/2006/main" idx="major"/>
+        </p:style>
+        <p:txBody>
+          <a:bodyPr xmlns:a="http://schemas.openxmlformats.org/drawingml/2006/main" lIns="114300" tIns="76200" rIns="114300" bIns="76200" anchor="ctr">
+            <a:normAutofit fontScale="100000"/>
+          </a:bodyPr>
+          <a:lstStyle xmlns:a="http://schemas.openxmlformats.org/drawingml/2006/main"/>
+          <a:p xmlns:a="http://schemas.openxmlformats.org/drawingml/2006/main">
+            <a:pPr algn="ctr">
+              <a:defRPr sz="1350" b="1">
+                <a:solidFill>
+                  <a:srgbClr val="FFFFFF"/>
+                </a:solidFill>
+                <a:latin typeface="Microsoft YaHei"/>
+                <a:ea typeface="Microsoft YaHei"/>
+                <a:cs typeface="Microsoft YaHei"/>
+              </a:defRPr>
+            </a:pPr>
+            <a:r>
+              <a:rPr sz="1350" b="1">
+                <a:solidFill>
+                  <a:srgbClr val="FFFFFF"/>
+                </a:solidFill>
+                <a:latin typeface="Microsoft YaHei"/>
+                <a:ea typeface="Microsoft YaHei"/>
+                <a:cs typeface="Microsoft YaHei"/>
+              </a:rPr>
+              <a:t>拆解稿件</a:t>
+            </a:r>
+          </a:p>
+        </p:txBody>
+      </p:sp>
+      <p:sp>
+        <p:nvSpPr>
+          <p:cNvPr id="16" name="PPAGENT_QA|parent=swimlane-task-1|domains=swimlane-content">
+            <a:extLst xmlns:a="http://schemas.openxmlformats.org/drawingml/2006/main">
+              <a:ext uri="{FF2B5EF4-FFF2-40B4-BE49-F238E27FC236}">
+                <a16:creationId xmlns:a16="http://schemas.microsoft.com/office/drawing/2014/main" id="{05D56323-5A8F-4EBF-833D-5E5B45F634F2}"/>
+              </a:ext>
+            </a:extLst>
+          </p:cNvPr>
+          <p:cNvSpPr>
+            <a:spLocks xmlns:a="http://schemas.openxmlformats.org/drawingml/2006/main" noGrp="1"/>
+          </p:cNvSpPr>
+          <p:nvPr/>
+        </p:nvSpPr>
+        <p:spPr>
+          <a:xfrm xmlns:a="http://schemas.openxmlformats.org/drawingml/2006/main">
+            <a:off x="5014913" y="1619250"/>
+            <a:ext cx="2400300" cy="781050"/>
+          </a:xfrm>
+          <a:prstGeom xmlns:a="http://schemas.openxmlformats.org/drawingml/2006/main" prst="roundRect">
+            <a:avLst>
+              <a:gd name="adj" fmla="val 14634"/>
+            </a:avLst>
+          </a:prstGeom>
+          <a:solidFill xmlns:a="http://schemas.openxmlformats.org/drawingml/2006/main">
+            <a:srgbClr val="1677C8"/>
+          </a:solidFill>
+          <a:ln xmlns:a="http://schemas.openxmlformats.org/drawingml/2006/main" w="0">
+            <a:noFill/>
+            <a:prstDash val="solid"/>
+          </a:ln>
+        </p:spPr>
+        <p:style>
+          <a:lnRef xmlns:a="http://schemas.openxmlformats.org/drawingml/2006/main" idx="0"/>
+          <a:fillRef xmlns:a="http://schemas.openxmlformats.org/drawingml/2006/main" idx="0"/>
+          <a:effectRef xmlns:a="http://schemas.openxmlformats.org/drawingml/2006/main" idx="4"/>
+          <a:fontRef xmlns:a="http://schemas.openxmlformats.org/drawingml/2006/main" idx="major"/>
+        </p:style>
+        <p:txBody>
+          <a:bodyPr xmlns:a="http://schemas.openxmlformats.org/drawingml/2006/main" lIns="114300" tIns="76200" rIns="114300" bIns="76200" anchor="ctr">
+            <a:normAutofit fontScale="100000"/>
+          </a:bodyPr>
+          <a:lstStyle xmlns:a="http://schemas.openxmlformats.org/drawingml/2006/main"/>
+          <a:p xmlns:a="http://schemas.openxmlformats.org/drawingml/2006/main">
+            <a:pPr algn="ctr">
+              <a:defRPr sz="1350" b="1">
+                <a:solidFill>
+                  <a:srgbClr val="FFFFFF"/>
+                </a:solidFill>
+                <a:latin typeface="Microsoft YaHei"/>
+                <a:ea typeface="Microsoft YaHei"/>
+                <a:cs typeface="Microsoft YaHei"/>
+              </a:defRPr>
+            </a:pPr>
+            <a:r>
+              <a:rPr sz="1350" b="1">
+                <a:solidFill>
+                  <a:srgbClr val="FFFFFF"/>
+                </a:solidFill>
+                <a:latin typeface="Microsoft YaHei"/>
+                <a:ea typeface="Microsoft YaHei"/>
+                <a:cs typeface="Microsoft YaHei"/>
+              </a:rPr>
+              <a:t>确认页面内容</a:t>
+            </a:r>
+          </a:p>
+        </p:txBody>
+      </p:sp>
+      <p:sp>
+        <p:nvSpPr>
+          <p:cNvPr id="17" name="PPAGENT_QA|parent=swimlane-task-2|domains=swimlane-content">
+            <a:extLst xmlns:a="http://schemas.openxmlformats.org/drawingml/2006/main">
+              <a:ext uri="{FF2B5EF4-FFF2-40B4-BE49-F238E27FC236}">
+                <a16:creationId xmlns:a16="http://schemas.microsoft.com/office/drawing/2014/main" id="{90CB5E12-11E1-48AA-BE8F-C664C6DC0233}"/>
+              </a:ext>
+            </a:extLst>
+          </p:cNvPr>
+          <p:cNvSpPr>
+            <a:spLocks xmlns:a="http://schemas.openxmlformats.org/drawingml/2006/main" noGrp="1"/>
+          </p:cNvSpPr>
+          <p:nvPr/>
+        </p:nvSpPr>
+        <p:spPr>
+          <a:xfrm xmlns:a="http://schemas.openxmlformats.org/drawingml/2006/main">
+            <a:off x="8237537" y="1619250"/>
+            <a:ext cx="2400300" cy="781050"/>
+          </a:xfrm>
+          <a:prstGeom xmlns:a="http://schemas.openxmlformats.org/drawingml/2006/main" prst="roundRect">
+            <a:avLst>
+              <a:gd name="adj" fmla="val 14634"/>
+            </a:avLst>
+          </a:prstGeom>
+          <a:solidFill xmlns:a="http://schemas.openxmlformats.org/drawingml/2006/main">
+            <a:srgbClr val="1677C8"/>
+          </a:solidFill>
+          <a:ln xmlns:a="http://schemas.openxmlformats.org/drawingml/2006/main" w="0">
+            <a:noFill/>
+            <a:prstDash val="solid"/>
+          </a:ln>
+        </p:spPr>
+        <p:style>
+          <a:lnRef xmlns:a="http://schemas.openxmlformats.org/drawingml/2006/main" idx="0"/>
+          <a:fillRef xmlns:a="http://schemas.openxmlformats.org/drawingml/2006/main" idx="0"/>
+          <a:effectRef xmlns:a="http://schemas.openxmlformats.org/drawingml/2006/main" idx="4"/>
+          <a:fontRef xmlns:a="http://schemas.openxmlformats.org/drawingml/2006/main" idx="major"/>
+        </p:style>
+        <p:txBody>
+          <a:bodyPr xmlns:a="http://schemas.openxmlformats.org/drawingml/2006/main" lIns="114300" tIns="76200" rIns="114300" bIns="76200" anchor="ctr">
+            <a:normAutofit fontScale="100000"/>
+          </a:bodyPr>
+          <a:lstStyle xmlns:a="http://schemas.openxmlformats.org/drawingml/2006/main"/>
+          <a:p xmlns:a="http://schemas.openxmlformats.org/drawingml/2006/main">
+            <a:pPr algn="ctr">
+              <a:defRPr sz="1350" b="1">
+                <a:solidFill>
+                  <a:srgbClr val="FFFFFF"/>
+                </a:solidFill>
+                <a:latin typeface="Microsoft YaHei"/>
+                <a:ea typeface="Microsoft YaHei"/>
+                <a:cs typeface="Microsoft YaHei"/>
+              </a:defRPr>
+            </a:pPr>
+            <a:r>
+              <a:rPr sz="1350" b="1">
+                <a:solidFill>
+                  <a:srgbClr val="FFFFFF"/>
+                </a:solidFill>
+                <a:latin typeface="Microsoft YaHei"/>
+                <a:ea typeface="Microsoft YaHei"/>
+                <a:cs typeface="Microsoft YaHei"/>
+              </a:rPr>
+              <a:t>内容验收</a:t>
+            </a:r>
+          </a:p>
+        </p:txBody>
+      </p:sp>
+      <p:sp>
+        <p:nvSpPr>
+          <p:cNvPr id="18" name="PPAGENT_QA|parent=swimlane-task-3|domains=swimlane-content">
+            <a:extLst xmlns:a="http://schemas.openxmlformats.org/drawingml/2006/main">
+              <a:ext uri="{FF2B5EF4-FFF2-40B4-BE49-F238E27FC236}">
+                <a16:creationId xmlns:a16="http://schemas.microsoft.com/office/drawing/2014/main" id="{99C79EFA-C88F-4FD6-9153-D034F383285A}"/>
+              </a:ext>
+            </a:extLst>
+          </p:cNvPr>
+          <p:cNvSpPr>
+            <a:spLocks xmlns:a="http://schemas.openxmlformats.org/drawingml/2006/main" noGrp="1"/>
+          </p:cNvSpPr>
+          <p:nvPr/>
+        </p:nvSpPr>
+        <p:spPr>
+          <a:xfrm xmlns:a="http://schemas.openxmlformats.org/drawingml/2006/main">
+            <a:off x="1792288" y="2686050"/>
+            <a:ext cx="2400300" cy="781050"/>
+          </a:xfrm>
+          <a:prstGeom xmlns:a="http://schemas.openxmlformats.org/drawingml/2006/main" prst="roundRect">
+            <a:avLst>
+              <a:gd name="adj" fmla="val 14634"/>
+            </a:avLst>
+          </a:prstGeom>
+          <a:solidFill xmlns:a="http://schemas.openxmlformats.org/drawingml/2006/main">
+            <a:srgbClr val="00A8D8"/>
+          </a:solidFill>
+          <a:ln xmlns:a="http://schemas.openxmlformats.org/drawingml/2006/main" w="0">
+            <a:noFill/>
+            <a:prstDash val="solid"/>
+          </a:ln>
+        </p:spPr>
+        <p:style>
+          <a:lnRef xmlns:a="http://schemas.openxmlformats.org/drawingml/2006/main" idx="0"/>
+          <a:fillRef xmlns:a="http://schemas.openxmlformats.org/drawingml/2006/main" idx="0"/>
+          <a:effectRef xmlns:a="http://schemas.openxmlformats.org/drawingml/2006/main" idx="4"/>
+          <a:fontRef xmlns:a="http://schemas.openxmlformats.org/drawingml/2006/main" idx="major"/>
+        </p:style>
+        <p:txBody>
+          <a:bodyPr xmlns:a="http://schemas.openxmlformats.org/drawingml/2006/main" lIns="114300" tIns="76200" rIns="114300" bIns="76200" anchor="ctr">
+            <a:normAutofit fontScale="100000"/>
+          </a:bodyPr>
+          <a:lstStyle xmlns:a="http://schemas.openxmlformats.org/drawingml/2006/main"/>
+          <a:p xmlns:a="http://schemas.openxmlformats.org/drawingml/2006/main">
+            <a:pPr algn="ctr">
+              <a:defRPr sz="1350" b="1">
+                <a:solidFill>
+                  <a:srgbClr val="FFFFFF"/>
+                </a:solidFill>
+                <a:latin typeface="Microsoft YaHei"/>
+                <a:ea typeface="Microsoft YaHei"/>
+                <a:cs typeface="Microsoft YaHei"/>
+              </a:defRPr>
+            </a:pPr>
+            <a:r>
+              <a:rPr sz="1350" b="1">
+                <a:solidFill>
+                  <a:srgbClr val="FFFFFF"/>
+                </a:solidFill>
+                <a:latin typeface="Microsoft YaHei"/>
+                <a:ea typeface="Microsoft YaHei"/>
+                <a:cs typeface="Microsoft YaHei"/>
+              </a:rPr>
+              <a:t>判断视觉关系</a:t>
+            </a:r>
+          </a:p>
+        </p:txBody>
+      </p:sp>
+      <p:sp>
+        <p:nvSpPr>
+          <p:cNvPr id="19" name="PPAGENT_QA|parent=swimlane-task-4|domains=swimlane-content">
+            <a:extLst xmlns:a="http://schemas.openxmlformats.org/drawingml/2006/main">
+              <a:ext uri="{FF2B5EF4-FFF2-40B4-BE49-F238E27FC236}">
+                <a16:creationId xmlns:a16="http://schemas.microsoft.com/office/drawing/2014/main" id="{3CA1F286-9C5B-4C9C-949F-A77602E22947}"/>
+              </a:ext>
+            </a:extLst>
+          </p:cNvPr>
+          <p:cNvSpPr>
+            <a:spLocks xmlns:a="http://schemas.openxmlformats.org/drawingml/2006/main" noGrp="1"/>
+          </p:cNvSpPr>
+          <p:nvPr/>
+        </p:nvSpPr>
+        <p:spPr>
+          <a:xfrm xmlns:a="http://schemas.openxmlformats.org/drawingml/2006/main">
+            <a:off x="5014913" y="2686050"/>
+            <a:ext cx="2400300" cy="781050"/>
+          </a:xfrm>
+          <a:prstGeom xmlns:a="http://schemas.openxmlformats.org/drawingml/2006/main" prst="roundRect">
+            <a:avLst>
+              <a:gd name="adj" fmla="val 14634"/>
+            </a:avLst>
+          </a:prstGeom>
+          <a:solidFill xmlns:a="http://schemas.openxmlformats.org/drawingml/2006/main">
+            <a:srgbClr val="00A8D8"/>
+          </a:solidFill>
+          <a:ln xmlns:a="http://schemas.openxmlformats.org/drawingml/2006/main" w="0">
+            <a:noFill/>
+            <a:prstDash val="solid"/>
+          </a:ln>
+        </p:spPr>
+        <p:style>
+          <a:lnRef xmlns:a="http://schemas.openxmlformats.org/drawingml/2006/main" idx="0"/>
+          <a:fillRef xmlns:a="http://schemas.openxmlformats.org/drawingml/2006/main" idx="0"/>
+          <a:effectRef xmlns:a="http://schemas.openxmlformats.org/drawingml/2006/main" idx="4"/>
+          <a:fontRef xmlns:a="http://schemas.openxmlformats.org/drawingml/2006/main" idx="major"/>
+        </p:style>
+        <p:txBody>
+          <a:bodyPr xmlns:a="http://schemas.openxmlformats.org/drawingml/2006/main" lIns="114300" tIns="76200" rIns="114300" bIns="76200" anchor="ctr">
+            <a:normAutofit fontScale="100000"/>
+          </a:bodyPr>
+          <a:lstStyle xmlns:a="http://schemas.openxmlformats.org/drawingml/2006/main"/>
+          <a:p xmlns:a="http://schemas.openxmlformats.org/drawingml/2006/main">
+            <a:pPr algn="ctr">
+              <a:defRPr sz="1350" b="1">
+                <a:solidFill>
+                  <a:srgbClr val="FFFFFF"/>
+                </a:solidFill>
+                <a:latin typeface="Microsoft YaHei"/>
+                <a:ea typeface="Microsoft YaHei"/>
+                <a:cs typeface="Microsoft YaHei"/>
+              </a:defRPr>
+            </a:pPr>
+            <a:r>
+              <a:rPr sz="1350" b="1">
+                <a:solidFill>
+                  <a:srgbClr val="FFFFFF"/>
+                </a:solidFill>
+                <a:latin typeface="Microsoft YaHei"/>
+                <a:ea typeface="Microsoft YaHei"/>
+                <a:cs typeface="Microsoft YaHei"/>
+              </a:rPr>
+              <a:t>选择 Style Group</a:t>
+            </a:r>
+          </a:p>
+        </p:txBody>
+      </p:sp>
+      <p:sp>
+        <p:nvSpPr>
+          <p:cNvPr id="20" name="PPAGENT_QA|parent=swimlane-task-5|domains=swimlane-content">
+            <a:extLst xmlns:a="http://schemas.openxmlformats.org/drawingml/2006/main">
+              <a:ext uri="{FF2B5EF4-FFF2-40B4-BE49-F238E27FC236}">
+                <a16:creationId xmlns:a16="http://schemas.microsoft.com/office/drawing/2014/main" id="{96072C86-6F2B-46D5-A1C7-4442C9481EFD}"/>
+              </a:ext>
+            </a:extLst>
+          </p:cNvPr>
+          <p:cNvSpPr>
+            <a:spLocks xmlns:a="http://schemas.openxmlformats.org/drawingml/2006/main" noGrp="1"/>
+          </p:cNvSpPr>
+          <p:nvPr/>
+        </p:nvSpPr>
+        <p:spPr>
+          <a:xfrm xmlns:a="http://schemas.openxmlformats.org/drawingml/2006/main">
+            <a:off x="8237537" y="2686050"/>
+            <a:ext cx="2400300" cy="781050"/>
+          </a:xfrm>
+          <a:prstGeom xmlns:a="http://schemas.openxmlformats.org/drawingml/2006/main" prst="roundRect">
+            <a:avLst>
+              <a:gd name="adj" fmla="val 14634"/>
+            </a:avLst>
+          </a:prstGeom>
+          <a:solidFill xmlns:a="http://schemas.openxmlformats.org/drawingml/2006/main">
+            <a:srgbClr val="00A8D8"/>
+          </a:solidFill>
+          <a:ln xmlns:a="http://schemas.openxmlformats.org/drawingml/2006/main" w="0">
+            <a:noFill/>
+            <a:prstDash val="solid"/>
+          </a:ln>
+        </p:spPr>
+        <p:style>
+          <a:lnRef xmlns:a="http://schemas.openxmlformats.org/drawingml/2006/main" idx="0"/>
+          <a:fillRef xmlns:a="http://schemas.openxmlformats.org/drawingml/2006/main" idx="0"/>
+          <a:effectRef xmlns:a="http://schemas.openxmlformats.org/drawingml/2006/main" idx="4"/>
+          <a:fontRef xmlns:a="http://schemas.openxmlformats.org/drawingml/2006/main" idx="major"/>
+        </p:style>
+        <p:txBody>
+          <a:bodyPr xmlns:a="http://schemas.openxmlformats.org/drawingml/2006/main" lIns="114300" tIns="76200" rIns="114300" bIns="76200" anchor="ctr">
+            <a:normAutofit fontScale="100000"/>
+          </a:bodyPr>
+          <a:lstStyle xmlns:a="http://schemas.openxmlformats.org/drawingml/2006/main"/>
+          <a:p xmlns:a="http://schemas.openxmlformats.org/drawingml/2006/main">
+            <a:pPr algn="ctr">
+              <a:defRPr sz="1350" b="1">
+                <a:solidFill>
+                  <a:srgbClr val="FFFFFF"/>
+                </a:solidFill>
+                <a:latin typeface="Microsoft YaHei"/>
+                <a:ea typeface="Microsoft YaHei"/>
+                <a:cs typeface="Microsoft YaHei"/>
+              </a:defRPr>
+            </a:pPr>
+            <a:r>
+              <a:rPr sz="1350" b="1">
+                <a:solidFill>
+                  <a:srgbClr val="FFFFFF"/>
+                </a:solidFill>
+                <a:latin typeface="Microsoft YaHei"/>
+                <a:ea typeface="Microsoft YaHei"/>
+                <a:cs typeface="Microsoft YaHei"/>
+              </a:rPr>
+              <a:t>视觉验收</a:t>
+            </a:r>
+          </a:p>
+        </p:txBody>
+      </p:sp>
+      <p:sp>
+        <p:nvSpPr>
+          <p:cNvPr id="21" name="PPAGENT_QA|parent=swimlane-conclusion|domains=swimlane-content">
+            <a:extLst xmlns:a="http://schemas.openxmlformats.org/drawingml/2006/main">
+              <a:ext uri="{FF2B5EF4-FFF2-40B4-BE49-F238E27FC236}">
+                <a16:creationId xmlns:a16="http://schemas.microsoft.com/office/drawing/2014/main" id="{8307B9B8-6464-434A-82C9-61C600489BB1}"/>
+              </a:ext>
+            </a:extLst>
+          </p:cNvPr>
+          <p:cNvSpPr>
+            <a:spLocks xmlns:a="http://schemas.openxmlformats.org/drawingml/2006/main" noGrp="1"/>
+          </p:cNvSpPr>
+          <p:nvPr/>
+        </p:nvSpPr>
+        <p:spPr>
+          <a:xfrm xmlns:a="http://schemas.openxmlformats.org/drawingml/2006/main">
+            <a:off x="1381125" y="4953000"/>
+            <a:ext cx="9667875" cy="1028700"/>
+          </a:xfrm>
+          <a:prstGeom xmlns:a="http://schemas.openxmlformats.org/drawingml/2006/main" prst="roundRect">
+            <a:avLst>
+              <a:gd name="adj" fmla="val 11111"/>
+            </a:avLst>
+          </a:prstGeom>
+          <a:solidFill xmlns:a="http://schemas.openxmlformats.org/drawingml/2006/main">
+            <a:srgbClr val="EAF2FD"/>
+          </a:solidFill>
+          <a:ln xmlns:a="http://schemas.openxmlformats.org/drawingml/2006/main" w="14288">
+            <a:solidFill>
+              <a:srgbClr val="1677C8"/>
+            </a:solidFill>
+            <a:prstDash val="solid"/>
+          </a:ln>
+        </p:spPr>
+        <p:txBody>
+          <a:bodyPr xmlns:a="http://schemas.openxmlformats.org/drawingml/2006/main" lIns="114300" tIns="76200" rIns="114300" bIns="76200" anchor="ctr">
+            <a:normAutofit fontScale="100000"/>
+          </a:bodyPr>
+          <a:lstStyle xmlns:a="http://schemas.openxmlformats.org/drawingml/2006/main"/>
+          <a:p xmlns:a="http://schemas.openxmlformats.org/drawingml/2006/main">
+            <a:pPr algn="ctr">
+              <a:defRPr sz="1350" b="1">
+                <a:solidFill>
+                  <a:srgbClr val="1677C8"/>
+                </a:solidFill>
+                <a:latin typeface="Microsoft YaHei"/>
+                <a:ea typeface="Microsoft YaHei"/>
+                <a:cs typeface="Microsoft YaHei"/>
+              </a:defRPr>
+            </a:pPr>
+            <a:r>
+              <a:rPr sz="1350" b="1">
+                <a:solidFill>
+                  <a:srgbClr val="1677C8"/>
+                </a:solidFill>
+                <a:latin typeface="Microsoft YaHei"/>
+                <a:ea typeface="Microsoft YaHei"/>
+                <a:cs typeface="Microsoft YaHei"/>
+              </a:rPr>
+              <a:t>协同结论</a:t>
+            </a:r>
+          </a:p>
+          <a:p xmlns:a="http://schemas.openxmlformats.org/drawingml/2006/main">
+            <a:pPr algn="ctr">
+              <a:defRPr sz="1350" b="1">
+                <a:solidFill>
+                  <a:srgbClr val="1677C8"/>
+                </a:solidFill>
+                <a:latin typeface="Microsoft YaHei"/>
+                <a:ea typeface="Microsoft YaHei"/>
+                <a:cs typeface="Microsoft YaHei"/>
+              </a:defRPr>
+            </a:pPr>
+            <a:r>
+              <a:rPr sz="1350" b="1">
+                <a:solidFill>
+                  <a:srgbClr val="1677C8"/>
+                </a:solidFill>
+                <a:latin typeface="Microsoft YaHei"/>
+                <a:ea typeface="Microsoft YaHei"/>
+                <a:cs typeface="Microsoft YaHei"/>
+              </a:rPr>
+              <a:t>角色边界清楚，信息能够回流</a:t>
+            </a:r>
+          </a:p>
+        </p:txBody>
+      </p:sp>
+    </p:spTree>
+    <p:extLst>
+      <p:ext uri="{BB962C8B-B14F-4D97-AF65-F5344CB8AC3E}">
+        <p14:creationId xmlns:p14="http://schemas.microsoft.com/office/powerpoint/2010/main" val="1774044294"/>
+      </p:ext>
+    </p:extLst>
+  </p:cSld>
+</p:sld>
+</file>
+
+<file path=ppt/slides/slide3.xml><?xml version="1.0" encoding="utf-8"?>
+<p:sld xmlns:p="http://schemas.openxmlformats.org/presentationml/2006/main">
+  <p:cSld>
+    <p:bg>
+      <p:bgPr>
+        <a:solidFill xmlns:a="http://schemas.openxmlformats.org/drawingml/2006/main">
+          <a:srgbClr val="F7FAFC"/>
+        </a:solidFill>
+      </p:bgPr>
+    </p:bg>
+    <p:spTree>
+      <p:nvGrpSpPr>
+        <p:cNvPr id="1" name=""/>
+        <p:cNvGrpSpPr/>
+        <p:nvPr/>
+      </p:nvGrpSpPr>
+      <p:grpSpPr>
+        <a:xfrm xmlns:a="http://schemas.openxmlformats.org/drawingml/2006/main"/>
+      </p:grpSpPr>
+      <p:sp>
+        <p:nvSpPr>
+          <p:cNvPr id="23" name="">
+            <a:extLst xmlns:a="http://schemas.openxmlformats.org/drawingml/2006/main">
+              <a:ext uri="{FF2B5EF4-FFF2-40B4-BE49-F238E27FC236}">
+                <a16:creationId xmlns:a16="http://schemas.microsoft.com/office/drawing/2014/main" id="{6C824C64-954B-40C7-B2A7-FD3DFE839688}"/>
+              </a:ext>
+            </a:extLst>
+          </p:cNvPr>
+          <p:cNvSpPr>
+            <a:spLocks xmlns:a="http://schemas.openxmlformats.org/drawingml/2006/main" noGrp="1"/>
+          </p:cNvSpPr>
+          <p:nvPr/>
+        </p:nvSpPr>
+        <p:spPr>
+          <a:xfrm xmlns:a="http://schemas.openxmlformats.org/drawingml/2006/main">
+            <a:off x="685800" y="400050"/>
+            <a:ext cx="8382000" cy="457200"/>
+          </a:xfrm>
+          <a:prstGeom xmlns:a="http://schemas.openxmlformats.org/drawingml/2006/main" prst="rect">
+            <a:avLst/>
+          </a:prstGeom>
+          <a:noFill xmlns:a="http://schemas.openxmlformats.org/drawingml/2006/main"/>
+          <a:ln xmlns:a="http://schemas.openxmlformats.org/drawingml/2006/main" w="0">
+            <a:noFill/>
+            <a:prstDash val="solid"/>
+          </a:ln>
+        </p:spPr>
+        <p:txBody>
+          <a:bodyPr xmlns:a="http://schemas.openxmlformats.org/drawingml/2006/main" lIns="0" tIns="0" rIns="0" bIns="0" anchor="ctr">
+            <a:normAutofit fontScale="100000"/>
+          </a:bodyPr>
+          <a:lstStyle xmlns:a="http://schemas.openxmlformats.org/drawingml/2006/main"/>
+          <a:p xmlns:a="http://schemas.openxmlformats.org/drawingml/2006/main">
+            <a:pPr algn="l">
+              <a:defRPr sz="2700" b="1">
+                <a:solidFill>
+                  <a:srgbClr val="1677C8"/>
+                </a:solidFill>
+                <a:latin typeface="Microsoft YaHei"/>
+                <a:ea typeface="Microsoft YaHei"/>
+                <a:cs typeface="Microsoft YaHei"/>
+              </a:defRPr>
+            </a:pPr>
+            <a:r>
+              <a:rPr sz="2700" b="1">
+                <a:solidFill>
+                  <a:srgbClr val="1677C8"/>
+                </a:solidFill>
+                <a:latin typeface="Microsoft YaHei"/>
+                <a:ea typeface="Microsoft YaHei"/>
+                <a:cs typeface="Microsoft YaHei"/>
+              </a:rPr>
+              <a:t>跨角色协同流程</a:t>
+            </a:r>
+          </a:p>
+        </p:txBody>
+      </p:sp>
+      <p:sp>
+        <p:nvSpPr>
+          <p:cNvPr id="2" name="">
+            <a:extLst xmlns:a="http://schemas.openxmlformats.org/drawingml/2006/main">
+              <a:ext uri="{FF2B5EF4-FFF2-40B4-BE49-F238E27FC236}">
+                <a16:creationId xmlns:a16="http://schemas.microsoft.com/office/drawing/2014/main" id="{3CDEA34D-8524-4A66-ACFE-0B55AF6A4869}"/>
+              </a:ext>
+            </a:extLst>
+          </p:cNvPr>
+          <p:cNvSpPr>
+            <a:spLocks xmlns:a="http://schemas.openxmlformats.org/drawingml/2006/main" noGrp="1"/>
+          </p:cNvSpPr>
+          <p:nvPr/>
+        </p:nvSpPr>
+        <p:spPr>
+          <a:xfrm xmlns:a="http://schemas.openxmlformats.org/drawingml/2006/main">
+            <a:off x="704850" y="876300"/>
+            <a:ext cx="4953000" cy="247650"/>
+          </a:xfrm>
+          <a:prstGeom xmlns:a="http://schemas.openxmlformats.org/drawingml/2006/main" prst="rect">
+            <a:avLst/>
+          </a:prstGeom>
+          <a:noFill xmlns:a="http://schemas.openxmlformats.org/drawingml/2006/main"/>
+          <a:ln xmlns:a="http://schemas.openxmlformats.org/drawingml/2006/main" w="0">
+            <a:noFill/>
+            <a:prstDash val="solid"/>
+          </a:ln>
+        </p:spPr>
+        <p:txBody>
+          <a:bodyPr xmlns:a="http://schemas.openxmlformats.org/drawingml/2006/main" lIns="0" tIns="0" rIns="0" bIns="0" anchor="ctr">
+            <a:normAutofit fontScale="100000"/>
+          </a:bodyPr>
+          <a:lstStyle xmlns:a="http://schemas.openxmlformats.org/drawingml/2006/main"/>
+          <a:p xmlns:a="http://schemas.openxmlformats.org/drawingml/2006/main">
+            <a:pPr algn="l">
+              <a:defRPr sz="1200" b="0">
+                <a:solidFill>
+                  <a:srgbClr val="7C8A9A"/>
+                </a:solidFill>
+                <a:latin typeface="Microsoft YaHei"/>
+                <a:ea typeface="Microsoft YaHei"/>
+                <a:cs typeface="Microsoft YaHei"/>
+              </a:defRPr>
+            </a:pPr>
+            <a:r>
+              <a:rPr sz="1200" b="0">
+                <a:solidFill>
+                  <a:srgbClr val="7C8A9A"/>
+                </a:solidFill>
+                <a:latin typeface="Microsoft YaHei"/>
+                <a:ea typeface="Microsoft YaHei"/>
+                <a:cs typeface="Microsoft YaHei"/>
+              </a:rPr>
+              <a:t>多角色泳道流程</a:t>
+            </a:r>
+          </a:p>
+        </p:txBody>
+      </p:sp>
+      <p:sp>
+        <p:nvSpPr>
+          <p:cNvPr id="3" name="">
+            <a:extLst xmlns:a="http://schemas.openxmlformats.org/drawingml/2006/main">
+              <a:ext uri="{FF2B5EF4-FFF2-40B4-BE49-F238E27FC236}">
+                <a16:creationId xmlns:a16="http://schemas.microsoft.com/office/drawing/2014/main" id="{133406B2-1A8A-40CA-820C-E4DFC317AF1A}"/>
+              </a:ext>
+            </a:extLst>
+          </p:cNvPr>
+          <p:cNvSpPr>
+            <a:spLocks xmlns:a="http://schemas.openxmlformats.org/drawingml/2006/main" noGrp="1"/>
+          </p:cNvSpPr>
+          <p:nvPr/>
+        </p:nvSpPr>
+        <p:spPr>
+          <a:xfrm xmlns:a="http://schemas.openxmlformats.org/drawingml/2006/main">
+            <a:off x="1381125" y="1152525"/>
+            <a:ext cx="4833938" cy="285750"/>
+          </a:xfrm>
+          <a:prstGeom xmlns:a="http://schemas.openxmlformats.org/drawingml/2006/main" prst="rect">
+            <a:avLst/>
+          </a:prstGeom>
+          <a:noFill xmlns:a="http://schemas.openxmlformats.org/drawingml/2006/main"/>
+          <a:ln xmlns:a="http://schemas.openxmlformats.org/drawingml/2006/main" w="0">
+            <a:noFill/>
+            <a:prstDash val="solid"/>
+          </a:ln>
+        </p:spPr>
+        <p:txBody>
+          <a:bodyPr xmlns:a="http://schemas.openxmlformats.org/drawingml/2006/main" lIns="0" tIns="0" rIns="0" bIns="0" anchor="ctr">
+            <a:normAutofit fontScale="100000"/>
+          </a:bodyPr>
+          <a:lstStyle xmlns:a="http://schemas.openxmlformats.org/drawingml/2006/main"/>
+          <a:p xmlns:a="http://schemas.openxmlformats.org/drawingml/2006/main">
+            <a:pPr algn="ctr">
+              <a:defRPr sz="1350" b="1">
+                <a:solidFill>
+                  <a:srgbClr val="475569"/>
+                </a:solidFill>
+                <a:latin typeface="Microsoft YaHei"/>
+                <a:ea typeface="Microsoft YaHei"/>
+                <a:cs typeface="Microsoft YaHei"/>
+              </a:defRPr>
+            </a:pPr>
+            <a:r>
+              <a:rPr sz="1350" b="1">
+                <a:solidFill>
+                  <a:srgbClr val="475569"/>
+                </a:solidFill>
+                <a:latin typeface="Microsoft YaHei"/>
+                <a:ea typeface="Microsoft YaHei"/>
+                <a:cs typeface="Microsoft YaHei"/>
+              </a:rPr>
+              <a:t>理解</a:t>
+            </a:r>
+          </a:p>
+        </p:txBody>
+      </p:sp>
+      <p:sp>
+        <p:nvSpPr>
+          <p:cNvPr id="4" name="">
+            <a:extLst xmlns:a="http://schemas.openxmlformats.org/drawingml/2006/main">
+              <a:ext uri="{FF2B5EF4-FFF2-40B4-BE49-F238E27FC236}">
+                <a16:creationId xmlns:a16="http://schemas.microsoft.com/office/drawing/2014/main" id="{C284E514-217A-48E7-8A55-7BDD950CA677}"/>
+              </a:ext>
+            </a:extLst>
+          </p:cNvPr>
+          <p:cNvSpPr>
+            <a:spLocks xmlns:a="http://schemas.openxmlformats.org/drawingml/2006/main" noGrp="1"/>
+          </p:cNvSpPr>
+          <p:nvPr/>
+        </p:nvSpPr>
+        <p:spPr>
+          <a:xfrm xmlns:a="http://schemas.openxmlformats.org/drawingml/2006/main">
+            <a:off x="6215063" y="1152525"/>
+            <a:ext cx="4833938" cy="285750"/>
+          </a:xfrm>
+          <a:prstGeom xmlns:a="http://schemas.openxmlformats.org/drawingml/2006/main" prst="rect">
+            <a:avLst/>
+          </a:prstGeom>
+          <a:noFill xmlns:a="http://schemas.openxmlformats.org/drawingml/2006/main"/>
+          <a:ln xmlns:a="http://schemas.openxmlformats.org/drawingml/2006/main" w="0">
+            <a:noFill/>
+            <a:prstDash val="solid"/>
+          </a:ln>
+        </p:spPr>
+        <p:txBody>
+          <a:bodyPr xmlns:a="http://schemas.openxmlformats.org/drawingml/2006/main" lIns="0" tIns="0" rIns="0" bIns="0" anchor="ctr">
+            <a:normAutofit fontScale="100000"/>
+          </a:bodyPr>
+          <a:lstStyle xmlns:a="http://schemas.openxmlformats.org/drawingml/2006/main"/>
+          <a:p xmlns:a="http://schemas.openxmlformats.org/drawingml/2006/main">
+            <a:pPr algn="ctr">
+              <a:defRPr sz="1350" b="1">
+                <a:solidFill>
+                  <a:srgbClr val="475569"/>
+                </a:solidFill>
+                <a:latin typeface="Microsoft YaHei"/>
+                <a:ea typeface="Microsoft YaHei"/>
+                <a:cs typeface="Microsoft YaHei"/>
+              </a:defRPr>
+            </a:pPr>
+            <a:r>
+              <a:rPr sz="1350" b="1">
+                <a:solidFill>
+                  <a:srgbClr val="475569"/>
+                </a:solidFill>
+                <a:latin typeface="Microsoft YaHei"/>
+                <a:ea typeface="Microsoft YaHei"/>
+                <a:cs typeface="Microsoft YaHei"/>
+              </a:rPr>
+              <a:t>设计</a:t>
+            </a:r>
+          </a:p>
+        </p:txBody>
+      </p:sp>
+      <p:sp>
+        <p:nvSpPr>
+          <p:cNvPr id="5" name="PPAGENT_QA|parent=swimlane-label-0|domains=swimlane-frame,swimlane-content">
+            <a:extLst xmlns:a="http://schemas.openxmlformats.org/drawingml/2006/main">
+              <a:ext uri="{FF2B5EF4-FFF2-40B4-BE49-F238E27FC236}">
+                <a16:creationId xmlns:a16="http://schemas.microsoft.com/office/drawing/2014/main" id="{8CDC738C-04F9-4658-98CC-A67645B061D8}"/>
+              </a:ext>
+            </a:extLst>
+          </p:cNvPr>
+          <p:cNvSpPr>
+            <a:spLocks xmlns:a="http://schemas.openxmlformats.org/drawingml/2006/main" noGrp="1"/>
+          </p:cNvSpPr>
+          <p:nvPr/>
+        </p:nvSpPr>
+        <p:spPr>
+          <a:xfrm xmlns:a="http://schemas.openxmlformats.org/drawingml/2006/main">
+            <a:off x="419100" y="1476375"/>
+            <a:ext cx="781050" cy="971550"/>
+          </a:xfrm>
+          <a:prstGeom xmlns:a="http://schemas.openxmlformats.org/drawingml/2006/main" prst="roundRect">
+            <a:avLst>
+              <a:gd name="adj" fmla="val 14634"/>
+            </a:avLst>
+          </a:prstGeom>
+          <a:solidFill xmlns:a="http://schemas.openxmlformats.org/drawingml/2006/main">
+            <a:srgbClr val="1677C8"/>
+          </a:solidFill>
+          <a:ln xmlns:a="http://schemas.openxmlformats.org/drawingml/2006/main" w="0">
+            <a:noFill/>
+            <a:prstDash val="solid"/>
+          </a:ln>
+        </p:spPr>
+        <p:txBody>
+          <a:bodyPr xmlns:a="http://schemas.openxmlformats.org/drawingml/2006/main" lIns="114300" tIns="76200" rIns="114300" bIns="76200" anchor="ctr">
+            <a:normAutofit fontScale="100000"/>
+          </a:bodyPr>
+          <a:lstStyle xmlns:a="http://schemas.openxmlformats.org/drawingml/2006/main"/>
+          <a:p xmlns:a="http://schemas.openxmlformats.org/drawingml/2006/main">
+            <a:pPr algn="ctr">
+              <a:defRPr sz="1350" b="1">
+                <a:solidFill>
+                  <a:srgbClr val="FFFFFF"/>
+                </a:solidFill>
+                <a:latin typeface="Microsoft YaHei"/>
+                <a:ea typeface="Microsoft YaHei"/>
+                <a:cs typeface="Microsoft YaHei"/>
+              </a:defRPr>
+            </a:pPr>
+            <a:r>
+              <a:rPr sz="1350" b="1">
+                <a:solidFill>
+                  <a:srgbClr val="FFFFFF"/>
+                </a:solidFill>
+                <a:latin typeface="Microsoft YaHei"/>
+                <a:ea typeface="Microsoft YaHei"/>
+                <a:cs typeface="Microsoft YaHei"/>
+              </a:rPr>
+              <a:t>内容团队</a:t>
+            </a:r>
+          </a:p>
+        </p:txBody>
+      </p:sp>
+      <p:sp>
+        <p:nvSpPr>
+          <p:cNvPr id="6" name="PPAGENT_QA|parent=swimlane-background-0|domains=swimlane-frame">
+            <a:extLst xmlns:a="http://schemas.openxmlformats.org/drawingml/2006/main">
+              <a:ext uri="{FF2B5EF4-FFF2-40B4-BE49-F238E27FC236}">
+                <a16:creationId xmlns:a16="http://schemas.microsoft.com/office/drawing/2014/main" id="{24927BCF-ED3A-4C4A-AE0B-965896670B48}"/>
+              </a:ext>
+            </a:extLst>
+          </p:cNvPr>
+          <p:cNvSpPr>
+            <a:spLocks xmlns:a="http://schemas.openxmlformats.org/drawingml/2006/main" noGrp="1"/>
+          </p:cNvSpPr>
+          <p:nvPr/>
+        </p:nvSpPr>
+        <p:spPr>
+          <a:xfrm xmlns:a="http://schemas.openxmlformats.org/drawingml/2006/main">
+            <a:off x="1381125" y="1476375"/>
+            <a:ext cx="9667875" cy="971550"/>
+          </a:xfrm>
+          <a:prstGeom xmlns:a="http://schemas.openxmlformats.org/drawingml/2006/main" prst="rect">
+            <a:avLst/>
+          </a:prstGeom>
+          <a:solidFill xmlns:a="http://schemas.openxmlformats.org/drawingml/2006/main">
+            <a:srgbClr val="F8FBFF"/>
+          </a:solidFill>
+          <a:ln xmlns:a="http://schemas.openxmlformats.org/drawingml/2006/main" w="9525">
+            <a:solidFill>
+              <a:srgbClr val="C9D5E3"/>
+            </a:solidFill>
+            <a:prstDash val="solid"/>
+          </a:ln>
+        </p:spPr>
+      </p:sp>
+      <p:sp>
+        <p:nvSpPr>
+          <p:cNvPr id="7" name="PPAGENT_QA|parent=swimlane-label-1|domains=swimlane-frame,swimlane-content">
+            <a:extLst xmlns:a="http://schemas.openxmlformats.org/drawingml/2006/main">
+              <a:ext uri="{FF2B5EF4-FFF2-40B4-BE49-F238E27FC236}">
+                <a16:creationId xmlns:a16="http://schemas.microsoft.com/office/drawing/2014/main" id="{26F8AE7A-9664-4F9F-AD57-8E166B87AD92}"/>
+              </a:ext>
+            </a:extLst>
+          </p:cNvPr>
+          <p:cNvSpPr>
+            <a:spLocks xmlns:a="http://schemas.openxmlformats.org/drawingml/2006/main" noGrp="1"/>
+          </p:cNvSpPr>
+          <p:nvPr/>
+        </p:nvSpPr>
+        <p:spPr>
+          <a:xfrm xmlns:a="http://schemas.openxmlformats.org/drawingml/2006/main">
+            <a:off x="419100" y="2543175"/>
+            <a:ext cx="781050" cy="971550"/>
+          </a:xfrm>
+          <a:prstGeom xmlns:a="http://schemas.openxmlformats.org/drawingml/2006/main" prst="roundRect">
+            <a:avLst>
+              <a:gd name="adj" fmla="val 14634"/>
+            </a:avLst>
+          </a:prstGeom>
+          <a:solidFill xmlns:a="http://schemas.openxmlformats.org/drawingml/2006/main">
+            <a:srgbClr val="00A8D8"/>
+          </a:solidFill>
+          <a:ln xmlns:a="http://schemas.openxmlformats.org/drawingml/2006/main" w="0">
+            <a:noFill/>
+            <a:prstDash val="solid"/>
+          </a:ln>
+        </p:spPr>
+        <p:txBody>
+          <a:bodyPr xmlns:a="http://schemas.openxmlformats.org/drawingml/2006/main" lIns="114300" tIns="76200" rIns="114300" bIns="76200" anchor="ctr">
+            <a:normAutofit fontScale="100000"/>
+          </a:bodyPr>
+          <a:lstStyle xmlns:a="http://schemas.openxmlformats.org/drawingml/2006/main"/>
+          <a:p xmlns:a="http://schemas.openxmlformats.org/drawingml/2006/main">
+            <a:pPr algn="ctr">
+              <a:defRPr sz="1350" b="1">
+                <a:solidFill>
+                  <a:srgbClr val="FFFFFF"/>
+                </a:solidFill>
+                <a:latin typeface="Microsoft YaHei"/>
+                <a:ea typeface="Microsoft YaHei"/>
+                <a:cs typeface="Microsoft YaHei"/>
+              </a:defRPr>
+            </a:pPr>
+            <a:r>
+              <a:rPr sz="1350" b="1">
+                <a:solidFill>
+                  <a:srgbClr val="FFFFFF"/>
+                </a:solidFill>
+                <a:latin typeface="Microsoft YaHei"/>
+                <a:ea typeface="Microsoft YaHei"/>
+                <a:cs typeface="Microsoft YaHei"/>
+              </a:rPr>
+              <a:t>视觉团队</a:t>
+            </a:r>
+          </a:p>
+        </p:txBody>
+      </p:sp>
+      <p:sp>
+        <p:nvSpPr>
+          <p:cNvPr id="8" name="PPAGENT_QA|parent=swimlane-background-1|domains=swimlane-frame">
+            <a:extLst xmlns:a="http://schemas.openxmlformats.org/drawingml/2006/main">
+              <a:ext uri="{FF2B5EF4-FFF2-40B4-BE49-F238E27FC236}">
+                <a16:creationId xmlns:a16="http://schemas.microsoft.com/office/drawing/2014/main" id="{564D29CD-A2B1-4CBC-9C8A-E11ECD0DC57C}"/>
+              </a:ext>
+            </a:extLst>
+          </p:cNvPr>
+          <p:cNvSpPr>
+            <a:spLocks xmlns:a="http://schemas.openxmlformats.org/drawingml/2006/main" noGrp="1"/>
+          </p:cNvSpPr>
+          <p:nvPr/>
+        </p:nvSpPr>
+        <p:spPr>
+          <a:xfrm xmlns:a="http://schemas.openxmlformats.org/drawingml/2006/main">
+            <a:off x="1381125" y="2543175"/>
+            <a:ext cx="9667875" cy="971550"/>
+          </a:xfrm>
+          <a:prstGeom xmlns:a="http://schemas.openxmlformats.org/drawingml/2006/main" prst="rect">
+            <a:avLst/>
+          </a:prstGeom>
+          <a:solidFill xmlns:a="http://schemas.openxmlformats.org/drawingml/2006/main">
+            <a:srgbClr val="EEF4FC"/>
+          </a:solidFill>
+          <a:ln xmlns:a="http://schemas.openxmlformats.org/drawingml/2006/main" w="9525">
+            <a:solidFill>
+              <a:srgbClr val="C9D5E3"/>
+            </a:solidFill>
+            <a:prstDash val="solid"/>
+          </a:ln>
+        </p:spPr>
+      </p:sp>
+      <p:sp>
+        <p:nvSpPr>
+          <p:cNvPr id="9" name="PPAGENT_QA|parent=swimlane-label-2|domains=swimlane-frame,swimlane-content">
+            <a:extLst xmlns:a="http://schemas.openxmlformats.org/drawingml/2006/main">
+              <a:ext uri="{FF2B5EF4-FFF2-40B4-BE49-F238E27FC236}">
+                <a16:creationId xmlns:a16="http://schemas.microsoft.com/office/drawing/2014/main" id="{7E9A3418-BD94-4520-9BBB-6C48E59F3E91}"/>
+              </a:ext>
+            </a:extLst>
+          </p:cNvPr>
+          <p:cNvSpPr>
+            <a:spLocks xmlns:a="http://schemas.openxmlformats.org/drawingml/2006/main" noGrp="1"/>
+          </p:cNvSpPr>
+          <p:nvPr/>
+        </p:nvSpPr>
+        <p:spPr>
+          <a:xfrm xmlns:a="http://schemas.openxmlformats.org/drawingml/2006/main">
+            <a:off x="419100" y="3609975"/>
+            <a:ext cx="781050" cy="971550"/>
+          </a:xfrm>
+          <a:prstGeom xmlns:a="http://schemas.openxmlformats.org/drawingml/2006/main" prst="roundRect">
+            <a:avLst>
+              <a:gd name="adj" fmla="val 14634"/>
+            </a:avLst>
+          </a:prstGeom>
+          <a:solidFill xmlns:a="http://schemas.openxmlformats.org/drawingml/2006/main">
+            <a:srgbClr val="14CBD1"/>
+          </a:solidFill>
+          <a:ln xmlns:a="http://schemas.openxmlformats.org/drawingml/2006/main" w="0">
+            <a:noFill/>
+            <a:prstDash val="solid"/>
+          </a:ln>
+        </p:spPr>
+        <p:txBody>
+          <a:bodyPr xmlns:a="http://schemas.openxmlformats.org/drawingml/2006/main" lIns="114300" tIns="76200" rIns="114300" bIns="76200" anchor="ctr">
+            <a:normAutofit fontScale="100000"/>
+          </a:bodyPr>
+          <a:lstStyle xmlns:a="http://schemas.openxmlformats.org/drawingml/2006/main"/>
+          <a:p xmlns:a="http://schemas.openxmlformats.org/drawingml/2006/main">
+            <a:pPr algn="ctr">
+              <a:defRPr sz="1350" b="1">
+                <a:solidFill>
+                  <a:srgbClr val="FFFFFF"/>
+                </a:solidFill>
+                <a:latin typeface="Microsoft YaHei"/>
+                <a:ea typeface="Microsoft YaHei"/>
+                <a:cs typeface="Microsoft YaHei"/>
+              </a:defRPr>
+            </a:pPr>
+            <a:r>
+              <a:rPr sz="1350" b="1">
+                <a:solidFill>
+                  <a:srgbClr val="FFFFFF"/>
+                </a:solidFill>
+                <a:latin typeface="Microsoft YaHei"/>
+                <a:ea typeface="Microsoft YaHei"/>
+                <a:cs typeface="Microsoft YaHei"/>
+              </a:rPr>
+              <a:t>工程团队</a:t>
+            </a:r>
+          </a:p>
+        </p:txBody>
+      </p:sp>
+      <p:sp>
+        <p:nvSpPr>
+          <p:cNvPr id="10" name="PPAGENT_QA|parent=swimlane-background-2|domains=swimlane-frame">
+            <a:extLst xmlns:a="http://schemas.openxmlformats.org/drawingml/2006/main">
+              <a:ext uri="{FF2B5EF4-FFF2-40B4-BE49-F238E27FC236}">
+                <a16:creationId xmlns:a16="http://schemas.microsoft.com/office/drawing/2014/main" id="{CFA13BA1-202D-4A5D-879E-F8764A367A7E}"/>
+              </a:ext>
+            </a:extLst>
+          </p:cNvPr>
+          <p:cNvSpPr>
+            <a:spLocks xmlns:a="http://schemas.openxmlformats.org/drawingml/2006/main" noGrp="1"/>
+          </p:cNvSpPr>
+          <p:nvPr/>
+        </p:nvSpPr>
+        <p:spPr>
+          <a:xfrm xmlns:a="http://schemas.openxmlformats.org/drawingml/2006/main">
+            <a:off x="1381125" y="3609975"/>
+            <a:ext cx="9667875" cy="971550"/>
+          </a:xfrm>
+          <a:prstGeom xmlns:a="http://schemas.openxmlformats.org/drawingml/2006/main" prst="rect">
+            <a:avLst/>
+          </a:prstGeom>
+          <a:solidFill xmlns:a="http://schemas.openxmlformats.org/drawingml/2006/main">
+            <a:srgbClr val="F8FBFF"/>
+          </a:solidFill>
+          <a:ln xmlns:a="http://schemas.openxmlformats.org/drawingml/2006/main" w="9525">
+            <a:solidFill>
+              <a:srgbClr val="C9D5E3"/>
+            </a:solidFill>
+            <a:prstDash val="solid"/>
+          </a:ln>
+        </p:spPr>
+      </p:sp>
+      <p:sp>
+        <p:nvSpPr>
+          <p:cNvPr id="11" name="">
+            <a:extLst xmlns:a="http://schemas.openxmlformats.org/drawingml/2006/main">
+              <a:ext uri="{FF2B5EF4-FFF2-40B4-BE49-F238E27FC236}">
+                <a16:creationId xmlns:a16="http://schemas.microsoft.com/office/drawing/2014/main" id="{5E4C925F-7ED8-4E67-B10C-144AC35EAD43}"/>
+              </a:ext>
+            </a:extLst>
+          </p:cNvPr>
+          <p:cNvSpPr>
+            <a:spLocks xmlns:a="http://schemas.openxmlformats.org/drawingml/2006/main" noGrp="1"/>
+          </p:cNvSpPr>
+          <p:nvPr/>
+        </p:nvSpPr>
+        <p:spPr>
+          <a:xfrm xmlns:a="http://schemas.openxmlformats.org/drawingml/2006/main" flipH="0" flipV="0">
+            <a:off x="4998244" y="2009775"/>
+            <a:ext cx="2433638" cy="0"/>
+          </a:xfrm>
+          <a:prstGeom xmlns:a="http://schemas.openxmlformats.org/drawingml/2006/main" prst="line">
+            <a:avLst/>
+          </a:prstGeom>
+          <a:noFill xmlns:a="http://schemas.openxmlformats.org/drawingml/2006/main"/>
+          <a:ln xmlns:a="http://schemas.openxmlformats.org/drawingml/2006/main" w="23813">
+            <a:solidFill>
+              <a:srgbClr val="7C8A9A"/>
+            </a:solidFill>
+            <a:prstDash val="solid"/>
+          </a:ln>
+        </p:spPr>
+      </p:sp>
+      <p:sp>
+        <p:nvSpPr>
+          <p:cNvPr id="12" name="">
+            <a:extLst xmlns:a="http://schemas.openxmlformats.org/drawingml/2006/main">
+              <a:ext uri="{FF2B5EF4-FFF2-40B4-BE49-F238E27FC236}">
+                <a16:creationId xmlns:a16="http://schemas.microsoft.com/office/drawing/2014/main" id="{D60FB31B-BF5C-44C5-82AD-C51F2045274A}"/>
+              </a:ext>
+            </a:extLst>
+          </p:cNvPr>
+          <p:cNvSpPr>
+            <a:spLocks xmlns:a="http://schemas.openxmlformats.org/drawingml/2006/main" noGrp="1"/>
+          </p:cNvSpPr>
+          <p:nvPr/>
+        </p:nvSpPr>
+        <p:spPr>
+          <a:xfrm xmlns:a="http://schemas.openxmlformats.org/drawingml/2006/main" flipH="1" flipV="0">
+            <a:off x="2597944" y="2009775"/>
+            <a:ext cx="7234238" cy="1066800"/>
+          </a:xfrm>
+          <a:prstGeom xmlns:a="http://schemas.openxmlformats.org/drawingml/2006/main" prst="line">
+            <a:avLst/>
+          </a:prstGeom>
+          <a:noFill xmlns:a="http://schemas.openxmlformats.org/drawingml/2006/main"/>
+          <a:ln xmlns:a="http://schemas.openxmlformats.org/drawingml/2006/main" w="23813">
+            <a:solidFill>
+              <a:srgbClr val="7C8A9A"/>
+            </a:solidFill>
+            <a:prstDash val="solid"/>
+          </a:ln>
+        </p:spPr>
+      </p:sp>
+      <p:sp>
+        <p:nvSpPr>
+          <p:cNvPr id="13" name="">
+            <a:extLst xmlns:a="http://schemas.openxmlformats.org/drawingml/2006/main">
+              <a:ext uri="{FF2B5EF4-FFF2-40B4-BE49-F238E27FC236}">
+                <a16:creationId xmlns:a16="http://schemas.microsoft.com/office/drawing/2014/main" id="{798A3661-E516-44BA-AD3C-046EBEE5060F}"/>
+              </a:ext>
+            </a:extLst>
+          </p:cNvPr>
+          <p:cNvSpPr>
+            <a:spLocks xmlns:a="http://schemas.openxmlformats.org/drawingml/2006/main" noGrp="1"/>
+          </p:cNvSpPr>
+          <p:nvPr/>
+        </p:nvSpPr>
+        <p:spPr>
+          <a:xfrm xmlns:a="http://schemas.openxmlformats.org/drawingml/2006/main" flipH="0" flipV="0">
+            <a:off x="4998244" y="3076575"/>
+            <a:ext cx="2433638" cy="0"/>
+          </a:xfrm>
+          <a:prstGeom xmlns:a="http://schemas.openxmlformats.org/drawingml/2006/main" prst="line">
+            <a:avLst/>
+          </a:prstGeom>
+          <a:noFill xmlns:a="http://schemas.openxmlformats.org/drawingml/2006/main"/>
+          <a:ln xmlns:a="http://schemas.openxmlformats.org/drawingml/2006/main" w="23813">
+            <a:solidFill>
+              <a:srgbClr val="7C8A9A"/>
+            </a:solidFill>
+            <a:prstDash val="solid"/>
+          </a:ln>
+        </p:spPr>
+      </p:sp>
+      <p:sp>
+        <p:nvSpPr>
+          <p:cNvPr id="14" name="">
+            <a:extLst xmlns:a="http://schemas.openxmlformats.org/drawingml/2006/main">
+              <a:ext uri="{FF2B5EF4-FFF2-40B4-BE49-F238E27FC236}">
+                <a16:creationId xmlns:a16="http://schemas.microsoft.com/office/drawing/2014/main" id="{E25DDB96-B692-4977-8997-6F8C1818A5FA}"/>
+              </a:ext>
+            </a:extLst>
+          </p:cNvPr>
+          <p:cNvSpPr>
+            <a:spLocks xmlns:a="http://schemas.openxmlformats.org/drawingml/2006/main" noGrp="1"/>
+          </p:cNvSpPr>
+          <p:nvPr/>
+        </p:nvSpPr>
+        <p:spPr>
+          <a:xfrm xmlns:a="http://schemas.openxmlformats.org/drawingml/2006/main" flipH="1" flipV="0">
+            <a:off x="2597944" y="3076575"/>
+            <a:ext cx="7234238" cy="1066800"/>
+          </a:xfrm>
+          <a:prstGeom xmlns:a="http://schemas.openxmlformats.org/drawingml/2006/main" prst="line">
+            <a:avLst/>
+          </a:prstGeom>
+          <a:noFill xmlns:a="http://schemas.openxmlformats.org/drawingml/2006/main"/>
+          <a:ln xmlns:a="http://schemas.openxmlformats.org/drawingml/2006/main" w="23813">
+            <a:solidFill>
+              <a:srgbClr val="7C8A9A"/>
+            </a:solidFill>
+            <a:prstDash val="solid"/>
+          </a:ln>
+        </p:spPr>
+      </p:sp>
+      <p:sp>
+        <p:nvSpPr>
+          <p:cNvPr id="15" name="">
+            <a:extLst xmlns:a="http://schemas.openxmlformats.org/drawingml/2006/main">
+              <a:ext uri="{FF2B5EF4-FFF2-40B4-BE49-F238E27FC236}">
+                <a16:creationId xmlns:a16="http://schemas.microsoft.com/office/drawing/2014/main" id="{17F4C525-D764-42A1-99AA-EE998388076F}"/>
+              </a:ext>
+            </a:extLst>
+          </p:cNvPr>
+          <p:cNvSpPr>
+            <a:spLocks xmlns:a="http://schemas.openxmlformats.org/drawingml/2006/main" noGrp="1"/>
+          </p:cNvSpPr>
+          <p:nvPr/>
+        </p:nvSpPr>
+        <p:spPr>
+          <a:xfrm xmlns:a="http://schemas.openxmlformats.org/drawingml/2006/main" flipH="0" flipV="0">
+            <a:off x="4998244" y="4143375"/>
+            <a:ext cx="2433638" cy="0"/>
+          </a:xfrm>
+          <a:prstGeom xmlns:a="http://schemas.openxmlformats.org/drawingml/2006/main" prst="line">
+            <a:avLst/>
+          </a:prstGeom>
+          <a:noFill xmlns:a="http://schemas.openxmlformats.org/drawingml/2006/main"/>
+          <a:ln xmlns:a="http://schemas.openxmlformats.org/drawingml/2006/main" w="23813">
+            <a:solidFill>
+              <a:srgbClr val="7C8A9A"/>
+            </a:solidFill>
+            <a:prstDash val="solid"/>
+          </a:ln>
+        </p:spPr>
+      </p:sp>
+      <p:sp>
+        <p:nvSpPr>
+          <p:cNvPr id="16" name="PPAGENT_QA|parent=swimlane-task-0|domains=swimlane-content">
+            <a:extLst xmlns:a="http://schemas.openxmlformats.org/drawingml/2006/main">
+              <a:ext uri="{FF2B5EF4-FFF2-40B4-BE49-F238E27FC236}">
+                <a16:creationId xmlns:a16="http://schemas.microsoft.com/office/drawing/2014/main" id="{E90B9DC9-C848-47BB-B035-E48CDCE15DAF}"/>
+              </a:ext>
+            </a:extLst>
+          </p:cNvPr>
+          <p:cNvSpPr>
+            <a:spLocks xmlns:a="http://schemas.openxmlformats.org/drawingml/2006/main" noGrp="1"/>
+          </p:cNvSpPr>
+          <p:nvPr/>
+        </p:nvSpPr>
+        <p:spPr>
+          <a:xfrm xmlns:a="http://schemas.openxmlformats.org/drawingml/2006/main">
+            <a:off x="2597944" y="1619250"/>
+            <a:ext cx="2400300" cy="781050"/>
+          </a:xfrm>
+          <a:prstGeom xmlns:a="http://schemas.openxmlformats.org/drawingml/2006/main" prst="roundRect">
+            <a:avLst>
+              <a:gd name="adj" fmla="val 14634"/>
+            </a:avLst>
+          </a:prstGeom>
+          <a:solidFill xmlns:a="http://schemas.openxmlformats.org/drawingml/2006/main">
+            <a:srgbClr val="1677C8"/>
+          </a:solidFill>
+          <a:ln xmlns:a="http://schemas.openxmlformats.org/drawingml/2006/main" w="0">
+            <a:noFill/>
+            <a:prstDash val="solid"/>
+          </a:ln>
+        </p:spPr>
+        <p:style>
+          <a:lnRef xmlns:a="http://schemas.openxmlformats.org/drawingml/2006/main" idx="0"/>
+          <a:fillRef xmlns:a="http://schemas.openxmlformats.org/drawingml/2006/main" idx="0"/>
+          <a:effectRef xmlns:a="http://schemas.openxmlformats.org/drawingml/2006/main" idx="4"/>
+          <a:fontRef xmlns:a="http://schemas.openxmlformats.org/drawingml/2006/main" idx="major"/>
+        </p:style>
+        <p:txBody>
+          <a:bodyPr xmlns:a="http://schemas.openxmlformats.org/drawingml/2006/main" lIns="114300" tIns="76200" rIns="114300" bIns="76200" anchor="ctr">
+            <a:normAutofit fontScale="100000"/>
+          </a:bodyPr>
+          <a:lstStyle xmlns:a="http://schemas.openxmlformats.org/drawingml/2006/main"/>
+          <a:p xmlns:a="http://schemas.openxmlformats.org/drawingml/2006/main">
+            <a:pPr algn="ctr">
+              <a:defRPr sz="1350" b="1">
+                <a:solidFill>
+                  <a:srgbClr val="FFFFFF"/>
+                </a:solidFill>
+                <a:latin typeface="Microsoft YaHei"/>
+                <a:ea typeface="Microsoft YaHei"/>
+                <a:cs typeface="Microsoft YaHei"/>
+              </a:defRPr>
+            </a:pPr>
+            <a:r>
+              <a:rPr sz="1350" b="1">
+                <a:solidFill>
+                  <a:srgbClr val="FFFFFF"/>
+                </a:solidFill>
+                <a:latin typeface="Microsoft YaHei"/>
+                <a:ea typeface="Microsoft YaHei"/>
+                <a:cs typeface="Microsoft YaHei"/>
+              </a:rPr>
+              <a:t>拆解稿件</a:t>
+            </a:r>
+          </a:p>
+        </p:txBody>
+      </p:sp>
+      <p:sp>
+        <p:nvSpPr>
+          <p:cNvPr id="17" name="PPAGENT_QA|parent=swimlane-task-1|domains=swimlane-content">
+            <a:extLst xmlns:a="http://schemas.openxmlformats.org/drawingml/2006/main">
+              <a:ext uri="{FF2B5EF4-FFF2-40B4-BE49-F238E27FC236}">
+                <a16:creationId xmlns:a16="http://schemas.microsoft.com/office/drawing/2014/main" id="{455A10BA-47EC-481A-89DE-BEBE79FDB253}"/>
+              </a:ext>
+            </a:extLst>
+          </p:cNvPr>
+          <p:cNvSpPr>
+            <a:spLocks xmlns:a="http://schemas.openxmlformats.org/drawingml/2006/main" noGrp="1"/>
+          </p:cNvSpPr>
+          <p:nvPr/>
+        </p:nvSpPr>
+        <p:spPr>
+          <a:xfrm xmlns:a="http://schemas.openxmlformats.org/drawingml/2006/main">
+            <a:off x="7431881" y="1619250"/>
+            <a:ext cx="2400300" cy="781050"/>
+          </a:xfrm>
+          <a:prstGeom xmlns:a="http://schemas.openxmlformats.org/drawingml/2006/main" prst="roundRect">
+            <a:avLst>
+              <a:gd name="adj" fmla="val 14634"/>
+            </a:avLst>
+          </a:prstGeom>
+          <a:solidFill xmlns:a="http://schemas.openxmlformats.org/drawingml/2006/main">
+            <a:srgbClr val="1677C8"/>
+          </a:solidFill>
+          <a:ln xmlns:a="http://schemas.openxmlformats.org/drawingml/2006/main" w="0">
+            <a:noFill/>
+            <a:prstDash val="solid"/>
+          </a:ln>
+        </p:spPr>
+        <p:style>
+          <a:lnRef xmlns:a="http://schemas.openxmlformats.org/drawingml/2006/main" idx="0"/>
+          <a:fillRef xmlns:a="http://schemas.openxmlformats.org/drawingml/2006/main" idx="0"/>
+          <a:effectRef xmlns:a="http://schemas.openxmlformats.org/drawingml/2006/main" idx="4"/>
+          <a:fontRef xmlns:a="http://schemas.openxmlformats.org/drawingml/2006/main" idx="major"/>
+        </p:style>
+        <p:txBody>
+          <a:bodyPr xmlns:a="http://schemas.openxmlformats.org/drawingml/2006/main" lIns="114300" tIns="76200" rIns="114300" bIns="76200" anchor="ctr">
+            <a:normAutofit fontScale="100000"/>
+          </a:bodyPr>
+          <a:lstStyle xmlns:a="http://schemas.openxmlformats.org/drawingml/2006/main"/>
+          <a:p xmlns:a="http://schemas.openxmlformats.org/drawingml/2006/main">
+            <a:pPr algn="ctr">
+              <a:defRPr sz="1350" b="1">
+                <a:solidFill>
+                  <a:srgbClr val="FFFFFF"/>
+                </a:solidFill>
+                <a:latin typeface="Microsoft YaHei"/>
+                <a:ea typeface="Microsoft YaHei"/>
+                <a:cs typeface="Microsoft YaHei"/>
+              </a:defRPr>
+            </a:pPr>
+            <a:r>
+              <a:rPr sz="1350" b="1">
+                <a:solidFill>
+                  <a:srgbClr val="FFFFFF"/>
+                </a:solidFill>
+                <a:latin typeface="Microsoft YaHei"/>
+                <a:ea typeface="Microsoft YaHei"/>
+                <a:cs typeface="Microsoft YaHei"/>
+              </a:rPr>
+              <a:t>确认页面内容</a:t>
+            </a:r>
+          </a:p>
+        </p:txBody>
+      </p:sp>
+      <p:sp>
+        <p:nvSpPr>
+          <p:cNvPr id="18" name="PPAGENT_QA|parent=swimlane-task-2|domains=swimlane-content">
+            <a:extLst xmlns:a="http://schemas.openxmlformats.org/drawingml/2006/main">
+              <a:ext uri="{FF2B5EF4-FFF2-40B4-BE49-F238E27FC236}">
+                <a16:creationId xmlns:a16="http://schemas.microsoft.com/office/drawing/2014/main" id="{8B54E9F0-3DF7-4DFA-B59A-7BFBBDCA8CEA}"/>
+              </a:ext>
+            </a:extLst>
+          </p:cNvPr>
+          <p:cNvSpPr>
+            <a:spLocks xmlns:a="http://schemas.openxmlformats.org/drawingml/2006/main" noGrp="1"/>
+          </p:cNvSpPr>
+          <p:nvPr/>
+        </p:nvSpPr>
+        <p:spPr>
+          <a:xfrm xmlns:a="http://schemas.openxmlformats.org/drawingml/2006/main">
+            <a:off x="2597944" y="2686050"/>
+            <a:ext cx="2400300" cy="781050"/>
+          </a:xfrm>
+          <a:prstGeom xmlns:a="http://schemas.openxmlformats.org/drawingml/2006/main" prst="roundRect">
+            <a:avLst>
+              <a:gd name="adj" fmla="val 14634"/>
+            </a:avLst>
+          </a:prstGeom>
+          <a:solidFill xmlns:a="http://schemas.openxmlformats.org/drawingml/2006/main">
+            <a:srgbClr val="00A8D8"/>
+          </a:solidFill>
+          <a:ln xmlns:a="http://schemas.openxmlformats.org/drawingml/2006/main" w="0">
+            <a:noFill/>
+            <a:prstDash val="solid"/>
+          </a:ln>
+        </p:spPr>
+        <p:style>
+          <a:lnRef xmlns:a="http://schemas.openxmlformats.org/drawingml/2006/main" idx="0"/>
+          <a:fillRef xmlns:a="http://schemas.openxmlformats.org/drawingml/2006/main" idx="0"/>
+          <a:effectRef xmlns:a="http://schemas.openxmlformats.org/drawingml/2006/main" idx="4"/>
+          <a:fontRef xmlns:a="http://schemas.openxmlformats.org/drawingml/2006/main" idx="major"/>
+        </p:style>
+        <p:txBody>
+          <a:bodyPr xmlns:a="http://schemas.openxmlformats.org/drawingml/2006/main" lIns="114300" tIns="76200" rIns="114300" bIns="76200" anchor="ctr">
+            <a:normAutofit fontScale="100000"/>
+          </a:bodyPr>
+          <a:lstStyle xmlns:a="http://schemas.openxmlformats.org/drawingml/2006/main"/>
+          <a:p xmlns:a="http://schemas.openxmlformats.org/drawingml/2006/main">
+            <a:pPr algn="ctr">
+              <a:defRPr sz="1350" b="1">
+                <a:solidFill>
+                  <a:srgbClr val="FFFFFF"/>
+                </a:solidFill>
+                <a:latin typeface="Microsoft YaHei"/>
+                <a:ea typeface="Microsoft YaHei"/>
+                <a:cs typeface="Microsoft YaHei"/>
+              </a:defRPr>
+            </a:pPr>
+            <a:r>
+              <a:rPr sz="1350" b="1">
+                <a:solidFill>
+                  <a:srgbClr val="FFFFFF"/>
+                </a:solidFill>
+                <a:latin typeface="Microsoft YaHei"/>
+                <a:ea typeface="Microsoft YaHei"/>
+                <a:cs typeface="Microsoft YaHei"/>
+              </a:rPr>
+              <a:t>判断视觉关系</a:t>
+            </a:r>
+          </a:p>
+        </p:txBody>
+      </p:sp>
+      <p:sp>
+        <p:nvSpPr>
+          <p:cNvPr id="19" name="PPAGENT_QA|parent=swimlane-task-3|domains=swimlane-content">
+            <a:extLst xmlns:a="http://schemas.openxmlformats.org/drawingml/2006/main">
+              <a:ext uri="{FF2B5EF4-FFF2-40B4-BE49-F238E27FC236}">
+                <a16:creationId xmlns:a16="http://schemas.microsoft.com/office/drawing/2014/main" id="{03AFE29A-7F7A-4DAD-B65B-066DCE0866C8}"/>
+              </a:ext>
+            </a:extLst>
+          </p:cNvPr>
+          <p:cNvSpPr>
+            <a:spLocks xmlns:a="http://schemas.openxmlformats.org/drawingml/2006/main" noGrp="1"/>
+          </p:cNvSpPr>
+          <p:nvPr/>
+        </p:nvSpPr>
+        <p:spPr>
+          <a:xfrm xmlns:a="http://schemas.openxmlformats.org/drawingml/2006/main">
+            <a:off x="7431881" y="2686050"/>
+            <a:ext cx="2400300" cy="781050"/>
+          </a:xfrm>
+          <a:prstGeom xmlns:a="http://schemas.openxmlformats.org/drawingml/2006/main" prst="roundRect">
+            <a:avLst>
+              <a:gd name="adj" fmla="val 14634"/>
+            </a:avLst>
+          </a:prstGeom>
+          <a:solidFill xmlns:a="http://schemas.openxmlformats.org/drawingml/2006/main">
+            <a:srgbClr val="00A8D8"/>
+          </a:solidFill>
+          <a:ln xmlns:a="http://schemas.openxmlformats.org/drawingml/2006/main" w="0">
+            <a:noFill/>
+            <a:prstDash val="solid"/>
+          </a:ln>
+        </p:spPr>
+        <p:style>
+          <a:lnRef xmlns:a="http://schemas.openxmlformats.org/drawingml/2006/main" idx="0"/>
+          <a:fillRef xmlns:a="http://schemas.openxmlformats.org/drawingml/2006/main" idx="0"/>
+          <a:effectRef xmlns:a="http://schemas.openxmlformats.org/drawingml/2006/main" idx="4"/>
+          <a:fontRef xmlns:a="http://schemas.openxmlformats.org/drawingml/2006/main" idx="major"/>
+        </p:style>
+        <p:txBody>
+          <a:bodyPr xmlns:a="http://schemas.openxmlformats.org/drawingml/2006/main" lIns="114300" tIns="76200" rIns="114300" bIns="76200" anchor="ctr">
+            <a:normAutofit fontScale="100000"/>
+          </a:bodyPr>
+          <a:lstStyle xmlns:a="http://schemas.openxmlformats.org/drawingml/2006/main"/>
+          <a:p xmlns:a="http://schemas.openxmlformats.org/drawingml/2006/main">
+            <a:pPr algn="ctr">
+              <a:defRPr sz="1350" b="1">
+                <a:solidFill>
+                  <a:srgbClr val="FFFFFF"/>
+                </a:solidFill>
+                <a:latin typeface="Microsoft YaHei"/>
+                <a:ea typeface="Microsoft YaHei"/>
+                <a:cs typeface="Microsoft YaHei"/>
+              </a:defRPr>
+            </a:pPr>
+            <a:r>
+              <a:rPr sz="1350" b="1">
+                <a:solidFill>
+                  <a:srgbClr val="FFFFFF"/>
+                </a:solidFill>
+                <a:latin typeface="Microsoft YaHei"/>
+                <a:ea typeface="Microsoft YaHei"/>
+                <a:cs typeface="Microsoft YaHei"/>
+              </a:rPr>
+              <a:t>选择 Style Group</a:t>
+            </a:r>
+          </a:p>
+        </p:txBody>
+      </p:sp>
+      <p:sp>
+        <p:nvSpPr>
+          <p:cNvPr id="20" name="PPAGENT_QA|parent=swimlane-task-4|domains=swimlane-content">
+            <a:extLst xmlns:a="http://schemas.openxmlformats.org/drawingml/2006/main">
+              <a:ext uri="{FF2B5EF4-FFF2-40B4-BE49-F238E27FC236}">
+                <a16:creationId xmlns:a16="http://schemas.microsoft.com/office/drawing/2014/main" id="{8F49705F-13BF-4BFC-B1C4-16669E7A2ECF}"/>
+              </a:ext>
+            </a:extLst>
+          </p:cNvPr>
+          <p:cNvSpPr>
+            <a:spLocks xmlns:a="http://schemas.openxmlformats.org/drawingml/2006/main" noGrp="1"/>
+          </p:cNvSpPr>
+          <p:nvPr/>
+        </p:nvSpPr>
+        <p:spPr>
+          <a:xfrm xmlns:a="http://schemas.openxmlformats.org/drawingml/2006/main">
+            <a:off x="2597944" y="3752850"/>
+            <a:ext cx="2400300" cy="781050"/>
+          </a:xfrm>
+          <a:prstGeom xmlns:a="http://schemas.openxmlformats.org/drawingml/2006/main" prst="roundRect">
+            <a:avLst>
+              <a:gd name="adj" fmla="val 14634"/>
+            </a:avLst>
+          </a:prstGeom>
+          <a:solidFill xmlns:a="http://schemas.openxmlformats.org/drawingml/2006/main">
+            <a:srgbClr val="1677C8"/>
+          </a:solidFill>
+          <a:ln xmlns:a="http://schemas.openxmlformats.org/drawingml/2006/main" w="0">
+            <a:noFill/>
+            <a:prstDash val="solid"/>
+          </a:ln>
+        </p:spPr>
+        <p:style>
+          <a:lnRef xmlns:a="http://schemas.openxmlformats.org/drawingml/2006/main" idx="0"/>
+          <a:fillRef xmlns:a="http://schemas.openxmlformats.org/drawingml/2006/main" idx="0"/>
+          <a:effectRef xmlns:a="http://schemas.openxmlformats.org/drawingml/2006/main" idx="4"/>
+          <a:fontRef xmlns:a="http://schemas.openxmlformats.org/drawingml/2006/main" idx="major"/>
+        </p:style>
+        <p:txBody>
+          <a:bodyPr xmlns:a="http://schemas.openxmlformats.org/drawingml/2006/main" lIns="114300" tIns="76200" rIns="114300" bIns="76200" anchor="ctr">
+            <a:normAutofit fontScale="100000"/>
+          </a:bodyPr>
+          <a:lstStyle xmlns:a="http://schemas.openxmlformats.org/drawingml/2006/main"/>
+          <a:p xmlns:a="http://schemas.openxmlformats.org/drawingml/2006/main">
+            <a:pPr algn="ctr">
+              <a:defRPr sz="1350" b="1">
+                <a:solidFill>
+                  <a:srgbClr val="FFFFFF"/>
+                </a:solidFill>
+                <a:latin typeface="Microsoft YaHei"/>
+                <a:ea typeface="Microsoft YaHei"/>
+                <a:cs typeface="Microsoft YaHei"/>
+              </a:defRPr>
+            </a:pPr>
+            <a:r>
+              <a:rPr sz="1350" b="1">
+                <a:solidFill>
+                  <a:srgbClr val="FFFFFF"/>
+                </a:solidFill>
+                <a:latin typeface="Microsoft YaHei"/>
+                <a:ea typeface="Microsoft YaHei"/>
+                <a:cs typeface="Microsoft YaHei"/>
+              </a:rPr>
+              <a:t>准备运行参数</a:t>
+            </a:r>
+          </a:p>
+        </p:txBody>
+      </p:sp>
+      <p:sp>
+        <p:nvSpPr>
+          <p:cNvPr id="21" name="PPAGENT_QA|parent=swimlane-task-5|domains=swimlane-content">
+            <a:extLst xmlns:a="http://schemas.openxmlformats.org/drawingml/2006/main">
+              <a:ext uri="{FF2B5EF4-FFF2-40B4-BE49-F238E27FC236}">
+                <a16:creationId xmlns:a16="http://schemas.microsoft.com/office/drawing/2014/main" id="{2A8A28B2-B87F-4D21-BF20-EECCBFA49256}"/>
+              </a:ext>
+            </a:extLst>
+          </p:cNvPr>
+          <p:cNvSpPr>
+            <a:spLocks xmlns:a="http://schemas.openxmlformats.org/drawingml/2006/main" noGrp="1"/>
+          </p:cNvSpPr>
+          <p:nvPr/>
+        </p:nvSpPr>
+        <p:spPr>
+          <a:xfrm xmlns:a="http://schemas.openxmlformats.org/drawingml/2006/main">
+            <a:off x="7431881" y="3752850"/>
+            <a:ext cx="2400300" cy="781050"/>
+          </a:xfrm>
+          <a:prstGeom xmlns:a="http://schemas.openxmlformats.org/drawingml/2006/main" prst="roundRect">
+            <a:avLst>
+              <a:gd name="adj" fmla="val 14634"/>
+            </a:avLst>
+          </a:prstGeom>
+          <a:solidFill xmlns:a="http://schemas.openxmlformats.org/drawingml/2006/main">
+            <a:srgbClr val="1677C8"/>
+          </a:solidFill>
+          <a:ln xmlns:a="http://schemas.openxmlformats.org/drawingml/2006/main" w="0">
+            <a:noFill/>
+            <a:prstDash val="solid"/>
+          </a:ln>
+        </p:spPr>
+        <p:style>
+          <a:lnRef xmlns:a="http://schemas.openxmlformats.org/drawingml/2006/main" idx="0"/>
+          <a:fillRef xmlns:a="http://schemas.openxmlformats.org/drawingml/2006/main" idx="0"/>
+          <a:effectRef xmlns:a="http://schemas.openxmlformats.org/drawingml/2006/main" idx="4"/>
+          <a:fontRef xmlns:a="http://schemas.openxmlformats.org/drawingml/2006/main" idx="major"/>
+        </p:style>
+        <p:txBody>
+          <a:bodyPr xmlns:a="http://schemas.openxmlformats.org/drawingml/2006/main" lIns="114300" tIns="76200" rIns="114300" bIns="76200" anchor="ctr">
+            <a:normAutofit fontScale="100000"/>
+          </a:bodyPr>
+          <a:lstStyle xmlns:a="http://schemas.openxmlformats.org/drawingml/2006/main"/>
+          <a:p xmlns:a="http://schemas.openxmlformats.org/drawingml/2006/main">
+            <a:pPr algn="ctr">
+              <a:defRPr sz="1350" b="1">
+                <a:solidFill>
+                  <a:srgbClr val="FFFFFF"/>
+                </a:solidFill>
+                <a:latin typeface="Microsoft YaHei"/>
+                <a:ea typeface="Microsoft YaHei"/>
+                <a:cs typeface="Microsoft YaHei"/>
+              </a:defRPr>
+            </a:pPr>
+            <a:r>
+              <a:rPr sz="1350" b="1">
+                <a:solidFill>
+                  <a:srgbClr val="FFFFFF"/>
+                </a:solidFill>
+                <a:latin typeface="Microsoft YaHei"/>
+                <a:ea typeface="Microsoft YaHei"/>
+                <a:cs typeface="Microsoft YaHei"/>
+              </a:rPr>
+              <a:t>生成原生 PPT</a:t>
+            </a:r>
+          </a:p>
+        </p:txBody>
+      </p:sp>
+      <p:sp>
+        <p:nvSpPr>
+          <p:cNvPr id="22" name="PPAGENT_QA|parent=swimlane-conclusion|domains=swimlane-content">
+            <a:extLst xmlns:a="http://schemas.openxmlformats.org/drawingml/2006/main">
+              <a:ext uri="{FF2B5EF4-FFF2-40B4-BE49-F238E27FC236}">
+                <a16:creationId xmlns:a16="http://schemas.microsoft.com/office/drawing/2014/main" id="{19234145-3D4B-410B-9C27-8B16C01817A3}"/>
+              </a:ext>
+            </a:extLst>
+          </p:cNvPr>
+          <p:cNvSpPr>
+            <a:spLocks xmlns:a="http://schemas.openxmlformats.org/drawingml/2006/main" noGrp="1"/>
+          </p:cNvSpPr>
+          <p:nvPr/>
+        </p:nvSpPr>
+        <p:spPr>
+          <a:xfrm xmlns:a="http://schemas.openxmlformats.org/drawingml/2006/main">
+            <a:off x="1381125" y="4953000"/>
+            <a:ext cx="9667875" cy="1028700"/>
+          </a:xfrm>
+          <a:prstGeom xmlns:a="http://schemas.openxmlformats.org/drawingml/2006/main" prst="roundRect">
+            <a:avLst>
+              <a:gd name="adj" fmla="val 11111"/>
+            </a:avLst>
+          </a:prstGeom>
+          <a:solidFill xmlns:a="http://schemas.openxmlformats.org/drawingml/2006/main">
+            <a:srgbClr val="EAF2FD"/>
+          </a:solidFill>
+          <a:ln xmlns:a="http://schemas.openxmlformats.org/drawingml/2006/main" w="14288">
+            <a:solidFill>
+              <a:srgbClr val="1677C8"/>
+            </a:solidFill>
+            <a:prstDash val="solid"/>
+          </a:ln>
+        </p:spPr>
+        <p:txBody>
+          <a:bodyPr xmlns:a="http://schemas.openxmlformats.org/drawingml/2006/main" lIns="114300" tIns="76200" rIns="114300" bIns="76200" anchor="ctr">
+            <a:normAutofit fontScale="100000"/>
+          </a:bodyPr>
+          <a:lstStyle xmlns:a="http://schemas.openxmlformats.org/drawingml/2006/main"/>
+          <a:p xmlns:a="http://schemas.openxmlformats.org/drawingml/2006/main">
+            <a:pPr algn="ctr">
+              <a:defRPr sz="1350" b="1">
+                <a:solidFill>
+                  <a:srgbClr val="1677C8"/>
+                </a:solidFill>
+                <a:latin typeface="Microsoft YaHei"/>
+                <a:ea typeface="Microsoft YaHei"/>
+                <a:cs typeface="Microsoft YaHei"/>
+              </a:defRPr>
+            </a:pPr>
+            <a:r>
+              <a:rPr sz="1350" b="1">
+                <a:solidFill>
+                  <a:srgbClr val="1677C8"/>
+                </a:solidFill>
+                <a:latin typeface="Microsoft YaHei"/>
+                <a:ea typeface="Microsoft YaHei"/>
+                <a:cs typeface="Microsoft YaHei"/>
+              </a:rPr>
+              <a:t>协同结论</a:t>
+            </a:r>
+          </a:p>
+          <a:p xmlns:a="http://schemas.openxmlformats.org/drawingml/2006/main">
+            <a:pPr algn="ctr">
+              <a:defRPr sz="1350" b="1">
+                <a:solidFill>
+                  <a:srgbClr val="1677C8"/>
+                </a:solidFill>
+                <a:latin typeface="Microsoft YaHei"/>
+                <a:ea typeface="Microsoft YaHei"/>
+                <a:cs typeface="Microsoft YaHei"/>
+              </a:defRPr>
+            </a:pPr>
+            <a:r>
+              <a:rPr sz="1350" b="1">
+                <a:solidFill>
+                  <a:srgbClr val="1677C8"/>
+                </a:solidFill>
+                <a:latin typeface="Microsoft YaHei"/>
+                <a:ea typeface="Microsoft YaHei"/>
+                <a:cs typeface="Microsoft YaHei"/>
+              </a:rPr>
+              <a:t>角色边界清楚，信息能够回流</a:t>
+            </a:r>
+          </a:p>
+        </p:txBody>
+      </p:sp>
+    </p:spTree>
+    <p:extLst>
+      <p:ext uri="{BB962C8B-B14F-4D97-AF65-F5344CB8AC3E}">
+        <p14:creationId xmlns:p14="http://schemas.microsoft.com/office/powerpoint/2010/main" val="959024861"/>
+      </p:ext>
+    </p:extLst>
+  </p:cSld>
+</p:sld>
+</file>
+
+<file path=ppt/slides/slide4.xml><?xml version="1.0" encoding="utf-8"?>
+<p:sld xmlns:p="http://schemas.openxmlformats.org/presentationml/2006/main">
+  <p:cSld>
+    <p:bg>
+      <p:bgPr>
+        <a:solidFill xmlns:a="http://schemas.openxmlformats.org/drawingml/2006/main">
+          <a:srgbClr val="F7FAFC"/>
+        </a:solidFill>
+      </p:bgPr>
+    </p:bg>
+    <p:spTree>
+      <p:nvGrpSpPr>
+        <p:cNvPr id="1" name=""/>
+        <p:cNvGrpSpPr/>
+        <p:nvPr/>
+      </p:nvGrpSpPr>
+      <p:grpSpPr>
+        <a:xfrm xmlns:a="http://schemas.openxmlformats.org/drawingml/2006/main"/>
+      </p:grpSpPr>
+      <p:sp>
+        <p:nvSpPr>
+          <p:cNvPr id="30" name="">
+            <a:extLst xmlns:a="http://schemas.openxmlformats.org/drawingml/2006/main">
+              <a:ext uri="{FF2B5EF4-FFF2-40B4-BE49-F238E27FC236}">
+                <a16:creationId xmlns:a16="http://schemas.microsoft.com/office/drawing/2014/main" id="{66746E2D-7BBB-4335-AFE7-1387DF076458}"/>
+              </a:ext>
+            </a:extLst>
+          </p:cNvPr>
+          <p:cNvSpPr>
+            <a:spLocks xmlns:a="http://schemas.openxmlformats.org/drawingml/2006/main" noGrp="1"/>
+          </p:cNvSpPr>
+          <p:nvPr/>
+        </p:nvSpPr>
+        <p:spPr>
+          <a:xfrm xmlns:a="http://schemas.openxmlformats.org/drawingml/2006/main">
+            <a:off x="685800" y="400050"/>
+            <a:ext cx="8382000" cy="457200"/>
+          </a:xfrm>
+          <a:prstGeom xmlns:a="http://schemas.openxmlformats.org/drawingml/2006/main" prst="rect">
+            <a:avLst/>
+          </a:prstGeom>
+          <a:noFill xmlns:a="http://schemas.openxmlformats.org/drawingml/2006/main"/>
+          <a:ln xmlns:a="http://schemas.openxmlformats.org/drawingml/2006/main" w="0">
+            <a:noFill/>
+            <a:prstDash val="solid"/>
+          </a:ln>
+        </p:spPr>
+        <p:txBody>
+          <a:bodyPr xmlns:a="http://schemas.openxmlformats.org/drawingml/2006/main" lIns="0" tIns="0" rIns="0" bIns="0" anchor="ctr">
+            <a:normAutofit fontScale="100000"/>
+          </a:bodyPr>
+          <a:lstStyle xmlns:a="http://schemas.openxmlformats.org/drawingml/2006/main"/>
+          <a:p xmlns:a="http://schemas.openxmlformats.org/drawingml/2006/main">
+            <a:pPr algn="l">
+              <a:defRPr sz="2700" b="1">
+                <a:solidFill>
+                  <a:srgbClr val="1677C8"/>
+                </a:solidFill>
+                <a:latin typeface="Microsoft YaHei"/>
+                <a:ea typeface="Microsoft YaHei"/>
+                <a:cs typeface="Microsoft YaHei"/>
+              </a:defRPr>
+            </a:pPr>
+            <a:r>
+              <a:rPr sz="2700" b="1">
+                <a:solidFill>
+                  <a:srgbClr val="1677C8"/>
+                </a:solidFill>
+                <a:latin typeface="Microsoft YaHei"/>
+                <a:ea typeface="Microsoft YaHei"/>
+                <a:cs typeface="Microsoft YaHei"/>
+              </a:rPr>
+              <a:t>跨角色协同流程</a:t>
+            </a:r>
+          </a:p>
+        </p:txBody>
+      </p:sp>
+      <p:sp>
+        <p:nvSpPr>
+          <p:cNvPr id="2" name="">
+            <a:extLst xmlns:a="http://schemas.openxmlformats.org/drawingml/2006/main">
+              <a:ext uri="{FF2B5EF4-FFF2-40B4-BE49-F238E27FC236}">
+                <a16:creationId xmlns:a16="http://schemas.microsoft.com/office/drawing/2014/main" id="{43ED08A9-CAEA-4F0B-9D56-03344A042376}"/>
+              </a:ext>
+            </a:extLst>
+          </p:cNvPr>
+          <p:cNvSpPr>
+            <a:spLocks xmlns:a="http://schemas.openxmlformats.org/drawingml/2006/main" noGrp="1"/>
+          </p:cNvSpPr>
+          <p:nvPr/>
+        </p:nvSpPr>
+        <p:spPr>
+          <a:xfrm xmlns:a="http://schemas.openxmlformats.org/drawingml/2006/main">
+            <a:off x="704850" y="876300"/>
+            <a:ext cx="4953000" cy="247650"/>
+          </a:xfrm>
+          <a:prstGeom xmlns:a="http://schemas.openxmlformats.org/drawingml/2006/main" prst="rect">
+            <a:avLst/>
+          </a:prstGeom>
+          <a:noFill xmlns:a="http://schemas.openxmlformats.org/drawingml/2006/main"/>
+          <a:ln xmlns:a="http://schemas.openxmlformats.org/drawingml/2006/main" w="0">
+            <a:noFill/>
+            <a:prstDash val="solid"/>
+          </a:ln>
+        </p:spPr>
+        <p:txBody>
+          <a:bodyPr xmlns:a="http://schemas.openxmlformats.org/drawingml/2006/main" lIns="0" tIns="0" rIns="0" bIns="0" anchor="ctr">
+            <a:normAutofit fontScale="100000"/>
+          </a:bodyPr>
+          <a:lstStyle xmlns:a="http://schemas.openxmlformats.org/drawingml/2006/main"/>
+          <a:p xmlns:a="http://schemas.openxmlformats.org/drawingml/2006/main">
+            <a:pPr algn="l">
+              <a:defRPr sz="1200" b="0">
+                <a:solidFill>
+                  <a:srgbClr val="7C8A9A"/>
+                </a:solidFill>
+                <a:latin typeface="Microsoft YaHei"/>
+                <a:ea typeface="Microsoft YaHei"/>
+                <a:cs typeface="Microsoft YaHei"/>
+              </a:defRPr>
+            </a:pPr>
+            <a:r>
+              <a:rPr sz="1200" b="0">
+                <a:solidFill>
+                  <a:srgbClr val="7C8A9A"/>
+                </a:solidFill>
+                <a:latin typeface="Microsoft YaHei"/>
+                <a:ea typeface="Microsoft YaHei"/>
+                <a:cs typeface="Microsoft YaHei"/>
+              </a:rPr>
+              <a:t>多角色泳道流程</a:t>
+            </a:r>
+          </a:p>
+        </p:txBody>
+      </p:sp>
+      <p:sp>
+        <p:nvSpPr>
+          <p:cNvPr id="3" name="">
+            <a:extLst xmlns:a="http://schemas.openxmlformats.org/drawingml/2006/main">
+              <a:ext uri="{FF2B5EF4-FFF2-40B4-BE49-F238E27FC236}">
+                <a16:creationId xmlns:a16="http://schemas.microsoft.com/office/drawing/2014/main" id="{29E68963-6E1C-459E-9B2F-9B27FE3A8D54}"/>
+              </a:ext>
+            </a:extLst>
+          </p:cNvPr>
+          <p:cNvSpPr>
+            <a:spLocks xmlns:a="http://schemas.openxmlformats.org/drawingml/2006/main" noGrp="1"/>
+          </p:cNvSpPr>
+          <p:nvPr/>
+        </p:nvSpPr>
+        <p:spPr>
+          <a:xfrm xmlns:a="http://schemas.openxmlformats.org/drawingml/2006/main">
+            <a:off x="1381125" y="1152525"/>
+            <a:ext cx="3222625" cy="285750"/>
+          </a:xfrm>
+          <a:prstGeom xmlns:a="http://schemas.openxmlformats.org/drawingml/2006/main" prst="rect">
+            <a:avLst/>
+          </a:prstGeom>
+          <a:noFill xmlns:a="http://schemas.openxmlformats.org/drawingml/2006/main"/>
+          <a:ln xmlns:a="http://schemas.openxmlformats.org/drawingml/2006/main" w="0">
+            <a:noFill/>
+            <a:prstDash val="solid"/>
+          </a:ln>
+        </p:spPr>
+        <p:txBody>
+          <a:bodyPr xmlns:a="http://schemas.openxmlformats.org/drawingml/2006/main" lIns="0" tIns="0" rIns="0" bIns="0" anchor="ctr">
+            <a:normAutofit fontScale="100000"/>
+          </a:bodyPr>
+          <a:lstStyle xmlns:a="http://schemas.openxmlformats.org/drawingml/2006/main"/>
+          <a:p xmlns:a="http://schemas.openxmlformats.org/drawingml/2006/main">
+            <a:pPr algn="ctr">
+              <a:defRPr sz="1350" b="1">
+                <a:solidFill>
+                  <a:srgbClr val="475569"/>
+                </a:solidFill>
+                <a:latin typeface="Microsoft YaHei"/>
+                <a:ea typeface="Microsoft YaHei"/>
+                <a:cs typeface="Microsoft YaHei"/>
+              </a:defRPr>
+            </a:pPr>
+            <a:r>
+              <a:rPr sz="1350" b="1">
+                <a:solidFill>
+                  <a:srgbClr val="475569"/>
+                </a:solidFill>
+                <a:latin typeface="Microsoft YaHei"/>
+                <a:ea typeface="Microsoft YaHei"/>
+                <a:cs typeface="Microsoft YaHei"/>
+              </a:rPr>
+              <a:t>理解</a:t>
+            </a:r>
+          </a:p>
+        </p:txBody>
+      </p:sp>
+      <p:sp>
+        <p:nvSpPr>
+          <p:cNvPr id="4" name="">
+            <a:extLst xmlns:a="http://schemas.openxmlformats.org/drawingml/2006/main">
+              <a:ext uri="{FF2B5EF4-FFF2-40B4-BE49-F238E27FC236}">
+                <a16:creationId xmlns:a16="http://schemas.microsoft.com/office/drawing/2014/main" id="{9AD159DF-259F-4314-BDDE-259C26924276}"/>
+              </a:ext>
+            </a:extLst>
+          </p:cNvPr>
+          <p:cNvSpPr>
+            <a:spLocks xmlns:a="http://schemas.openxmlformats.org/drawingml/2006/main" noGrp="1"/>
+          </p:cNvSpPr>
+          <p:nvPr/>
+        </p:nvSpPr>
+        <p:spPr>
+          <a:xfrm xmlns:a="http://schemas.openxmlformats.org/drawingml/2006/main">
+            <a:off x="4603750" y="1152525"/>
+            <a:ext cx="3222625" cy="285750"/>
+          </a:xfrm>
+          <a:prstGeom xmlns:a="http://schemas.openxmlformats.org/drawingml/2006/main" prst="rect">
+            <a:avLst/>
+          </a:prstGeom>
+          <a:noFill xmlns:a="http://schemas.openxmlformats.org/drawingml/2006/main"/>
+          <a:ln xmlns:a="http://schemas.openxmlformats.org/drawingml/2006/main" w="0">
+            <a:noFill/>
+            <a:prstDash val="solid"/>
+          </a:ln>
+        </p:spPr>
+        <p:txBody>
+          <a:bodyPr xmlns:a="http://schemas.openxmlformats.org/drawingml/2006/main" lIns="0" tIns="0" rIns="0" bIns="0" anchor="ctr">
+            <a:normAutofit fontScale="100000"/>
+          </a:bodyPr>
+          <a:lstStyle xmlns:a="http://schemas.openxmlformats.org/drawingml/2006/main"/>
+          <a:p xmlns:a="http://schemas.openxmlformats.org/drawingml/2006/main">
+            <a:pPr algn="ctr">
+              <a:defRPr sz="1350" b="1">
+                <a:solidFill>
+                  <a:srgbClr val="475569"/>
+                </a:solidFill>
+                <a:latin typeface="Microsoft YaHei"/>
+                <a:ea typeface="Microsoft YaHei"/>
+                <a:cs typeface="Microsoft YaHei"/>
+              </a:defRPr>
+            </a:pPr>
+            <a:r>
+              <a:rPr sz="1350" b="1">
+                <a:solidFill>
+                  <a:srgbClr val="475569"/>
+                </a:solidFill>
+                <a:latin typeface="Microsoft YaHei"/>
+                <a:ea typeface="Microsoft YaHei"/>
+                <a:cs typeface="Microsoft YaHei"/>
+              </a:rPr>
+              <a:t>设计</a:t>
+            </a:r>
+          </a:p>
+        </p:txBody>
+      </p:sp>
+      <p:sp>
+        <p:nvSpPr>
+          <p:cNvPr id="5" name="">
+            <a:extLst xmlns:a="http://schemas.openxmlformats.org/drawingml/2006/main">
+              <a:ext uri="{FF2B5EF4-FFF2-40B4-BE49-F238E27FC236}">
+                <a16:creationId xmlns:a16="http://schemas.microsoft.com/office/drawing/2014/main" id="{B1390CAF-8CF3-4888-B2F1-018021600054}"/>
+              </a:ext>
+            </a:extLst>
+          </p:cNvPr>
+          <p:cNvSpPr>
+            <a:spLocks xmlns:a="http://schemas.openxmlformats.org/drawingml/2006/main" noGrp="1"/>
+          </p:cNvSpPr>
+          <p:nvPr/>
+        </p:nvSpPr>
+        <p:spPr>
+          <a:xfrm xmlns:a="http://schemas.openxmlformats.org/drawingml/2006/main">
+            <a:off x="7826375" y="1152525"/>
+            <a:ext cx="3222625" cy="285750"/>
+          </a:xfrm>
+          <a:prstGeom xmlns:a="http://schemas.openxmlformats.org/drawingml/2006/main" prst="rect">
+            <a:avLst/>
+          </a:prstGeom>
+          <a:noFill xmlns:a="http://schemas.openxmlformats.org/drawingml/2006/main"/>
+          <a:ln xmlns:a="http://schemas.openxmlformats.org/drawingml/2006/main" w="0">
+            <a:noFill/>
+            <a:prstDash val="solid"/>
+          </a:ln>
+        </p:spPr>
+        <p:txBody>
+          <a:bodyPr xmlns:a="http://schemas.openxmlformats.org/drawingml/2006/main" lIns="0" tIns="0" rIns="0" bIns="0" anchor="ctr">
+            <a:normAutofit fontScale="100000"/>
+          </a:bodyPr>
+          <a:lstStyle xmlns:a="http://schemas.openxmlformats.org/drawingml/2006/main"/>
+          <a:p xmlns:a="http://schemas.openxmlformats.org/drawingml/2006/main">
+            <a:pPr algn="ctr">
+              <a:defRPr sz="1350" b="1">
+                <a:solidFill>
+                  <a:srgbClr val="475569"/>
+                </a:solidFill>
+                <a:latin typeface="Microsoft YaHei"/>
+                <a:ea typeface="Microsoft YaHei"/>
+                <a:cs typeface="Microsoft YaHei"/>
+              </a:defRPr>
+            </a:pPr>
+            <a:r>
+              <a:rPr sz="1350" b="1">
+                <a:solidFill>
+                  <a:srgbClr val="475569"/>
+                </a:solidFill>
+                <a:latin typeface="Microsoft YaHei"/>
+                <a:ea typeface="Microsoft YaHei"/>
+                <a:cs typeface="Microsoft YaHei"/>
+              </a:rPr>
+              <a:t>交付</a:t>
+            </a:r>
+          </a:p>
+        </p:txBody>
+      </p:sp>
+      <p:sp>
+        <p:nvSpPr>
+          <p:cNvPr id="6" name="PPAGENT_QA|parent=swimlane-label-0|domains=swimlane-frame,swimlane-content">
+            <a:extLst xmlns:a="http://schemas.openxmlformats.org/drawingml/2006/main">
+              <a:ext uri="{FF2B5EF4-FFF2-40B4-BE49-F238E27FC236}">
+                <a16:creationId xmlns:a16="http://schemas.microsoft.com/office/drawing/2014/main" id="{2E5CCAAB-3F24-45BC-BF4A-3133F2CBDFB8}"/>
+              </a:ext>
+            </a:extLst>
+          </p:cNvPr>
+          <p:cNvSpPr>
+            <a:spLocks xmlns:a="http://schemas.openxmlformats.org/drawingml/2006/main" noGrp="1"/>
+          </p:cNvSpPr>
+          <p:nvPr/>
+        </p:nvSpPr>
+        <p:spPr>
+          <a:xfrm xmlns:a="http://schemas.openxmlformats.org/drawingml/2006/main">
+            <a:off x="419100" y="1476375"/>
+            <a:ext cx="781050" cy="971550"/>
+          </a:xfrm>
+          <a:prstGeom xmlns:a="http://schemas.openxmlformats.org/drawingml/2006/main" prst="roundRect">
+            <a:avLst>
+              <a:gd name="adj" fmla="val 14634"/>
+            </a:avLst>
+          </a:prstGeom>
+          <a:solidFill xmlns:a="http://schemas.openxmlformats.org/drawingml/2006/main">
+            <a:srgbClr val="1677C8"/>
+          </a:solidFill>
+          <a:ln xmlns:a="http://schemas.openxmlformats.org/drawingml/2006/main" w="0">
+            <a:noFill/>
+            <a:prstDash val="solid"/>
+          </a:ln>
+        </p:spPr>
+        <p:txBody>
+          <a:bodyPr xmlns:a="http://schemas.openxmlformats.org/drawingml/2006/main" lIns="114300" tIns="76200" rIns="114300" bIns="76200" anchor="ctr">
+            <a:normAutofit fontScale="100000"/>
+          </a:bodyPr>
+          <a:lstStyle xmlns:a="http://schemas.openxmlformats.org/drawingml/2006/main"/>
+          <a:p xmlns:a="http://schemas.openxmlformats.org/drawingml/2006/main">
+            <a:pPr algn="ctr">
+              <a:defRPr sz="1350" b="1">
+                <a:solidFill>
+                  <a:srgbClr val="FFFFFF"/>
+                </a:solidFill>
+                <a:latin typeface="Microsoft YaHei"/>
+                <a:ea typeface="Microsoft YaHei"/>
+                <a:cs typeface="Microsoft YaHei"/>
+              </a:defRPr>
+            </a:pPr>
+            <a:r>
+              <a:rPr sz="1350" b="1">
+                <a:solidFill>
+                  <a:srgbClr val="FFFFFF"/>
+                </a:solidFill>
+                <a:latin typeface="Microsoft YaHei"/>
+                <a:ea typeface="Microsoft YaHei"/>
+                <a:cs typeface="Microsoft YaHei"/>
+              </a:rPr>
+              <a:t>内容团队</a:t>
+            </a:r>
+          </a:p>
+        </p:txBody>
+      </p:sp>
+      <p:sp>
+        <p:nvSpPr>
+          <p:cNvPr id="7" name="PPAGENT_QA|parent=swimlane-background-0|domains=swimlane-frame">
+            <a:extLst xmlns:a="http://schemas.openxmlformats.org/drawingml/2006/main">
+              <a:ext uri="{FF2B5EF4-FFF2-40B4-BE49-F238E27FC236}">
+                <a16:creationId xmlns:a16="http://schemas.microsoft.com/office/drawing/2014/main" id="{C137BFD4-2210-414A-950A-B1CD47933E04}"/>
+              </a:ext>
+            </a:extLst>
+          </p:cNvPr>
+          <p:cNvSpPr>
+            <a:spLocks xmlns:a="http://schemas.openxmlformats.org/drawingml/2006/main" noGrp="1"/>
+          </p:cNvSpPr>
+          <p:nvPr/>
+        </p:nvSpPr>
+        <p:spPr>
+          <a:xfrm xmlns:a="http://schemas.openxmlformats.org/drawingml/2006/main">
+            <a:off x="1381125" y="1476375"/>
+            <a:ext cx="9667875" cy="971550"/>
+          </a:xfrm>
+          <a:prstGeom xmlns:a="http://schemas.openxmlformats.org/drawingml/2006/main" prst="rect">
+            <a:avLst/>
+          </a:prstGeom>
+          <a:solidFill xmlns:a="http://schemas.openxmlformats.org/drawingml/2006/main">
+            <a:srgbClr val="F8FBFF"/>
+          </a:solidFill>
+          <a:ln xmlns:a="http://schemas.openxmlformats.org/drawingml/2006/main" w="9525">
+            <a:solidFill>
+              <a:srgbClr val="C9D5E3"/>
+            </a:solidFill>
+            <a:prstDash val="solid"/>
+          </a:ln>
+        </p:spPr>
+      </p:sp>
+      <p:sp>
+        <p:nvSpPr>
+          <p:cNvPr id="8" name="PPAGENT_QA|parent=swimlane-label-1|domains=swimlane-frame,swimlane-content">
+            <a:extLst xmlns:a="http://schemas.openxmlformats.org/drawingml/2006/main">
+              <a:ext uri="{FF2B5EF4-FFF2-40B4-BE49-F238E27FC236}">
+                <a16:creationId xmlns:a16="http://schemas.microsoft.com/office/drawing/2014/main" id="{DEA4A780-EE54-462E-82AC-4F2953DD2DA2}"/>
+              </a:ext>
+            </a:extLst>
+          </p:cNvPr>
+          <p:cNvSpPr>
+            <a:spLocks xmlns:a="http://schemas.openxmlformats.org/drawingml/2006/main" noGrp="1"/>
+          </p:cNvSpPr>
+          <p:nvPr/>
+        </p:nvSpPr>
+        <p:spPr>
+          <a:xfrm xmlns:a="http://schemas.openxmlformats.org/drawingml/2006/main">
+            <a:off x="419100" y="2543175"/>
+            <a:ext cx="781050" cy="971550"/>
+          </a:xfrm>
+          <a:prstGeom xmlns:a="http://schemas.openxmlformats.org/drawingml/2006/main" prst="roundRect">
+            <a:avLst>
+              <a:gd name="adj" fmla="val 14634"/>
+            </a:avLst>
+          </a:prstGeom>
+          <a:solidFill xmlns:a="http://schemas.openxmlformats.org/drawingml/2006/main">
+            <a:srgbClr val="00A8D8"/>
+          </a:solidFill>
+          <a:ln xmlns:a="http://schemas.openxmlformats.org/drawingml/2006/main" w="0">
+            <a:noFill/>
+            <a:prstDash val="solid"/>
+          </a:ln>
+        </p:spPr>
+        <p:txBody>
+          <a:bodyPr xmlns:a="http://schemas.openxmlformats.org/drawingml/2006/main" lIns="114300" tIns="76200" rIns="114300" bIns="76200" anchor="ctr">
+            <a:normAutofit fontScale="100000"/>
+          </a:bodyPr>
+          <a:lstStyle xmlns:a="http://schemas.openxmlformats.org/drawingml/2006/main"/>
+          <a:p xmlns:a="http://schemas.openxmlformats.org/drawingml/2006/main">
+            <a:pPr algn="ctr">
+              <a:defRPr sz="1350" b="1">
+                <a:solidFill>
+                  <a:srgbClr val="FFFFFF"/>
+                </a:solidFill>
+                <a:latin typeface="Microsoft YaHei"/>
+                <a:ea typeface="Microsoft YaHei"/>
+                <a:cs typeface="Microsoft YaHei"/>
+              </a:defRPr>
+            </a:pPr>
+            <a:r>
+              <a:rPr sz="1350" b="1">
+                <a:solidFill>
+                  <a:srgbClr val="FFFFFF"/>
+                </a:solidFill>
+                <a:latin typeface="Microsoft YaHei"/>
+                <a:ea typeface="Microsoft YaHei"/>
+                <a:cs typeface="Microsoft YaHei"/>
+              </a:rPr>
+              <a:t>视觉团队</a:t>
+            </a:r>
+          </a:p>
+        </p:txBody>
+      </p:sp>
+      <p:sp>
+        <p:nvSpPr>
+          <p:cNvPr id="9" name="PPAGENT_QA|parent=swimlane-background-1|domains=swimlane-frame">
+            <a:extLst xmlns:a="http://schemas.openxmlformats.org/drawingml/2006/main">
+              <a:ext uri="{FF2B5EF4-FFF2-40B4-BE49-F238E27FC236}">
+                <a16:creationId xmlns:a16="http://schemas.microsoft.com/office/drawing/2014/main" id="{C5EB1EFE-30FF-4062-849C-CEBBF59923B4}"/>
+              </a:ext>
+            </a:extLst>
+          </p:cNvPr>
+          <p:cNvSpPr>
+            <a:spLocks xmlns:a="http://schemas.openxmlformats.org/drawingml/2006/main" noGrp="1"/>
+          </p:cNvSpPr>
+          <p:nvPr/>
+        </p:nvSpPr>
+        <p:spPr>
+          <a:xfrm xmlns:a="http://schemas.openxmlformats.org/drawingml/2006/main">
+            <a:off x="1381125" y="2543175"/>
+            <a:ext cx="9667875" cy="971550"/>
+          </a:xfrm>
+          <a:prstGeom xmlns:a="http://schemas.openxmlformats.org/drawingml/2006/main" prst="rect">
+            <a:avLst/>
+          </a:prstGeom>
+          <a:solidFill xmlns:a="http://schemas.openxmlformats.org/drawingml/2006/main">
+            <a:srgbClr val="EEF4FC"/>
+          </a:solidFill>
+          <a:ln xmlns:a="http://schemas.openxmlformats.org/drawingml/2006/main" w="9525">
+            <a:solidFill>
+              <a:srgbClr val="C9D5E3"/>
+            </a:solidFill>
+            <a:prstDash val="solid"/>
+          </a:ln>
+        </p:spPr>
+      </p:sp>
+      <p:sp>
+        <p:nvSpPr>
+          <p:cNvPr id="10" name="PPAGENT_QA|parent=swimlane-label-2|domains=swimlane-frame,swimlane-content">
+            <a:extLst xmlns:a="http://schemas.openxmlformats.org/drawingml/2006/main">
+              <a:ext uri="{FF2B5EF4-FFF2-40B4-BE49-F238E27FC236}">
+                <a16:creationId xmlns:a16="http://schemas.microsoft.com/office/drawing/2014/main" id="{0A139C29-DAF1-4A26-8BFD-E883C9578264}"/>
+              </a:ext>
+            </a:extLst>
+          </p:cNvPr>
+          <p:cNvSpPr>
+            <a:spLocks xmlns:a="http://schemas.openxmlformats.org/drawingml/2006/main" noGrp="1"/>
+          </p:cNvSpPr>
+          <p:nvPr/>
+        </p:nvSpPr>
+        <p:spPr>
+          <a:xfrm xmlns:a="http://schemas.openxmlformats.org/drawingml/2006/main">
+            <a:off x="419100" y="3609975"/>
+            <a:ext cx="781050" cy="971550"/>
+          </a:xfrm>
+          <a:prstGeom xmlns:a="http://schemas.openxmlformats.org/drawingml/2006/main" prst="roundRect">
+            <a:avLst>
+              <a:gd name="adj" fmla="val 14634"/>
+            </a:avLst>
+          </a:prstGeom>
+          <a:solidFill xmlns:a="http://schemas.openxmlformats.org/drawingml/2006/main">
+            <a:srgbClr val="14CBD1"/>
+          </a:solidFill>
+          <a:ln xmlns:a="http://schemas.openxmlformats.org/drawingml/2006/main" w="0">
+            <a:noFill/>
+            <a:prstDash val="solid"/>
+          </a:ln>
+        </p:spPr>
+        <p:txBody>
+          <a:bodyPr xmlns:a="http://schemas.openxmlformats.org/drawingml/2006/main" lIns="114300" tIns="76200" rIns="114300" bIns="76200" anchor="ctr">
+            <a:normAutofit fontScale="100000"/>
+          </a:bodyPr>
+          <a:lstStyle xmlns:a="http://schemas.openxmlformats.org/drawingml/2006/main"/>
+          <a:p xmlns:a="http://schemas.openxmlformats.org/drawingml/2006/main">
+            <a:pPr algn="ctr">
+              <a:defRPr sz="1350" b="1">
+                <a:solidFill>
+                  <a:srgbClr val="FFFFFF"/>
+                </a:solidFill>
+                <a:latin typeface="Microsoft YaHei"/>
+                <a:ea typeface="Microsoft YaHei"/>
+                <a:cs typeface="Microsoft YaHei"/>
+              </a:defRPr>
+            </a:pPr>
+            <a:r>
+              <a:rPr sz="1350" b="1">
+                <a:solidFill>
+                  <a:srgbClr val="FFFFFF"/>
+                </a:solidFill>
+                <a:latin typeface="Microsoft YaHei"/>
+                <a:ea typeface="Microsoft YaHei"/>
+                <a:cs typeface="Microsoft YaHei"/>
+              </a:rPr>
+              <a:t>工程团队</a:t>
+            </a:r>
+          </a:p>
+        </p:txBody>
+      </p:sp>
+      <p:sp>
+        <p:nvSpPr>
+          <p:cNvPr id="11" name="PPAGENT_QA|parent=swimlane-background-2|domains=swimlane-frame">
+            <a:extLst xmlns:a="http://schemas.openxmlformats.org/drawingml/2006/main">
+              <a:ext uri="{FF2B5EF4-FFF2-40B4-BE49-F238E27FC236}">
+                <a16:creationId xmlns:a16="http://schemas.microsoft.com/office/drawing/2014/main" id="{D6141C92-1D8F-490A-BCE7-3665C126BA49}"/>
+              </a:ext>
+            </a:extLst>
+          </p:cNvPr>
+          <p:cNvSpPr>
+            <a:spLocks xmlns:a="http://schemas.openxmlformats.org/drawingml/2006/main" noGrp="1"/>
+          </p:cNvSpPr>
+          <p:nvPr/>
+        </p:nvSpPr>
+        <p:spPr>
+          <a:xfrm xmlns:a="http://schemas.openxmlformats.org/drawingml/2006/main">
+            <a:off x="1381125" y="3609975"/>
+            <a:ext cx="9667875" cy="971550"/>
+          </a:xfrm>
+          <a:prstGeom xmlns:a="http://schemas.openxmlformats.org/drawingml/2006/main" prst="rect">
+            <a:avLst/>
+          </a:prstGeom>
+          <a:solidFill xmlns:a="http://schemas.openxmlformats.org/drawingml/2006/main">
+            <a:srgbClr val="F8FBFF"/>
+          </a:solidFill>
+          <a:ln xmlns:a="http://schemas.openxmlformats.org/drawingml/2006/main" w="9525">
+            <a:solidFill>
+              <a:srgbClr val="C9D5E3"/>
+            </a:solidFill>
+            <a:prstDash val="solid"/>
+          </a:ln>
+        </p:spPr>
+      </p:sp>
+      <p:sp>
+        <p:nvSpPr>
+          <p:cNvPr id="12" name="">
+            <a:extLst xmlns:a="http://schemas.openxmlformats.org/drawingml/2006/main">
+              <a:ext uri="{FF2B5EF4-FFF2-40B4-BE49-F238E27FC236}">
+                <a16:creationId xmlns:a16="http://schemas.microsoft.com/office/drawing/2014/main" id="{D546C78E-1BAE-4A1A-A014-5E27936F55E4}"/>
+              </a:ext>
+            </a:extLst>
+          </p:cNvPr>
+          <p:cNvSpPr>
+            <a:spLocks xmlns:a="http://schemas.openxmlformats.org/drawingml/2006/main" noGrp="1"/>
+          </p:cNvSpPr>
+          <p:nvPr/>
+        </p:nvSpPr>
+        <p:spPr>
+          <a:xfrm xmlns:a="http://schemas.openxmlformats.org/drawingml/2006/main" flipH="0" flipV="0">
+            <a:off x="4192587" y="2009775"/>
+            <a:ext cx="822325" cy="0"/>
+          </a:xfrm>
+          <a:prstGeom xmlns:a="http://schemas.openxmlformats.org/drawingml/2006/main" prst="line">
+            <a:avLst/>
+          </a:prstGeom>
+          <a:noFill xmlns:a="http://schemas.openxmlformats.org/drawingml/2006/main"/>
+          <a:ln xmlns:a="http://schemas.openxmlformats.org/drawingml/2006/main" w="23813">
+            <a:solidFill>
+              <a:srgbClr val="7C8A9A"/>
+            </a:solidFill>
+            <a:prstDash val="solid"/>
+          </a:ln>
+        </p:spPr>
+      </p:sp>
+      <p:sp>
+        <p:nvSpPr>
+          <p:cNvPr id="13" name="">
+            <a:extLst xmlns:a="http://schemas.openxmlformats.org/drawingml/2006/main">
+              <a:ext uri="{FF2B5EF4-FFF2-40B4-BE49-F238E27FC236}">
+                <a16:creationId xmlns:a16="http://schemas.microsoft.com/office/drawing/2014/main" id="{7B138C0F-79BD-4451-BAD4-C814A48EE9A6}"/>
+              </a:ext>
+            </a:extLst>
+          </p:cNvPr>
+          <p:cNvSpPr>
+            <a:spLocks xmlns:a="http://schemas.openxmlformats.org/drawingml/2006/main" noGrp="1"/>
+          </p:cNvSpPr>
+          <p:nvPr/>
+        </p:nvSpPr>
+        <p:spPr>
+          <a:xfrm xmlns:a="http://schemas.openxmlformats.org/drawingml/2006/main" flipH="0" flipV="0">
+            <a:off x="7415213" y="2009775"/>
+            <a:ext cx="822325" cy="0"/>
+          </a:xfrm>
+          <a:prstGeom xmlns:a="http://schemas.openxmlformats.org/drawingml/2006/main" prst="line">
+            <a:avLst/>
+          </a:prstGeom>
+          <a:noFill xmlns:a="http://schemas.openxmlformats.org/drawingml/2006/main"/>
+          <a:ln xmlns:a="http://schemas.openxmlformats.org/drawingml/2006/main" w="23813">
+            <a:solidFill>
+              <a:srgbClr val="7C8A9A"/>
+            </a:solidFill>
+            <a:prstDash val="solid"/>
+          </a:ln>
+        </p:spPr>
+      </p:sp>
+      <p:sp>
+        <p:nvSpPr>
+          <p:cNvPr id="14" name="">
+            <a:extLst xmlns:a="http://schemas.openxmlformats.org/drawingml/2006/main">
+              <a:ext uri="{FF2B5EF4-FFF2-40B4-BE49-F238E27FC236}">
+                <a16:creationId xmlns:a16="http://schemas.microsoft.com/office/drawing/2014/main" id="{CA9B51F3-5055-43B6-B2B8-C51CB7554ED6}"/>
+              </a:ext>
+            </a:extLst>
+          </p:cNvPr>
+          <p:cNvSpPr>
+            <a:spLocks xmlns:a="http://schemas.openxmlformats.org/drawingml/2006/main" noGrp="1"/>
+          </p:cNvSpPr>
+          <p:nvPr/>
+        </p:nvSpPr>
+        <p:spPr>
+          <a:xfrm xmlns:a="http://schemas.openxmlformats.org/drawingml/2006/main" flipH="1" flipV="0">
+            <a:off x="1792288" y="2009775"/>
+            <a:ext cx="8845550" cy="1066800"/>
+          </a:xfrm>
+          <a:prstGeom xmlns:a="http://schemas.openxmlformats.org/drawingml/2006/main" prst="line">
+            <a:avLst/>
+          </a:prstGeom>
+          <a:noFill xmlns:a="http://schemas.openxmlformats.org/drawingml/2006/main"/>
+          <a:ln xmlns:a="http://schemas.openxmlformats.org/drawingml/2006/main" w="23813">
+            <a:solidFill>
+              <a:srgbClr val="7C8A9A"/>
+            </a:solidFill>
+            <a:prstDash val="solid"/>
+          </a:ln>
+        </p:spPr>
+      </p:sp>
+      <p:sp>
+        <p:nvSpPr>
+          <p:cNvPr id="15" name="">
+            <a:extLst xmlns:a="http://schemas.openxmlformats.org/drawingml/2006/main">
+              <a:ext uri="{FF2B5EF4-FFF2-40B4-BE49-F238E27FC236}">
+                <a16:creationId xmlns:a16="http://schemas.microsoft.com/office/drawing/2014/main" id="{0356BDB2-1C72-4EDF-B933-6F3CA4B5FC0D}"/>
+              </a:ext>
+            </a:extLst>
+          </p:cNvPr>
+          <p:cNvSpPr>
+            <a:spLocks xmlns:a="http://schemas.openxmlformats.org/drawingml/2006/main" noGrp="1"/>
+          </p:cNvSpPr>
+          <p:nvPr/>
+        </p:nvSpPr>
+        <p:spPr>
+          <a:xfrm xmlns:a="http://schemas.openxmlformats.org/drawingml/2006/main" flipH="0" flipV="0">
+            <a:off x="4192587" y="3076575"/>
+            <a:ext cx="822325" cy="0"/>
+          </a:xfrm>
+          <a:prstGeom xmlns:a="http://schemas.openxmlformats.org/drawingml/2006/main" prst="line">
+            <a:avLst/>
+          </a:prstGeom>
+          <a:noFill xmlns:a="http://schemas.openxmlformats.org/drawingml/2006/main"/>
+          <a:ln xmlns:a="http://schemas.openxmlformats.org/drawingml/2006/main" w="23813">
+            <a:solidFill>
+              <a:srgbClr val="7C8A9A"/>
+            </a:solidFill>
+            <a:prstDash val="solid"/>
+          </a:ln>
+        </p:spPr>
+      </p:sp>
+      <p:sp>
+        <p:nvSpPr>
+          <p:cNvPr id="16" name="">
+            <a:extLst xmlns:a="http://schemas.openxmlformats.org/drawingml/2006/main">
+              <a:ext uri="{FF2B5EF4-FFF2-40B4-BE49-F238E27FC236}">
+                <a16:creationId xmlns:a16="http://schemas.microsoft.com/office/drawing/2014/main" id="{B028C132-6A61-4F3E-B8E0-C87317466EE8}"/>
+              </a:ext>
+            </a:extLst>
+          </p:cNvPr>
+          <p:cNvSpPr>
+            <a:spLocks xmlns:a="http://schemas.openxmlformats.org/drawingml/2006/main" noGrp="1"/>
+          </p:cNvSpPr>
+          <p:nvPr/>
+        </p:nvSpPr>
+        <p:spPr>
+          <a:xfrm xmlns:a="http://schemas.openxmlformats.org/drawingml/2006/main" flipH="0" flipV="0">
+            <a:off x="7415213" y="3076575"/>
+            <a:ext cx="822325" cy="0"/>
+          </a:xfrm>
+          <a:prstGeom xmlns:a="http://schemas.openxmlformats.org/drawingml/2006/main" prst="line">
+            <a:avLst/>
+          </a:prstGeom>
+          <a:noFill xmlns:a="http://schemas.openxmlformats.org/drawingml/2006/main"/>
+          <a:ln xmlns:a="http://schemas.openxmlformats.org/drawingml/2006/main" w="23813">
+            <a:solidFill>
+              <a:srgbClr val="7C8A9A"/>
+            </a:solidFill>
+            <a:prstDash val="solid"/>
+          </a:ln>
+        </p:spPr>
+      </p:sp>
+      <p:sp>
+        <p:nvSpPr>
+          <p:cNvPr id="17" name="">
+            <a:extLst xmlns:a="http://schemas.openxmlformats.org/drawingml/2006/main">
+              <a:ext uri="{FF2B5EF4-FFF2-40B4-BE49-F238E27FC236}">
+                <a16:creationId xmlns:a16="http://schemas.microsoft.com/office/drawing/2014/main" id="{105CC7F2-15D6-4387-9BDE-BA209F6E2CB8}"/>
+              </a:ext>
+            </a:extLst>
+          </p:cNvPr>
+          <p:cNvSpPr>
+            <a:spLocks xmlns:a="http://schemas.openxmlformats.org/drawingml/2006/main" noGrp="1"/>
+          </p:cNvSpPr>
+          <p:nvPr/>
+        </p:nvSpPr>
+        <p:spPr>
+          <a:xfrm xmlns:a="http://schemas.openxmlformats.org/drawingml/2006/main" flipH="1" flipV="0">
+            <a:off x="1792288" y="3076575"/>
+            <a:ext cx="8845550" cy="1066800"/>
+          </a:xfrm>
+          <a:prstGeom xmlns:a="http://schemas.openxmlformats.org/drawingml/2006/main" prst="line">
+            <a:avLst/>
+          </a:prstGeom>
+          <a:noFill xmlns:a="http://schemas.openxmlformats.org/drawingml/2006/main"/>
+          <a:ln xmlns:a="http://schemas.openxmlformats.org/drawingml/2006/main" w="23813">
+            <a:solidFill>
+              <a:srgbClr val="7C8A9A"/>
+            </a:solidFill>
+            <a:prstDash val="solid"/>
+          </a:ln>
+        </p:spPr>
+      </p:sp>
+      <p:sp>
+        <p:nvSpPr>
+          <p:cNvPr id="18" name="">
+            <a:extLst xmlns:a="http://schemas.openxmlformats.org/drawingml/2006/main">
+              <a:ext uri="{FF2B5EF4-FFF2-40B4-BE49-F238E27FC236}">
+                <a16:creationId xmlns:a16="http://schemas.microsoft.com/office/drawing/2014/main" id="{236D11EF-1291-4FB8-A918-13B09074F5BD}"/>
+              </a:ext>
+            </a:extLst>
+          </p:cNvPr>
+          <p:cNvSpPr>
+            <a:spLocks xmlns:a="http://schemas.openxmlformats.org/drawingml/2006/main" noGrp="1"/>
+          </p:cNvSpPr>
+          <p:nvPr/>
+        </p:nvSpPr>
+        <p:spPr>
+          <a:xfrm xmlns:a="http://schemas.openxmlformats.org/drawingml/2006/main" flipH="0" flipV="0">
+            <a:off x="4192587" y="4143375"/>
+            <a:ext cx="822325" cy="0"/>
+          </a:xfrm>
+          <a:prstGeom xmlns:a="http://schemas.openxmlformats.org/drawingml/2006/main" prst="line">
+            <a:avLst/>
+          </a:prstGeom>
+          <a:noFill xmlns:a="http://schemas.openxmlformats.org/drawingml/2006/main"/>
+          <a:ln xmlns:a="http://schemas.openxmlformats.org/drawingml/2006/main" w="23813">
+            <a:solidFill>
+              <a:srgbClr val="7C8A9A"/>
+            </a:solidFill>
+            <a:prstDash val="solid"/>
+          </a:ln>
+        </p:spPr>
+      </p:sp>
+      <p:sp>
+        <p:nvSpPr>
+          <p:cNvPr id="19" name="">
+            <a:extLst xmlns:a="http://schemas.openxmlformats.org/drawingml/2006/main">
+              <a:ext uri="{FF2B5EF4-FFF2-40B4-BE49-F238E27FC236}">
+                <a16:creationId xmlns:a16="http://schemas.microsoft.com/office/drawing/2014/main" id="{9A30B1A1-F321-4C91-825C-AC24E2C601A6}"/>
+              </a:ext>
+            </a:extLst>
+          </p:cNvPr>
+          <p:cNvSpPr>
+            <a:spLocks xmlns:a="http://schemas.openxmlformats.org/drawingml/2006/main" noGrp="1"/>
+          </p:cNvSpPr>
+          <p:nvPr/>
+        </p:nvSpPr>
+        <p:spPr>
+          <a:xfrm xmlns:a="http://schemas.openxmlformats.org/drawingml/2006/main" flipH="0" flipV="0">
+            <a:off x="7415213" y="4143375"/>
+            <a:ext cx="822325" cy="0"/>
+          </a:xfrm>
+          <a:prstGeom xmlns:a="http://schemas.openxmlformats.org/drawingml/2006/main" prst="line">
+            <a:avLst/>
+          </a:prstGeom>
+          <a:noFill xmlns:a="http://schemas.openxmlformats.org/drawingml/2006/main"/>
+          <a:ln xmlns:a="http://schemas.openxmlformats.org/drawingml/2006/main" w="23813">
+            <a:solidFill>
+              <a:srgbClr val="7C8A9A"/>
+            </a:solidFill>
+            <a:prstDash val="solid"/>
+          </a:ln>
+        </p:spPr>
+      </p:sp>
+      <p:sp>
+        <p:nvSpPr>
+          <p:cNvPr id="20" name="PPAGENT_QA|parent=swimlane-task-0|domains=swimlane-content">
+            <a:extLst xmlns:a="http://schemas.openxmlformats.org/drawingml/2006/main">
+              <a:ext uri="{FF2B5EF4-FFF2-40B4-BE49-F238E27FC236}">
+                <a16:creationId xmlns:a16="http://schemas.microsoft.com/office/drawing/2014/main" id="{8BB71AE0-E112-42CA-8D0E-31B9F188ECF6}"/>
+              </a:ext>
+            </a:extLst>
+          </p:cNvPr>
+          <p:cNvSpPr>
+            <a:spLocks xmlns:a="http://schemas.openxmlformats.org/drawingml/2006/main" noGrp="1"/>
+          </p:cNvSpPr>
+          <p:nvPr/>
+        </p:nvSpPr>
+        <p:spPr>
+          <a:xfrm xmlns:a="http://schemas.openxmlformats.org/drawingml/2006/main">
+            <a:off x="1792288" y="1619250"/>
+            <a:ext cx="2400300" cy="781050"/>
+          </a:xfrm>
+          <a:prstGeom xmlns:a="http://schemas.openxmlformats.org/drawingml/2006/main" prst="roundRect">
+            <a:avLst>
+              <a:gd name="adj" fmla="val 14634"/>
+            </a:avLst>
+          </a:prstGeom>
+          <a:solidFill xmlns:a="http://schemas.openxmlformats.org/drawingml/2006/main">
+            <a:srgbClr val="1677C8"/>
+          </a:solidFill>
+          <a:ln xmlns:a="http://schemas.openxmlformats.org/drawingml/2006/main" w="0">
+            <a:noFill/>
+            <a:prstDash val="solid"/>
+          </a:ln>
+        </p:spPr>
+        <p:style>
+          <a:lnRef xmlns:a="http://schemas.openxmlformats.org/drawingml/2006/main" idx="0"/>
+          <a:fillRef xmlns:a="http://schemas.openxmlformats.org/drawingml/2006/main" idx="0"/>
+          <a:effectRef xmlns:a="http://schemas.openxmlformats.org/drawingml/2006/main" idx="4"/>
+          <a:fontRef xmlns:a="http://schemas.openxmlformats.org/drawingml/2006/main" idx="major"/>
+        </p:style>
+        <p:txBody>
+          <a:bodyPr xmlns:a="http://schemas.openxmlformats.org/drawingml/2006/main" lIns="114300" tIns="76200" rIns="114300" bIns="76200" anchor="ctr">
+            <a:normAutofit fontScale="100000"/>
+          </a:bodyPr>
+          <a:lstStyle xmlns:a="http://schemas.openxmlformats.org/drawingml/2006/main"/>
+          <a:p xmlns:a="http://schemas.openxmlformats.org/drawingml/2006/main">
+            <a:pPr algn="ctr">
+              <a:defRPr sz="1350" b="1">
+                <a:solidFill>
+                  <a:srgbClr val="FFFFFF"/>
+                </a:solidFill>
+                <a:latin typeface="Microsoft YaHei"/>
+                <a:ea typeface="Microsoft YaHei"/>
+                <a:cs typeface="Microsoft YaHei"/>
+              </a:defRPr>
+            </a:pPr>
+            <a:r>
+              <a:rPr sz="1350" b="1">
+                <a:solidFill>
+                  <a:srgbClr val="FFFFFF"/>
+                </a:solidFill>
+                <a:latin typeface="Microsoft YaHei"/>
+                <a:ea typeface="Microsoft YaHei"/>
+                <a:cs typeface="Microsoft YaHei"/>
+              </a:rPr>
+              <a:t>拆解稿件</a:t>
+            </a:r>
+          </a:p>
+        </p:txBody>
+      </p:sp>
+      <p:sp>
+        <p:nvSpPr>
+          <p:cNvPr id="21" name="PPAGENT_QA|parent=swimlane-task-1|domains=swimlane-content">
+            <a:extLst xmlns:a="http://schemas.openxmlformats.org/drawingml/2006/main">
+              <a:ext uri="{FF2B5EF4-FFF2-40B4-BE49-F238E27FC236}">
+                <a16:creationId xmlns:a16="http://schemas.microsoft.com/office/drawing/2014/main" id="{1335FDB8-322B-4E7B-A59F-0D579363011E}"/>
+              </a:ext>
+            </a:extLst>
+          </p:cNvPr>
+          <p:cNvSpPr>
+            <a:spLocks xmlns:a="http://schemas.openxmlformats.org/drawingml/2006/main" noGrp="1"/>
+          </p:cNvSpPr>
+          <p:nvPr/>
+        </p:nvSpPr>
+        <p:spPr>
+          <a:xfrm xmlns:a="http://schemas.openxmlformats.org/drawingml/2006/main">
+            <a:off x="5014913" y="1619250"/>
+            <a:ext cx="2400300" cy="781050"/>
+          </a:xfrm>
+          <a:prstGeom xmlns:a="http://schemas.openxmlformats.org/drawingml/2006/main" prst="roundRect">
+            <a:avLst>
+              <a:gd name="adj" fmla="val 14634"/>
+            </a:avLst>
+          </a:prstGeom>
+          <a:solidFill xmlns:a="http://schemas.openxmlformats.org/drawingml/2006/main">
+            <a:srgbClr val="1677C8"/>
+          </a:solidFill>
+          <a:ln xmlns:a="http://schemas.openxmlformats.org/drawingml/2006/main" w="0">
+            <a:noFill/>
+            <a:prstDash val="solid"/>
+          </a:ln>
+        </p:spPr>
+        <p:style>
+          <a:lnRef xmlns:a="http://schemas.openxmlformats.org/drawingml/2006/main" idx="0"/>
+          <a:fillRef xmlns:a="http://schemas.openxmlformats.org/drawingml/2006/main" idx="0"/>
+          <a:effectRef xmlns:a="http://schemas.openxmlformats.org/drawingml/2006/main" idx="4"/>
+          <a:fontRef xmlns:a="http://schemas.openxmlformats.org/drawingml/2006/main" idx="major"/>
+        </p:style>
+        <p:txBody>
+          <a:bodyPr xmlns:a="http://schemas.openxmlformats.org/drawingml/2006/main" lIns="114300" tIns="76200" rIns="114300" bIns="76200" anchor="ctr">
+            <a:normAutofit fontScale="100000"/>
+          </a:bodyPr>
+          <a:lstStyle xmlns:a="http://schemas.openxmlformats.org/drawingml/2006/main"/>
+          <a:p xmlns:a="http://schemas.openxmlformats.org/drawingml/2006/main">
+            <a:pPr algn="ctr">
+              <a:defRPr sz="1350" b="1">
+                <a:solidFill>
+                  <a:srgbClr val="FFFFFF"/>
+                </a:solidFill>
+                <a:latin typeface="Microsoft YaHei"/>
+                <a:ea typeface="Microsoft YaHei"/>
+                <a:cs typeface="Microsoft YaHei"/>
+              </a:defRPr>
+            </a:pPr>
+            <a:r>
+              <a:rPr sz="1350" b="1">
+                <a:solidFill>
+                  <a:srgbClr val="FFFFFF"/>
+                </a:solidFill>
+                <a:latin typeface="Microsoft YaHei"/>
+                <a:ea typeface="Microsoft YaHei"/>
+                <a:cs typeface="Microsoft YaHei"/>
+              </a:rPr>
+              <a:t>确认页面内容</a:t>
+            </a:r>
+          </a:p>
+        </p:txBody>
+      </p:sp>
+      <p:sp>
+        <p:nvSpPr>
+          <p:cNvPr id="22" name="PPAGENT_QA|parent=swimlane-task-2|domains=swimlane-content">
+            <a:extLst xmlns:a="http://schemas.openxmlformats.org/drawingml/2006/main">
+              <a:ext uri="{FF2B5EF4-FFF2-40B4-BE49-F238E27FC236}">
+                <a16:creationId xmlns:a16="http://schemas.microsoft.com/office/drawing/2014/main" id="{64465742-553E-4293-8059-402DEFD872B5}"/>
+              </a:ext>
+            </a:extLst>
+          </p:cNvPr>
+          <p:cNvSpPr>
+            <a:spLocks xmlns:a="http://schemas.openxmlformats.org/drawingml/2006/main" noGrp="1"/>
+          </p:cNvSpPr>
+          <p:nvPr/>
+        </p:nvSpPr>
+        <p:spPr>
+          <a:xfrm xmlns:a="http://schemas.openxmlformats.org/drawingml/2006/main">
+            <a:off x="8237537" y="1619250"/>
+            <a:ext cx="2400300" cy="781050"/>
+          </a:xfrm>
+          <a:prstGeom xmlns:a="http://schemas.openxmlformats.org/drawingml/2006/main" prst="roundRect">
+            <a:avLst>
+              <a:gd name="adj" fmla="val 14634"/>
+            </a:avLst>
+          </a:prstGeom>
+          <a:solidFill xmlns:a="http://schemas.openxmlformats.org/drawingml/2006/main">
+            <a:srgbClr val="1677C8"/>
+          </a:solidFill>
+          <a:ln xmlns:a="http://schemas.openxmlformats.org/drawingml/2006/main" w="0">
+            <a:noFill/>
+            <a:prstDash val="solid"/>
+          </a:ln>
+        </p:spPr>
+        <p:style>
+          <a:lnRef xmlns:a="http://schemas.openxmlformats.org/drawingml/2006/main" idx="0"/>
+          <a:fillRef xmlns:a="http://schemas.openxmlformats.org/drawingml/2006/main" idx="0"/>
+          <a:effectRef xmlns:a="http://schemas.openxmlformats.org/drawingml/2006/main" idx="4"/>
+          <a:fontRef xmlns:a="http://schemas.openxmlformats.org/drawingml/2006/main" idx="major"/>
+        </p:style>
+        <p:txBody>
+          <a:bodyPr xmlns:a="http://schemas.openxmlformats.org/drawingml/2006/main" lIns="114300" tIns="76200" rIns="114300" bIns="76200" anchor="ctr">
+            <a:normAutofit fontScale="100000"/>
+          </a:bodyPr>
+          <a:lstStyle xmlns:a="http://schemas.openxmlformats.org/drawingml/2006/main"/>
+          <a:p xmlns:a="http://schemas.openxmlformats.org/drawingml/2006/main">
+            <a:pPr algn="ctr">
+              <a:defRPr sz="1350" b="1">
+                <a:solidFill>
+                  <a:srgbClr val="FFFFFF"/>
+                </a:solidFill>
+                <a:latin typeface="Microsoft YaHei"/>
+                <a:ea typeface="Microsoft YaHei"/>
+                <a:cs typeface="Microsoft YaHei"/>
+              </a:defRPr>
+            </a:pPr>
+            <a:r>
+              <a:rPr sz="1350" b="1">
+                <a:solidFill>
+                  <a:srgbClr val="FFFFFF"/>
+                </a:solidFill>
+                <a:latin typeface="Microsoft YaHei"/>
+                <a:ea typeface="Microsoft YaHei"/>
+                <a:cs typeface="Microsoft YaHei"/>
+              </a:rPr>
+              <a:t>内容验收</a:t>
+            </a:r>
+          </a:p>
+        </p:txBody>
+      </p:sp>
+      <p:sp>
+        <p:nvSpPr>
+          <p:cNvPr id="23" name="PPAGENT_QA|parent=swimlane-task-3|domains=swimlane-content">
+            <a:extLst xmlns:a="http://schemas.openxmlformats.org/drawingml/2006/main">
+              <a:ext uri="{FF2B5EF4-FFF2-40B4-BE49-F238E27FC236}">
+                <a16:creationId xmlns:a16="http://schemas.microsoft.com/office/drawing/2014/main" id="{A3F2F302-CFF6-4887-B4B5-D7C42B75CB8F}"/>
+              </a:ext>
+            </a:extLst>
+          </p:cNvPr>
+          <p:cNvSpPr>
+            <a:spLocks xmlns:a="http://schemas.openxmlformats.org/drawingml/2006/main" noGrp="1"/>
+          </p:cNvSpPr>
+          <p:nvPr/>
+        </p:nvSpPr>
+        <p:spPr>
+          <a:xfrm xmlns:a="http://schemas.openxmlformats.org/drawingml/2006/main">
+            <a:off x="1792288" y="2686050"/>
+            <a:ext cx="2400300" cy="781050"/>
+          </a:xfrm>
+          <a:prstGeom xmlns:a="http://schemas.openxmlformats.org/drawingml/2006/main" prst="roundRect">
+            <a:avLst>
+              <a:gd name="adj" fmla="val 14634"/>
+            </a:avLst>
+          </a:prstGeom>
+          <a:solidFill xmlns:a="http://schemas.openxmlformats.org/drawingml/2006/main">
+            <a:srgbClr val="00A8D8"/>
+          </a:solidFill>
+          <a:ln xmlns:a="http://schemas.openxmlformats.org/drawingml/2006/main" w="0">
+            <a:noFill/>
+            <a:prstDash val="solid"/>
+          </a:ln>
+        </p:spPr>
+        <p:style>
+          <a:lnRef xmlns:a="http://schemas.openxmlformats.org/drawingml/2006/main" idx="0"/>
+          <a:fillRef xmlns:a="http://schemas.openxmlformats.org/drawingml/2006/main" idx="0"/>
+          <a:effectRef xmlns:a="http://schemas.openxmlformats.org/drawingml/2006/main" idx="4"/>
+          <a:fontRef xmlns:a="http://schemas.openxmlformats.org/drawingml/2006/main" idx="major"/>
+        </p:style>
+        <p:txBody>
+          <a:bodyPr xmlns:a="http://schemas.openxmlformats.org/drawingml/2006/main" lIns="114300" tIns="76200" rIns="114300" bIns="76200" anchor="ctr">
+            <a:normAutofit fontScale="100000"/>
+          </a:bodyPr>
+          <a:lstStyle xmlns:a="http://schemas.openxmlformats.org/drawingml/2006/main"/>
+          <a:p xmlns:a="http://schemas.openxmlformats.org/drawingml/2006/main">
+            <a:pPr algn="ctr">
+              <a:defRPr sz="1350" b="1">
+                <a:solidFill>
+                  <a:srgbClr val="FFFFFF"/>
+                </a:solidFill>
+                <a:latin typeface="Microsoft YaHei"/>
+                <a:ea typeface="Microsoft YaHei"/>
+                <a:cs typeface="Microsoft YaHei"/>
+              </a:defRPr>
+            </a:pPr>
+            <a:r>
+              <a:rPr sz="1350" b="1">
+                <a:solidFill>
+                  <a:srgbClr val="FFFFFF"/>
+                </a:solidFill>
+                <a:latin typeface="Microsoft YaHei"/>
+                <a:ea typeface="Microsoft YaHei"/>
+                <a:cs typeface="Microsoft YaHei"/>
+              </a:rPr>
+              <a:t>判断视觉关系</a:t>
+            </a:r>
+          </a:p>
+        </p:txBody>
+      </p:sp>
+      <p:sp>
+        <p:nvSpPr>
+          <p:cNvPr id="24" name="PPAGENT_QA|parent=swimlane-task-4|domains=swimlane-content">
+            <a:extLst xmlns:a="http://schemas.openxmlformats.org/drawingml/2006/main">
+              <a:ext uri="{FF2B5EF4-FFF2-40B4-BE49-F238E27FC236}">
+                <a16:creationId xmlns:a16="http://schemas.microsoft.com/office/drawing/2014/main" id="{FE141CDF-39FE-4960-831D-6A4C1AAE53F5}"/>
+              </a:ext>
+            </a:extLst>
+          </p:cNvPr>
+          <p:cNvSpPr>
+            <a:spLocks xmlns:a="http://schemas.openxmlformats.org/drawingml/2006/main" noGrp="1"/>
+          </p:cNvSpPr>
+          <p:nvPr/>
+        </p:nvSpPr>
+        <p:spPr>
+          <a:xfrm xmlns:a="http://schemas.openxmlformats.org/drawingml/2006/main">
+            <a:off x="5014913" y="2686050"/>
+            <a:ext cx="2400300" cy="781050"/>
+          </a:xfrm>
+          <a:prstGeom xmlns:a="http://schemas.openxmlformats.org/drawingml/2006/main" prst="roundRect">
+            <a:avLst>
+              <a:gd name="adj" fmla="val 14634"/>
+            </a:avLst>
+          </a:prstGeom>
+          <a:solidFill xmlns:a="http://schemas.openxmlformats.org/drawingml/2006/main">
+            <a:srgbClr val="00A8D8"/>
+          </a:solidFill>
+          <a:ln xmlns:a="http://schemas.openxmlformats.org/drawingml/2006/main" w="0">
+            <a:noFill/>
+            <a:prstDash val="solid"/>
+          </a:ln>
+        </p:spPr>
+        <p:style>
+          <a:lnRef xmlns:a="http://schemas.openxmlformats.org/drawingml/2006/main" idx="0"/>
+          <a:fillRef xmlns:a="http://schemas.openxmlformats.org/drawingml/2006/main" idx="0"/>
+          <a:effectRef xmlns:a="http://schemas.openxmlformats.org/drawingml/2006/main" idx="4"/>
+          <a:fontRef xmlns:a="http://schemas.openxmlformats.org/drawingml/2006/main" idx="major"/>
+        </p:style>
+        <p:txBody>
+          <a:bodyPr xmlns:a="http://schemas.openxmlformats.org/drawingml/2006/main" lIns="114300" tIns="76200" rIns="114300" bIns="76200" anchor="ctr">
+            <a:normAutofit fontScale="100000"/>
+          </a:bodyPr>
+          <a:lstStyle xmlns:a="http://schemas.openxmlformats.org/drawingml/2006/main"/>
+          <a:p xmlns:a="http://schemas.openxmlformats.org/drawingml/2006/main">
+            <a:pPr algn="ctr">
+              <a:defRPr sz="1350" b="1">
+                <a:solidFill>
+                  <a:srgbClr val="FFFFFF"/>
+                </a:solidFill>
+                <a:latin typeface="Microsoft YaHei"/>
+                <a:ea typeface="Microsoft YaHei"/>
+                <a:cs typeface="Microsoft YaHei"/>
+              </a:defRPr>
+            </a:pPr>
+            <a:r>
+              <a:rPr sz="1350" b="1">
+                <a:solidFill>
+                  <a:srgbClr val="FFFFFF"/>
+                </a:solidFill>
+                <a:latin typeface="Microsoft YaHei"/>
+                <a:ea typeface="Microsoft YaHei"/>
+                <a:cs typeface="Microsoft YaHei"/>
+              </a:rPr>
+              <a:t>选择 Style Group</a:t>
+            </a:r>
+          </a:p>
+        </p:txBody>
+      </p:sp>
+      <p:sp>
+        <p:nvSpPr>
+          <p:cNvPr id="25" name="PPAGENT_QA|parent=swimlane-task-5|domains=swimlane-content">
+            <a:extLst xmlns:a="http://schemas.openxmlformats.org/drawingml/2006/main">
+              <a:ext uri="{FF2B5EF4-FFF2-40B4-BE49-F238E27FC236}">
+                <a16:creationId xmlns:a16="http://schemas.microsoft.com/office/drawing/2014/main" id="{8236908A-6506-4005-B090-219A308CB4E1}"/>
+              </a:ext>
+            </a:extLst>
+          </p:cNvPr>
+          <p:cNvSpPr>
+            <a:spLocks xmlns:a="http://schemas.openxmlformats.org/drawingml/2006/main" noGrp="1"/>
+          </p:cNvSpPr>
+          <p:nvPr/>
+        </p:nvSpPr>
+        <p:spPr>
+          <a:xfrm xmlns:a="http://schemas.openxmlformats.org/drawingml/2006/main">
+            <a:off x="8237537" y="2686050"/>
+            <a:ext cx="2400300" cy="781050"/>
+          </a:xfrm>
+          <a:prstGeom xmlns:a="http://schemas.openxmlformats.org/drawingml/2006/main" prst="roundRect">
+            <a:avLst>
+              <a:gd name="adj" fmla="val 14634"/>
+            </a:avLst>
+          </a:prstGeom>
+          <a:solidFill xmlns:a="http://schemas.openxmlformats.org/drawingml/2006/main">
+            <a:srgbClr val="00A8D8"/>
+          </a:solidFill>
+          <a:ln xmlns:a="http://schemas.openxmlformats.org/drawingml/2006/main" w="0">
+            <a:noFill/>
+            <a:prstDash val="solid"/>
+          </a:ln>
+        </p:spPr>
+        <p:style>
+          <a:lnRef xmlns:a="http://schemas.openxmlformats.org/drawingml/2006/main" idx="0"/>
+          <a:fillRef xmlns:a="http://schemas.openxmlformats.org/drawingml/2006/main" idx="0"/>
+          <a:effectRef xmlns:a="http://schemas.openxmlformats.org/drawingml/2006/main" idx="4"/>
+          <a:fontRef xmlns:a="http://schemas.openxmlformats.org/drawingml/2006/main" idx="major"/>
+        </p:style>
+        <p:txBody>
+          <a:bodyPr xmlns:a="http://schemas.openxmlformats.org/drawingml/2006/main" lIns="114300" tIns="76200" rIns="114300" bIns="76200" anchor="ctr">
+            <a:normAutofit fontScale="100000"/>
+          </a:bodyPr>
+          <a:lstStyle xmlns:a="http://schemas.openxmlformats.org/drawingml/2006/main"/>
+          <a:p xmlns:a="http://schemas.openxmlformats.org/drawingml/2006/main">
+            <a:pPr algn="ctr">
+              <a:defRPr sz="1350" b="1">
+                <a:solidFill>
+                  <a:srgbClr val="FFFFFF"/>
+                </a:solidFill>
+                <a:latin typeface="Microsoft YaHei"/>
+                <a:ea typeface="Microsoft YaHei"/>
+                <a:cs typeface="Microsoft YaHei"/>
+              </a:defRPr>
+            </a:pPr>
+            <a:r>
+              <a:rPr sz="1350" b="1">
+                <a:solidFill>
+                  <a:srgbClr val="FFFFFF"/>
+                </a:solidFill>
+                <a:latin typeface="Microsoft YaHei"/>
+                <a:ea typeface="Microsoft YaHei"/>
+                <a:cs typeface="Microsoft YaHei"/>
+              </a:rPr>
+              <a:t>视觉验收</a:t>
+            </a:r>
+          </a:p>
+        </p:txBody>
+      </p:sp>
+      <p:sp>
+        <p:nvSpPr>
+          <p:cNvPr id="26" name="PPAGENT_QA|parent=swimlane-task-6|domains=swimlane-content">
+            <a:extLst xmlns:a="http://schemas.openxmlformats.org/drawingml/2006/main">
+              <a:ext uri="{FF2B5EF4-FFF2-40B4-BE49-F238E27FC236}">
+                <a16:creationId xmlns:a16="http://schemas.microsoft.com/office/drawing/2014/main" id="{20E9FBDC-1CB0-4E3D-A06D-8901A713C66C}"/>
+              </a:ext>
+            </a:extLst>
+          </p:cNvPr>
+          <p:cNvSpPr>
+            <a:spLocks xmlns:a="http://schemas.openxmlformats.org/drawingml/2006/main" noGrp="1"/>
+          </p:cNvSpPr>
+          <p:nvPr/>
+        </p:nvSpPr>
+        <p:spPr>
+          <a:xfrm xmlns:a="http://schemas.openxmlformats.org/drawingml/2006/main">
+            <a:off x="1792288" y="3752850"/>
+            <a:ext cx="2400300" cy="781050"/>
+          </a:xfrm>
+          <a:prstGeom xmlns:a="http://schemas.openxmlformats.org/drawingml/2006/main" prst="roundRect">
+            <a:avLst>
+              <a:gd name="adj" fmla="val 14634"/>
+            </a:avLst>
+          </a:prstGeom>
+          <a:solidFill xmlns:a="http://schemas.openxmlformats.org/drawingml/2006/main">
+            <a:srgbClr val="1677C8"/>
+          </a:solidFill>
+          <a:ln xmlns:a="http://schemas.openxmlformats.org/drawingml/2006/main" w="0">
+            <a:noFill/>
+            <a:prstDash val="solid"/>
+          </a:ln>
+        </p:spPr>
+        <p:style>
+          <a:lnRef xmlns:a="http://schemas.openxmlformats.org/drawingml/2006/main" idx="0"/>
+          <a:fillRef xmlns:a="http://schemas.openxmlformats.org/drawingml/2006/main" idx="0"/>
+          <a:effectRef xmlns:a="http://schemas.openxmlformats.org/drawingml/2006/main" idx="4"/>
+          <a:fontRef xmlns:a="http://schemas.openxmlformats.org/drawingml/2006/main" idx="major"/>
+        </p:style>
+        <p:txBody>
+          <a:bodyPr xmlns:a="http://schemas.openxmlformats.org/drawingml/2006/main" lIns="114300" tIns="76200" rIns="114300" bIns="76200" anchor="ctr">
+            <a:normAutofit fontScale="100000"/>
+          </a:bodyPr>
+          <a:lstStyle xmlns:a="http://schemas.openxmlformats.org/drawingml/2006/main"/>
+          <a:p xmlns:a="http://schemas.openxmlformats.org/drawingml/2006/main">
+            <a:pPr algn="ctr">
+              <a:defRPr sz="1350" b="1">
+                <a:solidFill>
+                  <a:srgbClr val="FFFFFF"/>
+                </a:solidFill>
+                <a:latin typeface="Microsoft YaHei"/>
+                <a:ea typeface="Microsoft YaHei"/>
+                <a:cs typeface="Microsoft YaHei"/>
+              </a:defRPr>
+            </a:pPr>
+            <a:r>
+              <a:rPr sz="1350" b="1">
+                <a:solidFill>
+                  <a:srgbClr val="FFFFFF"/>
+                </a:solidFill>
+                <a:latin typeface="Microsoft YaHei"/>
+                <a:ea typeface="Microsoft YaHei"/>
+                <a:cs typeface="Microsoft YaHei"/>
+              </a:rPr>
+              <a:t>准备运行参数</a:t>
+            </a:r>
+          </a:p>
+        </p:txBody>
+      </p:sp>
+      <p:sp>
+        <p:nvSpPr>
+          <p:cNvPr id="27" name="PPAGENT_QA|parent=swimlane-task-7|domains=swimlane-content">
+            <a:extLst xmlns:a="http://schemas.openxmlformats.org/drawingml/2006/main">
+              <a:ext uri="{FF2B5EF4-FFF2-40B4-BE49-F238E27FC236}">
+                <a16:creationId xmlns:a16="http://schemas.microsoft.com/office/drawing/2014/main" id="{FBEF50EC-FD1D-4766-A5FD-827C65716307}"/>
+              </a:ext>
+            </a:extLst>
+          </p:cNvPr>
+          <p:cNvSpPr>
+            <a:spLocks xmlns:a="http://schemas.openxmlformats.org/drawingml/2006/main" noGrp="1"/>
+          </p:cNvSpPr>
+          <p:nvPr/>
+        </p:nvSpPr>
+        <p:spPr>
+          <a:xfrm xmlns:a="http://schemas.openxmlformats.org/drawingml/2006/main">
+            <a:off x="5014913" y="3752850"/>
+            <a:ext cx="2400300" cy="781050"/>
+          </a:xfrm>
+          <a:prstGeom xmlns:a="http://schemas.openxmlformats.org/drawingml/2006/main" prst="roundRect">
+            <a:avLst>
+              <a:gd name="adj" fmla="val 14634"/>
+            </a:avLst>
+          </a:prstGeom>
+          <a:solidFill xmlns:a="http://schemas.openxmlformats.org/drawingml/2006/main">
+            <a:srgbClr val="1677C8"/>
+          </a:solidFill>
+          <a:ln xmlns:a="http://schemas.openxmlformats.org/drawingml/2006/main" w="0">
+            <a:noFill/>
+            <a:prstDash val="solid"/>
+          </a:ln>
+        </p:spPr>
+        <p:style>
+          <a:lnRef xmlns:a="http://schemas.openxmlformats.org/drawingml/2006/main" idx="0"/>
+          <a:fillRef xmlns:a="http://schemas.openxmlformats.org/drawingml/2006/main" idx="0"/>
+          <a:effectRef xmlns:a="http://schemas.openxmlformats.org/drawingml/2006/main" idx="4"/>
+          <a:fontRef xmlns:a="http://schemas.openxmlformats.org/drawingml/2006/main" idx="major"/>
+        </p:style>
+        <p:txBody>
+          <a:bodyPr xmlns:a="http://schemas.openxmlformats.org/drawingml/2006/main" lIns="114300" tIns="76200" rIns="114300" bIns="76200" anchor="ctr">
+            <a:normAutofit fontScale="100000"/>
+          </a:bodyPr>
+          <a:lstStyle xmlns:a="http://schemas.openxmlformats.org/drawingml/2006/main"/>
+          <a:p xmlns:a="http://schemas.openxmlformats.org/drawingml/2006/main">
+            <a:pPr algn="ctr">
+              <a:defRPr sz="1350" b="1">
+                <a:solidFill>
+                  <a:srgbClr val="FFFFFF"/>
+                </a:solidFill>
+                <a:latin typeface="Microsoft YaHei"/>
+                <a:ea typeface="Microsoft YaHei"/>
+                <a:cs typeface="Microsoft YaHei"/>
+              </a:defRPr>
+            </a:pPr>
+            <a:r>
+              <a:rPr sz="1350" b="1">
+                <a:solidFill>
+                  <a:srgbClr val="FFFFFF"/>
+                </a:solidFill>
+                <a:latin typeface="Microsoft YaHei"/>
+                <a:ea typeface="Microsoft YaHei"/>
+                <a:cs typeface="Microsoft YaHei"/>
+              </a:rPr>
+              <a:t>生成原生 PPT</a:t>
+            </a:r>
+          </a:p>
+        </p:txBody>
+      </p:sp>
+      <p:sp>
+        <p:nvSpPr>
+          <p:cNvPr id="28" name="PPAGENT_QA|parent=swimlane-task-8|domains=swimlane-content">
+            <a:extLst xmlns:a="http://schemas.openxmlformats.org/drawingml/2006/main">
+              <a:ext uri="{FF2B5EF4-FFF2-40B4-BE49-F238E27FC236}">
+                <a16:creationId xmlns:a16="http://schemas.microsoft.com/office/drawing/2014/main" id="{FB32D9D6-22E5-4836-BF64-637B3FC65AD7}"/>
+              </a:ext>
+            </a:extLst>
+          </p:cNvPr>
+          <p:cNvSpPr>
+            <a:spLocks xmlns:a="http://schemas.openxmlformats.org/drawingml/2006/main" noGrp="1"/>
+          </p:cNvSpPr>
+          <p:nvPr/>
+        </p:nvSpPr>
+        <p:spPr>
+          <a:xfrm xmlns:a="http://schemas.openxmlformats.org/drawingml/2006/main">
+            <a:off x="8237537" y="3752850"/>
+            <a:ext cx="2400300" cy="781050"/>
+          </a:xfrm>
+          <a:prstGeom xmlns:a="http://schemas.openxmlformats.org/drawingml/2006/main" prst="roundRect">
+            <a:avLst>
+              <a:gd name="adj" fmla="val 14634"/>
+            </a:avLst>
+          </a:prstGeom>
+          <a:solidFill xmlns:a="http://schemas.openxmlformats.org/drawingml/2006/main">
+            <a:srgbClr val="1677C8"/>
+          </a:solidFill>
+          <a:ln xmlns:a="http://schemas.openxmlformats.org/drawingml/2006/main" w="0">
+            <a:noFill/>
+            <a:prstDash val="solid"/>
+          </a:ln>
+        </p:spPr>
+        <p:style>
+          <a:lnRef xmlns:a="http://schemas.openxmlformats.org/drawingml/2006/main" idx="0"/>
+          <a:fillRef xmlns:a="http://schemas.openxmlformats.org/drawingml/2006/main" idx="0"/>
+          <a:effectRef xmlns:a="http://schemas.openxmlformats.org/drawingml/2006/main" idx="4"/>
+          <a:fontRef xmlns:a="http://schemas.openxmlformats.org/drawingml/2006/main" idx="major"/>
+        </p:style>
+        <p:txBody>
+          <a:bodyPr xmlns:a="http://schemas.openxmlformats.org/drawingml/2006/main" lIns="114300" tIns="76200" rIns="114300" bIns="76200" anchor="ctr">
+            <a:normAutofit fontScale="100000"/>
+          </a:bodyPr>
+          <a:lstStyle xmlns:a="http://schemas.openxmlformats.org/drawingml/2006/main"/>
+          <a:p xmlns:a="http://schemas.openxmlformats.org/drawingml/2006/main">
+            <a:pPr algn="ctr">
+              <a:defRPr sz="1350" b="1">
+                <a:solidFill>
+                  <a:srgbClr val="FFFFFF"/>
+                </a:solidFill>
+                <a:latin typeface="Microsoft YaHei"/>
+                <a:ea typeface="Microsoft YaHei"/>
+                <a:cs typeface="Microsoft YaHei"/>
+              </a:defRPr>
+            </a:pPr>
+            <a:r>
+              <a:rPr sz="1350" b="1">
+                <a:solidFill>
+                  <a:srgbClr val="FFFFFF"/>
+                </a:solidFill>
+                <a:latin typeface="Microsoft YaHei"/>
+                <a:ea typeface="Microsoft YaHei"/>
+                <a:cs typeface="Microsoft YaHei"/>
+              </a:rPr>
+              <a:t>交付文件</a:t>
+            </a:r>
+          </a:p>
+        </p:txBody>
+      </p:sp>
+      <p:sp>
+        <p:nvSpPr>
+          <p:cNvPr id="29" name="PPAGENT_QA|parent=swimlane-conclusion|domains=swimlane-content">
+            <a:extLst xmlns:a="http://schemas.openxmlformats.org/drawingml/2006/main">
+              <a:ext uri="{FF2B5EF4-FFF2-40B4-BE49-F238E27FC236}">
+                <a16:creationId xmlns:a16="http://schemas.microsoft.com/office/drawing/2014/main" id="{D6A16638-61EF-4BA4-AAF2-49E97A762685}"/>
+              </a:ext>
+            </a:extLst>
+          </p:cNvPr>
+          <p:cNvSpPr>
+            <a:spLocks xmlns:a="http://schemas.openxmlformats.org/drawingml/2006/main" noGrp="1"/>
+          </p:cNvSpPr>
+          <p:nvPr/>
+        </p:nvSpPr>
+        <p:spPr>
+          <a:xfrm xmlns:a="http://schemas.openxmlformats.org/drawingml/2006/main">
+            <a:off x="1381125" y="4953000"/>
+            <a:ext cx="9667875" cy="1028700"/>
+          </a:xfrm>
+          <a:prstGeom xmlns:a="http://schemas.openxmlformats.org/drawingml/2006/main" prst="roundRect">
+            <a:avLst>
+              <a:gd name="adj" fmla="val 11111"/>
+            </a:avLst>
+          </a:prstGeom>
+          <a:solidFill xmlns:a="http://schemas.openxmlformats.org/drawingml/2006/main">
+            <a:srgbClr val="EAF2FD"/>
+          </a:solidFill>
+          <a:ln xmlns:a="http://schemas.openxmlformats.org/drawingml/2006/main" w="14288">
+            <a:solidFill>
+              <a:srgbClr val="1677C8"/>
+            </a:solidFill>
+            <a:prstDash val="solid"/>
+          </a:ln>
+        </p:spPr>
+        <p:txBody>
+          <a:bodyPr xmlns:a="http://schemas.openxmlformats.org/drawingml/2006/main" lIns="114300" tIns="76200" rIns="114300" bIns="76200" anchor="ctr">
+            <a:normAutofit fontScale="100000"/>
+          </a:bodyPr>
+          <a:lstStyle xmlns:a="http://schemas.openxmlformats.org/drawingml/2006/main"/>
+          <a:p xmlns:a="http://schemas.openxmlformats.org/drawingml/2006/main">
+            <a:pPr algn="ctr">
+              <a:defRPr sz="1350" b="1">
+                <a:solidFill>
+                  <a:srgbClr val="1677C8"/>
+                </a:solidFill>
+                <a:latin typeface="Microsoft YaHei"/>
+                <a:ea typeface="Microsoft YaHei"/>
+                <a:cs typeface="Microsoft YaHei"/>
+              </a:defRPr>
+            </a:pPr>
+            <a:r>
+              <a:rPr sz="1350" b="1">
+                <a:solidFill>
+                  <a:srgbClr val="1677C8"/>
+                </a:solidFill>
+                <a:latin typeface="Microsoft YaHei"/>
+                <a:ea typeface="Microsoft YaHei"/>
+                <a:cs typeface="Microsoft YaHei"/>
+              </a:rPr>
+              <a:t>协同结论</a:t>
+            </a:r>
+          </a:p>
+          <a:p xmlns:a="http://schemas.openxmlformats.org/drawingml/2006/main">
+            <a:pPr algn="ctr">
+              <a:defRPr sz="1350" b="1">
+                <a:solidFill>
+                  <a:srgbClr val="1677C8"/>
+                </a:solidFill>
+                <a:latin typeface="Microsoft YaHei"/>
+                <a:ea typeface="Microsoft YaHei"/>
+                <a:cs typeface="Microsoft YaHei"/>
+              </a:defRPr>
+            </a:pPr>
+            <a:r>
+              <a:rPr sz="1350" b="1">
+                <a:solidFill>
+                  <a:srgbClr val="1677C8"/>
+                </a:solidFill>
+                <a:latin typeface="Microsoft YaHei"/>
+                <a:ea typeface="Microsoft YaHei"/>
+                <a:cs typeface="Microsoft YaHei"/>
+              </a:rPr>
+              <a:t>角色边界清楚，信息能够回流</a:t>
+            </a:r>
+          </a:p>
+        </p:txBody>
+      </p:sp>
+    </p:spTree>
+    <p:extLst>
+      <p:ext uri="{BB962C8B-B14F-4D97-AF65-F5344CB8AC3E}">
+        <p14:creationId xmlns:p14="http://schemas.microsoft.com/office/powerpoint/2010/main" val="930934223"/>
       </p:ext>
     </p:extLst>
   </p:cSld>
